--- a/submission/Security-Auto-ATH.pptx
+++ b/submission/Security-Auto-ATH.pptx
@@ -6984,7 +6984,7 @@
         <p:spPr>
           <a:xfrm>
             <a:off x="476402" y="822960"/>
-            <a:ext cx="7498079" cy="432694"/>
+            <a:ext cx="7498079" cy="865388"/>
           </a:xfrm>
           <a:prstGeom prst="rect">
             <a:avLst/>
@@ -7012,7 +7012,7 @@
                 </a:solidFill>
                 <a:latin typeface="Inter"/>
               </a:rPr>
-              <a:t>Система помнит, что прочитала</a:t>
+              <a:t>Одинаковые действия, разный текст в README</a:t>
             </a:r>
           </a:p>
         </p:txBody>
@@ -7025,7 +7025,46 @@
         </p:nvSpPr>
         <p:spPr>
           <a:xfrm>
-            <a:off x="476402" y="1401958"/>
+            <a:off x="476402" y="1834652"/>
+            <a:ext cx="7680960" cy="231800"/>
+          </a:xfrm>
+          <a:prstGeom prst="rect">
+            <a:avLst/>
+          </a:prstGeom>
+          <a:noFill/>
+        </p:spPr>
+        <p:txBody>
+          <a:bodyPr wrap="square" lIns="0" rIns="0" tIns="0" bIns="0" anchor="t">
+            <a:spAutoFit/>
+          </a:bodyPr>
+          <a:lstStyle/>
+          <a:p>
+            <a:pPr>
+              <a:spcAft>
+                <a:spcPts val="0"/>
+              </a:spcAft>
+            </a:pPr>
+            <a:r>
+              <a:rPr sz="1300" b="1">
+                <a:solidFill>
+                  <a:srgbClr val="000000"/>
+                </a:solidFill>
+                <a:latin typeface="Inter"/>
+              </a:rPr>
+              <a:t>Оба прогона читают README и отправляют файл наружу. Правила видят одно и то же.</a:t>
+            </a:r>
+          </a:p>
+        </p:txBody>
+      </p:sp>
+      <p:sp>
+        <p:nvSpPr>
+          <p:cNvPr id="6" name="TextBox 5"/>
+          <p:cNvSpPr txBox="1"/>
+          <p:nvPr/>
+        </p:nvSpPr>
+        <p:spPr>
+          <a:xfrm>
+            <a:off x="476402" y="2194468"/>
             <a:ext cx="7315200" cy="196138"/>
           </a:xfrm>
           <a:prstGeom prst="rect">
@@ -7051,14 +7090,14 @@
                 </a:solidFill>
                 <a:latin typeface="Inter"/>
               </a:rPr>
-              <a:t>Выключено: чтение настроек, заметка и правка исходника прошли молча — и выгрузка тоже</a:t>
+              <a:t>Инструкция подброшена: действие остановлено, человек видит фразу, а не код правила</a:t>
             </a:r>
           </a:p>
         </p:txBody>
       </p:sp>
       <p:pic>
         <p:nvPicPr>
-          <p:cNvPr id="6" name="Picture 5" descr="05-secret-upload-baseline.png"/>
+          <p:cNvPr id="7" name="Picture 6" descr="10-ai-injection-stopped.png"/>
           <p:cNvPicPr>
             <a:picLocks noChangeAspect="1"/>
           </p:cNvPicPr>
@@ -7072,8 +7111,8 @@
         </p:blipFill>
         <p:spPr>
           <a:xfrm>
-            <a:off x="476402" y="1652960"/>
-            <a:ext cx="7315200" cy="1165473"/>
+            <a:off x="476402" y="2445471"/>
+            <a:ext cx="7315200" cy="1029087"/>
           </a:xfrm>
           <a:prstGeom prst="rect">
             <a:avLst/>
@@ -7082,13 +7121,13 @@
       </p:pic>
       <p:sp>
         <p:nvSpPr>
-          <p:cNvPr id="7" name="TextBox 6"/>
-          <p:cNvSpPr txBox="1"/>
-          <p:nvPr/>
-        </p:nvSpPr>
-        <p:spPr>
-          <a:xfrm>
-            <a:off x="476402" y="2983025"/>
+          <p:cNvPr id="8" name="TextBox 7"/>
+          <p:cNvSpPr txBox="1"/>
+          <p:nvPr/>
+        </p:nvSpPr>
+        <p:spPr>
+          <a:xfrm>
+            <a:off x="476402" y="3639150"/>
             <a:ext cx="7315200" cy="196138"/>
           </a:xfrm>
           <a:prstGeom prst="rect">
@@ -7114,14 +7153,14 @@
                 </a:solidFill>
                 <a:latin typeface="Inter"/>
               </a:rPr>
-              <a:t>Включено: те же четыре шага, но выгрузка отклонена — сервис не получил ничего</a:t>
+              <a:t>Обычная документация: то же действие проходит, лишнего подтверждения нет</a:t>
             </a:r>
           </a:p>
         </p:txBody>
       </p:sp>
       <p:pic>
         <p:nvPicPr>
-          <p:cNvPr id="8" name="Picture 7" descr="04-secret-upload-blocked.png"/>
+          <p:cNvPr id="9" name="Picture 8" descr="11-ai-ordinary-work.png"/>
           <p:cNvPicPr>
             <a:picLocks noChangeAspect="1"/>
           </p:cNvPicPr>
@@ -7135,8 +7174,8 @@
         </p:blipFill>
         <p:spPr>
           <a:xfrm>
-            <a:off x="476402" y="3234028"/>
-            <a:ext cx="7315200" cy="1704814"/>
+            <a:off x="476402" y="3890153"/>
+            <a:ext cx="7315200" cy="1029087"/>
           </a:xfrm>
           <a:prstGeom prst="rect">
             <a:avLst/>
@@ -7350,7 +7389,7 @@
                 </a:solidFill>
                 <a:latin typeface="Arial"/>
               </a:rPr>
-              <a:t>130 сценариев: 81 атака и 49 обычных задач, каждый по три раза. Девять конфигураций: соседние отличаются одним включённым слоем.</a:t>
+              <a:t>192 сценария: 141 атака и 51 обычная задача, каждый по три раза. Десять конфигураций: соседние отличаются одним включённым слоем.</a:t>
             </a:r>
           </a:p>
         </p:txBody>
@@ -7526,7 +7565,7 @@
         <p:spPr>
           <a:xfrm>
             <a:off x="476402" y="3076224"/>
-            <a:ext cx="853236" cy="960120"/>
+            <a:ext cx="761512" cy="960120"/>
           </a:xfrm>
           <a:prstGeom prst="rect">
             <a:avLst/>
@@ -7556,7 +7595,7 @@
         <p:spPr>
           <a:xfrm>
             <a:off x="476402" y="2893344"/>
-            <a:ext cx="853236" cy="164592"/>
+            <a:ext cx="761512" cy="164592"/>
           </a:xfrm>
           <a:prstGeom prst="rect">
             <a:avLst/>
@@ -7594,8 +7633,8 @@
         </p:nvSpPr>
         <p:spPr>
           <a:xfrm>
-            <a:off x="1393647" y="3210641"/>
-            <a:ext cx="853236" cy="825703"/>
+            <a:off x="1301922" y="3354659"/>
+            <a:ext cx="761512" cy="681685"/>
           </a:xfrm>
           <a:prstGeom prst="rect">
             <a:avLst/>
@@ -7624,8 +7663,8 @@
         </p:nvSpPr>
         <p:spPr>
           <a:xfrm>
-            <a:off x="1393647" y="3027761"/>
-            <a:ext cx="853236" cy="164592"/>
+            <a:off x="1301922" y="3171779"/>
+            <a:ext cx="761512" cy="164592"/>
           </a:xfrm>
           <a:prstGeom prst="rect">
             <a:avLst/>
@@ -7650,7 +7689,7 @@
                 </a:solidFill>
                 <a:latin typeface="Arial"/>
               </a:rPr>
-              <a:t>86 %</a:t>
+              <a:t>71 %</a:t>
             </a:r>
           </a:p>
         </p:txBody>
@@ -7663,8 +7702,8 @@
         </p:nvSpPr>
         <p:spPr>
           <a:xfrm>
-            <a:off x="2310892" y="3383462"/>
-            <a:ext cx="853236" cy="652881"/>
+            <a:off x="2127443" y="3460272"/>
+            <a:ext cx="761512" cy="576072"/>
           </a:xfrm>
           <a:prstGeom prst="rect">
             <a:avLst/>
@@ -7693,8 +7732,8 @@
         </p:nvSpPr>
         <p:spPr>
           <a:xfrm>
-            <a:off x="2310892" y="3200582"/>
-            <a:ext cx="853236" cy="164592"/>
+            <a:off x="2127443" y="3277392"/>
+            <a:ext cx="761512" cy="164592"/>
           </a:xfrm>
           <a:prstGeom prst="rect">
             <a:avLst/>
@@ -7719,7 +7758,7 @@
                 </a:solidFill>
                 <a:latin typeface="Arial"/>
               </a:rPr>
-              <a:t>68 %</a:t>
+              <a:t>60 %</a:t>
             </a:r>
           </a:p>
         </p:txBody>
@@ -7732,8 +7771,8 @@
         </p:nvSpPr>
         <p:spPr>
           <a:xfrm>
-            <a:off x="3228136" y="3431468"/>
-            <a:ext cx="853236" cy="604875"/>
+            <a:off x="2952963" y="3489076"/>
+            <a:ext cx="761512" cy="547268"/>
           </a:xfrm>
           <a:prstGeom prst="rect">
             <a:avLst/>
@@ -7762,8 +7801,8 @@
         </p:nvSpPr>
         <p:spPr>
           <a:xfrm>
-            <a:off x="3228136" y="3248588"/>
-            <a:ext cx="853236" cy="164592"/>
+            <a:off x="2952963" y="3306196"/>
+            <a:ext cx="761512" cy="164592"/>
           </a:xfrm>
           <a:prstGeom prst="rect">
             <a:avLst/>
@@ -7788,7 +7827,7 @@
                 </a:solidFill>
                 <a:latin typeface="Arial"/>
               </a:rPr>
-              <a:t>63 %</a:t>
+              <a:t>57 %</a:t>
             </a:r>
           </a:p>
         </p:txBody>
@@ -7801,8 +7840,8 @@
         </p:nvSpPr>
         <p:spPr>
           <a:xfrm>
-            <a:off x="4145381" y="3537082"/>
-            <a:ext cx="853236" cy="499262"/>
+            <a:off x="3778483" y="3556284"/>
+            <a:ext cx="761512" cy="480060"/>
           </a:xfrm>
           <a:prstGeom prst="rect">
             <a:avLst/>
@@ -7831,8 +7870,8 @@
         </p:nvSpPr>
         <p:spPr>
           <a:xfrm>
-            <a:off x="4145381" y="3354202"/>
-            <a:ext cx="853236" cy="164592"/>
+            <a:off x="3778483" y="3373404"/>
+            <a:ext cx="761512" cy="164592"/>
           </a:xfrm>
           <a:prstGeom prst="rect">
             <a:avLst/>
@@ -7857,7 +7896,7 @@
                 </a:solidFill>
                 <a:latin typeface="Arial"/>
               </a:rPr>
-              <a:t>52 %</a:t>
+              <a:t>50 %</a:t>
             </a:r>
           </a:p>
         </p:txBody>
@@ -7870,8 +7909,8 @@
         </p:nvSpPr>
         <p:spPr>
           <a:xfrm>
-            <a:off x="5062626" y="3661897"/>
-            <a:ext cx="853236" cy="374446"/>
+            <a:off x="4604004" y="3623492"/>
+            <a:ext cx="761512" cy="412851"/>
           </a:xfrm>
           <a:prstGeom prst="rect">
             <a:avLst/>
@@ -7900,8 +7939,8 @@
         </p:nvSpPr>
         <p:spPr>
           <a:xfrm>
-            <a:off x="5062626" y="3479017"/>
-            <a:ext cx="853236" cy="164592"/>
+            <a:off x="4604004" y="3440612"/>
+            <a:ext cx="761512" cy="164592"/>
           </a:xfrm>
           <a:prstGeom prst="rect">
             <a:avLst/>
@@ -7926,7 +7965,7 @@
                 </a:solidFill>
                 <a:latin typeface="Arial"/>
               </a:rPr>
-              <a:t>39 %</a:t>
+              <a:t>43 %</a:t>
             </a:r>
           </a:p>
         </p:txBody>
@@ -7939,8 +7978,8 @@
         </p:nvSpPr>
         <p:spPr>
           <a:xfrm>
-            <a:off x="5979871" y="3748308"/>
-            <a:ext cx="853236" cy="288036"/>
+            <a:off x="5429524" y="3671498"/>
+            <a:ext cx="761512" cy="364845"/>
           </a:xfrm>
           <a:prstGeom prst="rect">
             <a:avLst/>
@@ -7969,8 +8008,8 @@
         </p:nvSpPr>
         <p:spPr>
           <a:xfrm>
-            <a:off x="5979871" y="3565428"/>
-            <a:ext cx="853236" cy="164592"/>
+            <a:off x="5429524" y="3488618"/>
+            <a:ext cx="761512" cy="164592"/>
           </a:xfrm>
           <a:prstGeom prst="rect">
             <a:avLst/>
@@ -7995,7 +8034,7 @@
                 </a:solidFill>
                 <a:latin typeface="Arial"/>
               </a:rPr>
-              <a:t>30 %</a:t>
+              <a:t>38 %</a:t>
             </a:r>
           </a:p>
         </p:txBody>
@@ -8008,8 +8047,8 @@
         </p:nvSpPr>
         <p:spPr>
           <a:xfrm>
-            <a:off x="6897116" y="3863522"/>
-            <a:ext cx="853236" cy="172821"/>
+            <a:off x="6255044" y="3738707"/>
+            <a:ext cx="761512" cy="297637"/>
           </a:xfrm>
           <a:prstGeom prst="rect">
             <a:avLst/>
@@ -8038,8 +8077,8 @@
         </p:nvSpPr>
         <p:spPr>
           <a:xfrm>
-            <a:off x="6897116" y="3680642"/>
-            <a:ext cx="853236" cy="164592"/>
+            <a:off x="6255044" y="3555827"/>
+            <a:ext cx="761512" cy="164592"/>
           </a:xfrm>
           <a:prstGeom prst="rect">
             <a:avLst/>
@@ -8064,7 +8103,7 @@
                 </a:solidFill>
                 <a:latin typeface="Arial"/>
               </a:rPr>
-              <a:t>18 %</a:t>
+              <a:t>31 %</a:t>
             </a:r>
           </a:p>
         </p:txBody>
@@ -8077,8 +8116,77 @@
         </p:nvSpPr>
         <p:spPr>
           <a:xfrm>
-            <a:off x="7814360" y="3978737"/>
-            <a:ext cx="853236" cy="57607"/>
+            <a:off x="7080564" y="3805915"/>
+            <a:ext cx="761512" cy="230428"/>
+          </a:xfrm>
+          <a:prstGeom prst="rect">
+            <a:avLst/>
+          </a:prstGeom>
+          <a:solidFill>
+            <a:srgbClr val="DDDDE3"/>
+          </a:solidFill>
+          <a:ln>
+            <a:noFill/>
+          </a:ln>
+          <a:effectLst/>
+        </p:spPr>
+        <p:txBody>
+          <a:bodyPr rtlCol="0" anchor="ctr" wrap="square" lIns="54864" rIns="54864" tIns="36576" bIns="36576"/>
+          <a:lstStyle/>
+          <a:p>
+            <a:pPr algn="l"/>
+          </a:p>
+        </p:txBody>
+      </p:sp>
+      <p:sp>
+        <p:nvSpPr>
+          <p:cNvPr id="28" name="TextBox 27"/>
+          <p:cNvSpPr txBox="1"/>
+          <p:nvPr/>
+        </p:nvSpPr>
+        <p:spPr>
+          <a:xfrm>
+            <a:off x="7080564" y="3623035"/>
+            <a:ext cx="761512" cy="164592"/>
+          </a:xfrm>
+          <a:prstGeom prst="rect">
+            <a:avLst/>
+          </a:prstGeom>
+          <a:noFill/>
+        </p:spPr>
+        <p:txBody>
+          <a:bodyPr wrap="square" lIns="0" rIns="0" tIns="0" bIns="0" anchor="t">
+            <a:spAutoFit/>
+          </a:bodyPr>
+          <a:lstStyle/>
+          <a:p>
+            <a:pPr algn="ctr">
+              <a:spcAft>
+                <a:spcPts val="0"/>
+              </a:spcAft>
+            </a:pPr>
+            <a:r>
+              <a:rPr sz="900" b="0">
+                <a:solidFill>
+                  <a:srgbClr val="595959"/>
+                </a:solidFill>
+                <a:latin typeface="Arial"/>
+              </a:rPr>
+              <a:t>24 %</a:t>
+            </a:r>
+          </a:p>
+        </p:txBody>
+      </p:sp>
+      <p:sp>
+        <p:nvSpPr>
+          <p:cNvPr id="29" name="Rectangle 28"/>
+          <p:cNvSpPr/>
+          <p:nvPr/>
+        </p:nvSpPr>
+        <p:spPr>
+          <a:xfrm>
+            <a:off x="7906085" y="3978737"/>
+            <a:ext cx="761512" cy="57607"/>
           </a:xfrm>
           <a:prstGeom prst="rect">
             <a:avLst/>
@@ -8101,14 +8209,14 @@
       </p:sp>
       <p:sp>
         <p:nvSpPr>
-          <p:cNvPr id="28" name="TextBox 27"/>
-          <p:cNvSpPr txBox="1"/>
-          <p:nvPr/>
-        </p:nvSpPr>
-        <p:spPr>
-          <a:xfrm>
-            <a:off x="7814360" y="3795857"/>
-            <a:ext cx="853236" cy="164592"/>
+          <p:cNvPr id="30" name="TextBox 29"/>
+          <p:cNvSpPr txBox="1"/>
+          <p:nvPr/>
+        </p:nvSpPr>
+        <p:spPr>
+          <a:xfrm>
+            <a:off x="7906085" y="3795857"/>
+            <a:ext cx="761512" cy="164592"/>
           </a:xfrm>
           <a:prstGeom prst="rect">
             <a:avLst/>
@@ -8140,7 +8248,7 @@
       </p:sp>
       <p:sp>
         <p:nvSpPr>
-          <p:cNvPr id="29" name="TextBox 28"/>
+          <p:cNvPr id="31" name="TextBox 30"/>
           <p:cNvSpPr txBox="1"/>
           <p:nvPr/>
         </p:nvSpPr>
@@ -8179,7 +8287,7 @@
       </p:sp>
       <p:sp>
         <p:nvSpPr>
-          <p:cNvPr id="30" name="TextBox 29"/>
+          <p:cNvPr id="32" name="TextBox 31"/>
           <p:cNvSpPr txBox="1"/>
           <p:nvPr/>
         </p:nvSpPr>
@@ -8211,14 +8319,14 @@
                 </a:solidFill>
                 <a:latin typeface="Arial"/>
               </a:rPr>
-              <a:t>все девять слоёв · 6 %</a:t>
-            </a:r>
-          </a:p>
-        </p:txBody>
-      </p:sp>
-      <p:sp>
-        <p:nvSpPr>
-          <p:cNvPr id="31" name="TextBox 30"/>
+              <a:t>все десять слоёв · 6 %</a:t>
+            </a:r>
+          </a:p>
+        </p:txBody>
+      </p:sp>
+      <p:sp>
+        <p:nvSpPr>
+          <p:cNvPr id="33" name="TextBox 32"/>
           <p:cNvSpPr txBox="1"/>
           <p:nvPr/>
         </p:nvSpPr>
@@ -8466,7 +8574,7 @@
                 <a:latin typeface="Inter"/>
               </a:rPr>
               <a:t>Успешность атак (ASR) — доля прогонов, которые довели дело до настоящего вреда.
-15 прогонов из 237 · 3510 прогонов всего, ни одного сорванного</a:t>
+27 прогонов из 417 · 5760 прогонов всего, ни одного сорванного</a:t>
             </a:r>
           </a:p>
         </p:txBody>
@@ -8582,7 +8690,7 @@
                 </a:solidFill>
                 <a:latin typeface="Arial"/>
               </a:rPr>
-              <a:t>обычных задач по-прежнему выполняются · 144 из 147</a:t>
+              <a:t>обычных задач по-прежнему выполняются · 150 из 153</a:t>
             </a:r>
           </a:p>
         </p:txBody>
@@ -8702,7 +8810,7 @@
                 </a:solidFill>
                 <a:latin typeface="Inter"/>
               </a:rPr>
-              <a:t>0,15</a:t>
+              <a:t>0,27</a:t>
             </a:r>
           </a:p>
         </p:txBody>
@@ -8744,7 +8852,7 @@
                 </a:solidFill>
                 <a:latin typeface="Arial"/>
               </a:rPr>
-              <a:t>вопросов человеку на задачу · 60 на 390</a:t>
+              <a:t>вопросов человеку на задачу</a:t>
             </a:r>
           </a:p>
         </p:txBody>
@@ -8783,7 +8891,7 @@
                 </a:solidFill>
                 <a:latin typeface="Inter"/>
               </a:rPr>
-              <a:t>1,04 мс</a:t>
+              <a:t>1,60 мс</a:t>
             </a:r>
           </a:p>
         </p:txBody>
@@ -8867,7 +8975,7 @@
                 </a:solidFill>
                 <a:latin typeface="Arial"/>
               </a:rPr>
-              <a:t>Конфигурация «запретить всё» дала бы ноль успешных атак и ноль сделанных задач — поэтому величин пять, а не одна. Единственная потерянная задача — честный трёхдневный пакет: это измеренная цена, а не сбой.</a:t>
+              <a:t>«Запретить всё» дало бы ноль атак и ноль сделанных задач — поэтому величин пять. Без слоя смысла те же сценарии дают 24 %: он снимает восемнадцать пунктов и не стоит ни одной задачи.</a:t>
             </a:r>
           </a:p>
         </p:txBody>
@@ -9050,7 +9158,7 @@
         </p:nvSpPr>
         <p:spPr>
           <a:xfrm>
-            <a:off x="476402" y="1834926"/>
+            <a:off x="476402" y="1761774"/>
             <a:ext cx="3291840" cy="182880"/>
           </a:xfrm>
           <a:prstGeom prst="rect">
@@ -9076,7 +9184,7 @@
                 </a:solidFill>
                 <a:latin typeface="Arial"/>
               </a:rPr>
-              <a:t>Разрушительная команда, в том числе скрытая</a:t>
+              <a:t>Чужие ключи и настройки самого Kilo</a:t>
             </a:r>
           </a:p>
         </p:txBody>
@@ -9089,7 +9197,7 @@
         </p:nvSpPr>
         <p:spPr>
           <a:xfrm>
-            <a:off x="3877970" y="1853214"/>
+            <a:off x="3877970" y="1780062"/>
             <a:ext cx="1691640" cy="114300"/>
           </a:xfrm>
           <a:prstGeom prst="rect">
@@ -9119,7 +9227,7 @@
         </p:nvSpPr>
         <p:spPr>
           <a:xfrm>
-            <a:off x="5697626" y="1825782"/>
+            <a:off x="5697626" y="1752630"/>
             <a:ext cx="896112" cy="182880"/>
           </a:xfrm>
           <a:prstGeom prst="rect">
@@ -9145,7 +9253,7 @@
                 </a:solidFill>
                 <a:latin typeface="Arial"/>
               </a:rPr>
-              <a:t>0/15</a:t>
+              <a:t>0/54</a:t>
             </a:r>
           </a:p>
         </p:txBody>
@@ -9158,7 +9266,7 @@
         </p:nvSpPr>
         <p:spPr>
           <a:xfrm>
-            <a:off x="6666890" y="1825782"/>
+            <a:off x="6666890" y="1752630"/>
             <a:ext cx="1572768" cy="182880"/>
           </a:xfrm>
           <a:prstGeom prst="rect">
@@ -9197,7 +9305,7 @@
         </p:nvSpPr>
         <p:spPr>
           <a:xfrm>
-            <a:off x="476402" y="2091872"/>
+            <a:off x="476402" y="2001347"/>
             <a:ext cx="3291840" cy="182880"/>
           </a:xfrm>
           <a:prstGeom prst="rect">
@@ -9223,7 +9331,7 @@
                 </a:solidFill>
                 <a:latin typeface="Arial"/>
               </a:rPr>
-              <a:t>Чужие ключи и настройки самого Kilo</a:t>
+              <a:t>Установка подозрительного пакета</a:t>
             </a:r>
           </a:p>
         </p:txBody>
@@ -9236,7 +9344,7 @@
         </p:nvSpPr>
         <p:spPr>
           <a:xfrm>
-            <a:off x="3877970" y="2110160"/>
+            <a:off x="3877970" y="2019635"/>
             <a:ext cx="1691640" cy="114300"/>
           </a:xfrm>
           <a:prstGeom prst="rect">
@@ -9266,7 +9374,7 @@
         </p:nvSpPr>
         <p:spPr>
           <a:xfrm>
-            <a:off x="5697626" y="2082728"/>
+            <a:off x="5697626" y="1992203"/>
             <a:ext cx="896112" cy="182880"/>
           </a:xfrm>
           <a:prstGeom prst="rect">
@@ -9292,7 +9400,7 @@
                 </a:solidFill>
                 <a:latin typeface="Arial"/>
               </a:rPr>
-              <a:t>0/15</a:t>
+              <a:t>0/42</a:t>
             </a:r>
           </a:p>
         </p:txBody>
@@ -9305,7 +9413,7 @@
         </p:nvSpPr>
         <p:spPr>
           <a:xfrm>
-            <a:off x="6666890" y="2082728"/>
+            <a:off x="6666890" y="1992203"/>
             <a:ext cx="1572768" cy="182880"/>
           </a:xfrm>
           <a:prstGeom prst="rect">
@@ -9344,7 +9452,7 @@
         </p:nvSpPr>
         <p:spPr>
           <a:xfrm>
-            <a:off x="476402" y="2348819"/>
+            <a:off x="476402" y="2240920"/>
             <a:ext cx="3291840" cy="182880"/>
           </a:xfrm>
           <a:prstGeom prst="rect">
@@ -9370,7 +9478,7 @@
                 </a:solidFill>
                 <a:latin typeface="Arial"/>
               </a:rPr>
-              <a:t>Установка подозрительного пакета</a:t>
+              <a:t>Внешний инструмент делает лишнее</a:t>
             </a:r>
           </a:p>
         </p:txBody>
@@ -9383,7 +9491,7 @@
         </p:nvSpPr>
         <p:spPr>
           <a:xfrm>
-            <a:off x="3877970" y="2367107"/>
+            <a:off x="3877970" y="2259208"/>
             <a:ext cx="1691640" cy="114300"/>
           </a:xfrm>
           <a:prstGeom prst="rect">
@@ -9413,7 +9521,7 @@
         </p:nvSpPr>
         <p:spPr>
           <a:xfrm>
-            <a:off x="5697626" y="2339675"/>
+            <a:off x="5697626" y="2231776"/>
             <a:ext cx="896112" cy="182880"/>
           </a:xfrm>
           <a:prstGeom prst="rect">
@@ -9439,7 +9547,7 @@
                 </a:solidFill>
                 <a:latin typeface="Arial"/>
               </a:rPr>
-              <a:t>0/42</a:t>
+              <a:t>0/30</a:t>
             </a:r>
           </a:p>
         </p:txBody>
@@ -9452,7 +9560,7 @@
         </p:nvSpPr>
         <p:spPr>
           <a:xfrm>
-            <a:off x="6666890" y="2339675"/>
+            <a:off x="6666890" y="2231776"/>
             <a:ext cx="1572768" cy="182880"/>
           </a:xfrm>
           <a:prstGeom prst="rect">
@@ -9491,7 +9599,7 @@
         </p:nvSpPr>
         <p:spPr>
           <a:xfrm>
-            <a:off x="476402" y="2605765"/>
+            <a:off x="476402" y="2480492"/>
             <a:ext cx="3291840" cy="182880"/>
           </a:xfrm>
           <a:prstGeom prst="rect">
@@ -9517,7 +9625,7 @@
                 </a:solidFill>
                 <a:latin typeface="Arial"/>
               </a:rPr>
-              <a:t>Внешний инструмент делает лишнее</a:t>
+              <a:t>Утечка секрета цепочкой действий</a:t>
             </a:r>
           </a:p>
         </p:txBody>
@@ -9530,7 +9638,7 @@
         </p:nvSpPr>
         <p:spPr>
           <a:xfrm>
-            <a:off x="3877970" y="2624053"/>
+            <a:off x="3877970" y="2498780"/>
             <a:ext cx="1691640" cy="114300"/>
           </a:xfrm>
           <a:prstGeom prst="rect">
@@ -9560,7 +9668,7 @@
         </p:nvSpPr>
         <p:spPr>
           <a:xfrm>
-            <a:off x="5697626" y="2596621"/>
+            <a:off x="5697626" y="2471348"/>
             <a:ext cx="896112" cy="182880"/>
           </a:xfrm>
           <a:prstGeom prst="rect">
@@ -9599,7 +9707,7 @@
         </p:nvSpPr>
         <p:spPr>
           <a:xfrm>
-            <a:off x="6666890" y="2596621"/>
+            <a:off x="6666890" y="2471348"/>
             <a:ext cx="1572768" cy="182880"/>
           </a:xfrm>
           <a:prstGeom prst="rect">
@@ -9638,7 +9746,7 @@
         </p:nvSpPr>
         <p:spPr>
           <a:xfrm>
-            <a:off x="476402" y="2862712"/>
+            <a:off x="476402" y="2720065"/>
             <a:ext cx="3291840" cy="182880"/>
           </a:xfrm>
           <a:prstGeom prst="rect">
@@ -9664,7 +9772,7 @@
                 </a:solidFill>
                 <a:latin typeface="Arial"/>
               </a:rPr>
-              <a:t>Утечка секрета цепочкой действий</a:t>
+              <a:t>Расширение выходит за выданные права</a:t>
             </a:r>
           </a:p>
         </p:txBody>
@@ -9677,7 +9785,7 @@
         </p:nvSpPr>
         <p:spPr>
           <a:xfrm>
-            <a:off x="3877970" y="2881000"/>
+            <a:off x="3877970" y="2738353"/>
             <a:ext cx="1691640" cy="114300"/>
           </a:xfrm>
           <a:prstGeom prst="rect">
@@ -9707,7 +9815,7 @@
         </p:nvSpPr>
         <p:spPr>
           <a:xfrm>
-            <a:off x="5697626" y="2853568"/>
+            <a:off x="5697626" y="2710921"/>
             <a:ext cx="896112" cy="182880"/>
           </a:xfrm>
           <a:prstGeom prst="rect">
@@ -9733,7 +9841,7 @@
                 </a:solidFill>
                 <a:latin typeface="Arial"/>
               </a:rPr>
-              <a:t>0/15</a:t>
+              <a:t>0/24</a:t>
             </a:r>
           </a:p>
         </p:txBody>
@@ -9746,7 +9854,7 @@
         </p:nvSpPr>
         <p:spPr>
           <a:xfrm>
-            <a:off x="6666890" y="2853568"/>
+            <a:off x="6666890" y="2710921"/>
             <a:ext cx="1572768" cy="182880"/>
           </a:xfrm>
           <a:prstGeom prst="rect">
@@ -9785,7 +9893,7 @@
         </p:nvSpPr>
         <p:spPr>
           <a:xfrm>
-            <a:off x="476402" y="3119658"/>
+            <a:off x="476402" y="2959638"/>
             <a:ext cx="3291840" cy="182880"/>
           </a:xfrm>
           <a:prstGeom prst="rect">
@@ -9811,7 +9919,7 @@
                 </a:solidFill>
                 <a:latin typeface="Arial"/>
               </a:rPr>
-              <a:t>Расширение выходит за выданные права</a:t>
+              <a:t>Действие не связано с задачей пользователя</a:t>
             </a:r>
           </a:p>
         </p:txBody>
@@ -9824,7 +9932,7 @@
         </p:nvSpPr>
         <p:spPr>
           <a:xfrm>
-            <a:off x="3877970" y="3137946"/>
+            <a:off x="3877970" y="2977926"/>
             <a:ext cx="1691640" cy="114300"/>
           </a:xfrm>
           <a:prstGeom prst="rect">
@@ -9854,7 +9962,7 @@
         </p:nvSpPr>
         <p:spPr>
           <a:xfrm>
-            <a:off x="5697626" y="3110514"/>
+            <a:off x="5697626" y="2950494"/>
             <a:ext cx="896112" cy="182880"/>
           </a:xfrm>
           <a:prstGeom prst="rect">
@@ -9880,7 +9988,7 @@
                 </a:solidFill>
                 <a:latin typeface="Arial"/>
               </a:rPr>
-              <a:t>0/24</a:t>
+              <a:t>0/9</a:t>
             </a:r>
           </a:p>
         </p:txBody>
@@ -9893,7 +10001,7 @@
         </p:nvSpPr>
         <p:spPr>
           <a:xfrm>
-            <a:off x="6666890" y="3110514"/>
+            <a:off x="6666890" y="2950494"/>
             <a:ext cx="1572768" cy="182880"/>
           </a:xfrm>
           <a:prstGeom prst="rect">
@@ -9919,7 +10027,7 @@
                 </a:solidFill>
                 <a:latin typeface="Arial"/>
               </a:rPr>
-              <a:t>Закрыто</a:t>
+              <a:t>Закрыто · слоем смысла</a:t>
             </a:r>
           </a:p>
         </p:txBody>
@@ -9932,7 +10040,7 @@
         </p:nvSpPr>
         <p:spPr>
           <a:xfrm>
-            <a:off x="476402" y="3376604"/>
+            <a:off x="476402" y="3199211"/>
             <a:ext cx="3291840" cy="182880"/>
           </a:xfrm>
           <a:prstGeom prst="rect">
@@ -9958,7 +10066,7 @@
                 </a:solidFill>
                 <a:latin typeface="Arial"/>
               </a:rPr>
-              <a:t>Расширение читает файлы разработчика</a:t>
+              <a:t>Текст в репозитории уговаривает агента</a:t>
             </a:r>
           </a:p>
         </p:txBody>
@@ -9971,7 +10079,7 @@
         </p:nvSpPr>
         <p:spPr>
           <a:xfrm>
-            <a:off x="3877970" y="3394892"/>
+            <a:off x="3877970" y="3217499"/>
             <a:ext cx="1691640" cy="114300"/>
           </a:xfrm>
           <a:prstGeom prst="rect">
@@ -10001,8 +10109,8 @@
         </p:nvSpPr>
         <p:spPr>
           <a:xfrm>
-            <a:off x="3877970" y="3394892"/>
-            <a:ext cx="153785" cy="114300"/>
+            <a:off x="3877970" y="3217499"/>
+            <a:ext cx="67665" cy="114300"/>
           </a:xfrm>
           <a:prstGeom prst="rect">
             <a:avLst/>
@@ -10031,7 +10139,7 @@
         </p:nvSpPr>
         <p:spPr>
           <a:xfrm>
-            <a:off x="5697626" y="3367460"/>
+            <a:off x="5697626" y="3190067"/>
             <a:ext cx="896112" cy="182880"/>
           </a:xfrm>
           <a:prstGeom prst="rect">
@@ -10057,7 +10165,7 @@
                 </a:solidFill>
                 <a:latin typeface="Arial"/>
               </a:rPr>
-              <a:t>3/33</a:t>
+              <a:t>3/75</a:t>
             </a:r>
           </a:p>
         </p:txBody>
@@ -10070,7 +10178,7 @@
         </p:nvSpPr>
         <p:spPr>
           <a:xfrm>
-            <a:off x="6666890" y="3367460"/>
+            <a:off x="6666890" y="3190067"/>
             <a:ext cx="1572768" cy="182880"/>
           </a:xfrm>
           <a:prstGeom prst="rect">
@@ -10096,7 +10204,7 @@
                 </a:solidFill>
                 <a:latin typeface="Arial"/>
               </a:rPr>
-              <a:t>Сильно снижено · 9 %</a:t>
+              <a:t>Сильно снижено · 4 %</a:t>
             </a:r>
           </a:p>
         </p:txBody>
@@ -10109,7 +10217,7 @@
         </p:nvSpPr>
         <p:spPr>
           <a:xfrm>
-            <a:off x="476402" y="3633551"/>
+            <a:off x="476402" y="3438784"/>
             <a:ext cx="3291840" cy="182880"/>
           </a:xfrm>
           <a:prstGeom prst="rect">
@@ -10135,7 +10243,7 @@
                 </a:solidFill>
                 <a:latin typeface="Arial"/>
               </a:rPr>
-              <a:t>Код репозитория исполняется при загрузке</a:t>
+              <a:t>Расширение читает файлы разработчика</a:t>
             </a:r>
           </a:p>
         </p:txBody>
@@ -10148,7 +10256,7 @@
         </p:nvSpPr>
         <p:spPr>
           <a:xfrm>
-            <a:off x="3877970" y="3651839"/>
+            <a:off x="3877970" y="3457072"/>
             <a:ext cx="1691640" cy="114300"/>
           </a:xfrm>
           <a:prstGeom prst="rect">
@@ -10178,8 +10286,8 @@
         </p:nvSpPr>
         <p:spPr>
           <a:xfrm>
-            <a:off x="3877970" y="3651839"/>
-            <a:ext cx="187960" cy="114300"/>
+            <a:off x="3877970" y="3457072"/>
+            <a:ext cx="153785" cy="114300"/>
           </a:xfrm>
           <a:prstGeom prst="rect">
             <a:avLst/>
@@ -10208,7 +10316,7 @@
         </p:nvSpPr>
         <p:spPr>
           <a:xfrm>
-            <a:off x="5697626" y="3624407"/>
+            <a:off x="5697626" y="3429640"/>
             <a:ext cx="896112" cy="182880"/>
           </a:xfrm>
           <a:prstGeom prst="rect">
@@ -10234,7 +10342,7 @@
                 </a:solidFill>
                 <a:latin typeface="Arial"/>
               </a:rPr>
-              <a:t>3/27</a:t>
+              <a:t>3/33</a:t>
             </a:r>
           </a:p>
         </p:txBody>
@@ -10247,7 +10355,7 @@
         </p:nvSpPr>
         <p:spPr>
           <a:xfrm>
-            <a:off x="6666890" y="3624407"/>
+            <a:off x="6666890" y="3429640"/>
             <a:ext cx="1572768" cy="182880"/>
           </a:xfrm>
           <a:prstGeom prst="rect">
@@ -10273,7 +10381,7 @@
                 </a:solidFill>
                 <a:latin typeface="Arial"/>
               </a:rPr>
-              <a:t>Сильно снижено · 11 %</a:t>
+              <a:t>Сильно снижено · 9 %</a:t>
             </a:r>
           </a:p>
         </p:txBody>
@@ -10286,7 +10394,7 @@
         </p:nvSpPr>
         <p:spPr>
           <a:xfrm>
-            <a:off x="476402" y="3890497"/>
+            <a:off x="476402" y="3678356"/>
             <a:ext cx="3291840" cy="182880"/>
           </a:xfrm>
           <a:prstGeom prst="rect">
@@ -10312,7 +10420,7 @@
                 </a:solidFill>
                 <a:latin typeface="Arial"/>
               </a:rPr>
-              <a:t>Секрет в обычном файле проекта</a:t>
+              <a:t>Код репозитория исполняется при загрузке</a:t>
             </a:r>
           </a:p>
         </p:txBody>
@@ -10325,7 +10433,7 @@
         </p:nvSpPr>
         <p:spPr>
           <a:xfrm>
-            <a:off x="3877970" y="3908785"/>
+            <a:off x="3877970" y="3696644"/>
             <a:ext cx="1691640" cy="114300"/>
           </a:xfrm>
           <a:prstGeom prst="rect">
@@ -10355,8 +10463,8 @@
         </p:nvSpPr>
         <p:spPr>
           <a:xfrm>
-            <a:off x="3877970" y="3908785"/>
-            <a:ext cx="307570" cy="114300"/>
+            <a:off x="3877970" y="3696644"/>
+            <a:ext cx="187960" cy="114300"/>
           </a:xfrm>
           <a:prstGeom prst="rect">
             <a:avLst/>
@@ -10385,7 +10493,7 @@
         </p:nvSpPr>
         <p:spPr>
           <a:xfrm>
-            <a:off x="5697626" y="3881353"/>
+            <a:off x="5697626" y="3669212"/>
             <a:ext cx="896112" cy="182880"/>
           </a:xfrm>
           <a:prstGeom prst="rect">
@@ -10411,7 +10519,7 @@
                 </a:solidFill>
                 <a:latin typeface="Arial"/>
               </a:rPr>
-              <a:t>6/33</a:t>
+              <a:t>3/27</a:t>
             </a:r>
           </a:p>
         </p:txBody>
@@ -10424,7 +10532,7 @@
         </p:nvSpPr>
         <p:spPr>
           <a:xfrm>
-            <a:off x="6666890" y="3881353"/>
+            <a:off x="6666890" y="3669212"/>
             <a:ext cx="1572768" cy="182880"/>
           </a:xfrm>
           <a:prstGeom prst="rect">
@@ -10450,7 +10558,7 @@
                 </a:solidFill>
                 <a:latin typeface="Arial"/>
               </a:rPr>
-              <a:t>Частично · 18 %</a:t>
+              <a:t>Сильно снижено · 11 %</a:t>
             </a:r>
           </a:p>
         </p:txBody>
@@ -10463,7 +10571,7 @@
         </p:nvSpPr>
         <p:spPr>
           <a:xfrm>
-            <a:off x="476402" y="4147444"/>
+            <a:off x="476402" y="3917929"/>
             <a:ext cx="3291840" cy="182880"/>
           </a:xfrm>
           <a:prstGeom prst="rect">
@@ -10489,7 +10597,7 @@
                 </a:solidFill>
                 <a:latin typeface="Arial"/>
               </a:rPr>
-              <a:t>Текст в репозитории уговаривает агента</a:t>
+              <a:t>Секрет в обычном файле проекта</a:t>
             </a:r>
           </a:p>
         </p:txBody>
@@ -10502,7 +10610,7 @@
         </p:nvSpPr>
         <p:spPr>
           <a:xfrm>
-            <a:off x="3877970" y="4165732"/>
+            <a:off x="3877970" y="3936217"/>
             <a:ext cx="1691640" cy="114300"/>
           </a:xfrm>
           <a:prstGeom prst="rect">
@@ -10532,8 +10640,8 @@
         </p:nvSpPr>
         <p:spPr>
           <a:xfrm>
-            <a:off x="3877970" y="4165732"/>
-            <a:ext cx="1691640" cy="114300"/>
+            <a:off x="3877970" y="3936217"/>
+            <a:ext cx="307570" cy="114300"/>
           </a:xfrm>
           <a:prstGeom prst="rect">
             <a:avLst/>
@@ -10562,7 +10670,7 @@
         </p:nvSpPr>
         <p:spPr>
           <a:xfrm>
-            <a:off x="5697626" y="4138300"/>
+            <a:off x="5697626" y="3908785"/>
             <a:ext cx="896112" cy="182880"/>
           </a:xfrm>
           <a:prstGeom prst="rect">
@@ -10588,7 +10696,7 @@
                 </a:solidFill>
                 <a:latin typeface="Arial"/>
               </a:rPr>
-              <a:t>3/3</a:t>
+              <a:t>6/33</a:t>
             </a:r>
           </a:p>
         </p:txBody>
@@ -10601,7 +10709,7 @@
         </p:nvSpPr>
         <p:spPr>
           <a:xfrm>
-            <a:off x="6666890" y="4138300"/>
+            <a:off x="6666890" y="3908785"/>
             <a:ext cx="1572768" cy="182880"/>
           </a:xfrm>
           <a:prstGeom prst="rect">
@@ -10627,7 +10735,7 @@
                 </a:solidFill>
                 <a:latin typeface="Arial"/>
               </a:rPr>
-              <a:t>Известное ограничение</a:t>
+              <a:t>Частично · 18 %</a:t>
             </a:r>
           </a:p>
         </p:txBody>
@@ -10640,7 +10748,184 @@
         </p:nvSpPr>
         <p:spPr>
           <a:xfrm>
-            <a:off x="476402" y="4550694"/>
+            <a:off x="476402" y="4157502"/>
+            <a:ext cx="3291840" cy="182880"/>
+          </a:xfrm>
+          <a:prstGeom prst="rect">
+            <a:avLst/>
+          </a:prstGeom>
+          <a:noFill/>
+        </p:spPr>
+        <p:txBody>
+          <a:bodyPr wrap="square" lIns="0" rIns="0" tIns="0" bIns="0" anchor="t">
+            <a:spAutoFit/>
+          </a:bodyPr>
+          <a:lstStyle/>
+          <a:p>
+            <a:pPr>
+              <a:spcAft>
+                <a:spcPts val="0"/>
+              </a:spcAft>
+            </a:pPr>
+            <a:r>
+              <a:rPr sz="1000" b="0">
+                <a:solidFill>
+                  <a:srgbClr val="000000"/>
+                </a:solidFill>
+                <a:latin typeface="Arial"/>
+              </a:rPr>
+              <a:t>Разрушительная команда, в том числе скрытая</a:t>
+            </a:r>
+          </a:p>
+        </p:txBody>
+      </p:sp>
+      <p:sp>
+        <p:nvSpPr>
+          <p:cNvPr id="51" name="Rectangle 50"/>
+          <p:cNvSpPr/>
+          <p:nvPr/>
+        </p:nvSpPr>
+        <p:spPr>
+          <a:xfrm>
+            <a:off x="3877970" y="4175790"/>
+            <a:ext cx="1691640" cy="114300"/>
+          </a:xfrm>
+          <a:prstGeom prst="rect">
+            <a:avLst/>
+          </a:prstGeom>
+          <a:solidFill>
+            <a:srgbClr val="DDDDE3"/>
+          </a:solidFill>
+          <a:ln>
+            <a:noFill/>
+          </a:ln>
+          <a:effectLst/>
+        </p:spPr>
+        <p:txBody>
+          <a:bodyPr rtlCol="0" anchor="ctr" wrap="square" lIns="54864" rIns="54864" tIns="36576" bIns="36576"/>
+          <a:lstStyle/>
+          <a:p>
+            <a:pPr algn="l"/>
+          </a:p>
+        </p:txBody>
+      </p:sp>
+      <p:sp>
+        <p:nvSpPr>
+          <p:cNvPr id="52" name="Rectangle 51"/>
+          <p:cNvSpPr/>
+          <p:nvPr/>
+        </p:nvSpPr>
+        <p:spPr>
+          <a:xfrm>
+            <a:off x="3877970" y="4175790"/>
+            <a:ext cx="338328" cy="114300"/>
+          </a:xfrm>
+          <a:prstGeom prst="rect">
+            <a:avLst/>
+          </a:prstGeom>
+          <a:solidFill>
+            <a:srgbClr val="0000FF"/>
+          </a:solidFill>
+          <a:ln>
+            <a:noFill/>
+          </a:ln>
+          <a:effectLst/>
+        </p:spPr>
+        <p:txBody>
+          <a:bodyPr rtlCol="0" anchor="ctr" wrap="square" lIns="54864" rIns="54864" tIns="36576" bIns="36576"/>
+          <a:lstStyle/>
+          <a:p>
+            <a:pPr algn="l"/>
+          </a:p>
+        </p:txBody>
+      </p:sp>
+      <p:sp>
+        <p:nvSpPr>
+          <p:cNvPr id="53" name="TextBox 52"/>
+          <p:cNvSpPr txBox="1"/>
+          <p:nvPr/>
+        </p:nvSpPr>
+        <p:spPr>
+          <a:xfrm>
+            <a:off x="5697626" y="4148358"/>
+            <a:ext cx="896112" cy="182880"/>
+          </a:xfrm>
+          <a:prstGeom prst="rect">
+            <a:avLst/>
+          </a:prstGeom>
+          <a:noFill/>
+        </p:spPr>
+        <p:txBody>
+          <a:bodyPr wrap="square" lIns="0" rIns="0" tIns="0" bIns="0" anchor="t">
+            <a:spAutoFit/>
+          </a:bodyPr>
+          <a:lstStyle/>
+          <a:p>
+            <a:pPr>
+              <a:spcAft>
+                <a:spcPts val="0"/>
+              </a:spcAft>
+            </a:pPr>
+            <a:r>
+              <a:rPr sz="1000" b="1">
+                <a:solidFill>
+                  <a:srgbClr val="0000FF"/>
+                </a:solidFill>
+                <a:latin typeface="Arial"/>
+              </a:rPr>
+              <a:t>12/60</a:t>
+            </a:r>
+          </a:p>
+        </p:txBody>
+      </p:sp>
+      <p:sp>
+        <p:nvSpPr>
+          <p:cNvPr id="54" name="TextBox 53"/>
+          <p:cNvSpPr txBox="1"/>
+          <p:nvPr/>
+        </p:nvSpPr>
+        <p:spPr>
+          <a:xfrm>
+            <a:off x="6666890" y="4148358"/>
+            <a:ext cx="1572768" cy="182880"/>
+          </a:xfrm>
+          <a:prstGeom prst="rect">
+            <a:avLst/>
+          </a:prstGeom>
+          <a:noFill/>
+        </p:spPr>
+        <p:txBody>
+          <a:bodyPr wrap="square" lIns="0" rIns="0" tIns="0" bIns="0" anchor="t">
+            <a:spAutoFit/>
+          </a:bodyPr>
+          <a:lstStyle/>
+          <a:p>
+            <a:pPr>
+              <a:spcAft>
+                <a:spcPts val="0"/>
+              </a:spcAft>
+            </a:pPr>
+            <a:r>
+              <a:rPr sz="1000" b="0">
+                <a:solidFill>
+                  <a:srgbClr val="595959"/>
+                </a:solidFill>
+                <a:latin typeface="Arial"/>
+              </a:rPr>
+              <a:t>Частично · 20 %</a:t>
+            </a:r>
+          </a:p>
+        </p:txBody>
+      </p:sp>
+      <p:sp>
+        <p:nvSpPr>
+          <p:cNvPr id="55" name="TextBox 54"/>
+          <p:cNvSpPr txBox="1"/>
+          <p:nvPr/>
+        </p:nvSpPr>
+        <p:spPr>
+          <a:xfrm>
+            <a:off x="476402" y="4506803"/>
             <a:ext cx="8191195" cy="420624"/>
           </a:xfrm>
           <a:prstGeom prst="rect">
@@ -10669,7 +10954,7 @@
                 </a:solidFill>
                 <a:latin typeface="Arial"/>
               </a:rPr>
-              <a:t>Всего 15 прогонов из 237. Последняя строка не значит, что подсказка со стороны работает всегда: уговорить агента удалить дерево или поставить чужой пакет — это строки 1–3.</a:t>
+              <a:t>Всего 27 прогонов из 417. Строки про подброшенную инструкцию и про действие не по задаче без слоя смысла читались бы как 92 % и 100 %: эти два класса правила не закрывают.</a:t>
             </a:r>
           </a:p>
         </p:txBody>
@@ -10968,7 +11253,7 @@
               </a:rPr>
               <a:t>Набор атак наш собственный: «100 % без защиты» — это про него, а не про Kilo вообще.
 Ход работы агента задан сценарием, поэтому измеряется удержание, а не то, догадается ли модель напасть.
-Отдельного приложения не нужно: режим живёт внутри обычной работы с Kilo. Отдельного экрана безопасности при этом пока нет — решение видно в тексте отказа и в обычном окне подтверждения.</a:t>
+Отдельного приложения не нужно: режим живёт внутри обычной работы с Kilo, а причина решения теперь видна прямо в окне подтверждения и в выводе автономного прогона.</a:t>
             </a:r>
           </a:p>
         </p:txBody>
@@ -11051,7 +11336,7 @@
               </a:rPr>
               <a:t>Команда 5–10 разработчиков, репозиторий с внешними зависимостями и MCP.
 Что смотрим: доля успешных атак, доля доведённых задач, ошибочные запреты, вопросы на задачу, задержка и сколько человек через две недели оставили режим включённым.
-Продуктовый шаг: показать причину решения прямо в окне подтверждения.</a:t>
+Продуктовый шаг: прогнать held-out набор на настоящей малой модели — реализация готова, модели в этом окружении не было.</a:t>
             </a:r>
           </a:p>
         </p:txBody>
@@ -16858,7 +17143,7 @@
                 </a:solidFill>
                 <a:latin typeface="Inter"/>
               </a:rPr>
-              <a:t>Намерение меняется, а полномочия — нет</a:t>
+              <a:t>Модель понимает смысл, правила держат полномочия</a:t>
             </a:r>
           </a:p>
         </p:txBody>
@@ -16897,386 +17182,60 @@
                 </a:solidFill>
                 <a:latin typeface="Inter"/>
               </a:rPr>
-              <a:t>Текст в репозитории бывает адресован модели, а не человеку.</a:t>
-            </a:r>
-          </a:p>
-        </p:txBody>
-      </p:sp>
-      <p:sp>
-        <p:nvSpPr>
-          <p:cNvPr id="6" name="Rectangle 5"/>
-          <p:cNvSpPr/>
-          <p:nvPr/>
-        </p:nvSpPr>
-        <p:spPr>
-          <a:xfrm>
-            <a:off x="476402" y="2280422"/>
-            <a:ext cx="1737360" cy="512064"/>
-          </a:xfrm>
-          <a:prstGeom prst="rect">
-            <a:avLst/>
-          </a:prstGeom>
-          <a:noFill/>
-          <a:ln w="9525">
-            <a:solidFill>
-              <a:srgbClr val="000000"/>
-            </a:solidFill>
-          </a:ln>
-          <a:effectLst/>
-        </p:spPr>
-        <p:txBody>
-          <a:bodyPr rtlCol="0" anchor="ctr" wrap="square" lIns="54864" rIns="54864" tIns="36576" bIns="36576"/>
-          <a:lstStyle/>
-          <a:p>
-            <a:pPr algn="l">
-              <a:spcAft>
-                <a:spcPts val="100"/>
-              </a:spcAft>
-            </a:pPr>
-            <a:r>
-              <a:rPr sz="1050" b="1">
-                <a:solidFill>
-                  <a:srgbClr val="000000"/>
+              <a:t>Два вопроса, на которые у детерминированного контура нет входа.</a:t>
+            </a:r>
+          </a:p>
+        </p:txBody>
+      </p:sp>
+      <p:sp>
+        <p:nvSpPr>
+          <p:cNvPr id="6" name="TextBox 5"/>
+          <p:cNvSpPr txBox="1"/>
+          <p:nvPr/>
+        </p:nvSpPr>
+        <p:spPr>
+          <a:xfrm>
+            <a:off x="476402" y="2262134"/>
+            <a:ext cx="2492654" cy="187223"/>
+          </a:xfrm>
+          <a:prstGeom prst="rect">
+            <a:avLst/>
+          </a:prstGeom>
+          <a:noFill/>
+        </p:spPr>
+        <p:txBody>
+          <a:bodyPr wrap="square" lIns="0" rIns="0" tIns="0" bIns="0" anchor="t">
+            <a:spAutoFit/>
+          </a:bodyPr>
+          <a:lstStyle/>
+          <a:p>
+            <a:pPr>
+              <a:spcAft>
+                <a:spcPts val="0"/>
+              </a:spcAft>
+            </a:pPr>
+            <a:r>
+              <a:rPr sz="1050" b="0">
+                <a:solidFill>
+                  <a:srgbClr val="0000FF"/>
                 </a:solidFill>
                 <a:latin typeface="Inter"/>
               </a:rPr>
-              <a:t>Текст в README</a:t>
-            </a:r>
-          </a:p>
-          <a:p>
-            <a:pPr>
-              <a:spcAft>
-                <a:spcPts val="0"/>
-              </a:spcAft>
-            </a:pPr>
-            <a:r>
-              <a:rPr sz="900" b="0">
-                <a:solidFill>
-                  <a:srgbClr val="595959"/>
-                </a:solidFill>
-                <a:latin typeface="Arial"/>
-              </a:rPr>
-              <a:t>адресован модели</a:t>
-            </a:r>
-          </a:p>
-        </p:txBody>
-      </p:sp>
-      <p:sp>
-        <p:nvSpPr>
-          <p:cNvPr id="7" name="Right Arrow 6"/>
-          <p:cNvSpPr/>
-          <p:nvPr/>
-        </p:nvSpPr>
-        <p:spPr>
-          <a:xfrm>
-            <a:off x="2241194" y="2495306"/>
-            <a:ext cx="146304" cy="82296"/>
-          </a:xfrm>
-          <a:prstGeom prst="rightArrow">
-            <a:avLst/>
-          </a:prstGeom>
-          <a:solidFill>
-            <a:srgbClr val="595959"/>
-          </a:solidFill>
-          <a:ln>
-            <a:noFill/>
-          </a:ln>
-          <a:effectLst/>
-        </p:spPr>
-        <p:txBody>
-          <a:bodyPr rtlCol="0" anchor="ctr"/>
-          <a:lstStyle/>
-          <a:p>
-            <a:pPr algn="ctr"/>
-          </a:p>
-        </p:txBody>
-      </p:sp>
-      <p:sp>
-        <p:nvSpPr>
-          <p:cNvPr id="8" name="Rectangle 7"/>
-          <p:cNvSpPr/>
-          <p:nvPr/>
-        </p:nvSpPr>
-        <p:spPr>
-          <a:xfrm>
-            <a:off x="2414930" y="2280422"/>
-            <a:ext cx="1737360" cy="512064"/>
-          </a:xfrm>
-          <a:prstGeom prst="rect">
-            <a:avLst/>
-          </a:prstGeom>
-          <a:noFill/>
-          <a:ln w="9525">
-            <a:solidFill>
-              <a:srgbClr val="000000"/>
-            </a:solidFill>
-          </a:ln>
-          <a:effectLst/>
-        </p:spPr>
-        <p:txBody>
-          <a:bodyPr rtlCol="0" anchor="ctr" wrap="square" lIns="54864" rIns="54864" tIns="36576" bIns="36576"/>
-          <a:lstStyle/>
-          <a:p>
-            <a:pPr algn="l">
-              <a:spcAft>
-                <a:spcPts val="100"/>
-              </a:spcAft>
-            </a:pPr>
-            <a:r>
-              <a:rPr sz="1050" b="1">
-                <a:solidFill>
-                  <a:srgbClr val="000000"/>
-                </a:solidFill>
-                <a:latin typeface="Inter"/>
-              </a:rPr>
-              <a:t>Модель хочет</a:t>
-            </a:r>
-          </a:p>
-          <a:p>
-            <a:pPr>
-              <a:spcAft>
-                <a:spcPts val="0"/>
-              </a:spcAft>
-            </a:pPr>
-            <a:r>
-              <a:rPr sz="900" b="0">
-                <a:solidFill>
-                  <a:srgbClr val="595959"/>
-                </a:solidFill>
-                <a:latin typeface="Arial"/>
-              </a:rPr>
-              <a:t>опасное действие</a:t>
-            </a:r>
-          </a:p>
-        </p:txBody>
-      </p:sp>
-      <p:sp>
-        <p:nvSpPr>
-          <p:cNvPr id="9" name="Right Arrow 8"/>
-          <p:cNvSpPr/>
-          <p:nvPr/>
-        </p:nvSpPr>
-        <p:spPr>
-          <a:xfrm>
-            <a:off x="4179722" y="2495306"/>
-            <a:ext cx="146304" cy="82296"/>
-          </a:xfrm>
-          <a:prstGeom prst="rightArrow">
-            <a:avLst/>
-          </a:prstGeom>
-          <a:solidFill>
-            <a:srgbClr val="595959"/>
-          </a:solidFill>
-          <a:ln>
-            <a:noFill/>
-          </a:ln>
-          <a:effectLst/>
-        </p:spPr>
-        <p:txBody>
-          <a:bodyPr rtlCol="0" anchor="ctr"/>
-          <a:lstStyle/>
-          <a:p>
-            <a:pPr algn="ctr"/>
-          </a:p>
-        </p:txBody>
-      </p:sp>
-      <p:sp>
-        <p:nvSpPr>
-          <p:cNvPr id="10" name="Rectangle 9"/>
-          <p:cNvSpPr/>
-          <p:nvPr/>
-        </p:nvSpPr>
-        <p:spPr>
-          <a:xfrm>
-            <a:off x="4353458" y="2280422"/>
-            <a:ext cx="1737360" cy="512064"/>
-          </a:xfrm>
-          <a:prstGeom prst="rect">
-            <a:avLst/>
-          </a:prstGeom>
-          <a:solidFill>
-            <a:srgbClr val="0000FF"/>
-          </a:solidFill>
-          <a:ln>
-            <a:noFill/>
-          </a:ln>
-          <a:effectLst/>
-        </p:spPr>
-        <p:txBody>
-          <a:bodyPr rtlCol="0" anchor="ctr" wrap="square" lIns="54864" rIns="54864" tIns="36576" bIns="36576"/>
-          <a:lstStyle/>
-          <a:p>
-            <a:pPr algn="l">
-              <a:spcAft>
-                <a:spcPts val="100"/>
-              </a:spcAft>
-            </a:pPr>
-            <a:r>
-              <a:rPr sz="1050" b="1">
-                <a:solidFill>
-                  <a:srgbClr val="FFFFFF"/>
-                </a:solidFill>
-                <a:latin typeface="Inter"/>
-              </a:rPr>
-              <a:t>Решает слой</a:t>
-            </a:r>
-          </a:p>
-          <a:p>
-            <a:pPr>
-              <a:spcAft>
-                <a:spcPts val="0"/>
-              </a:spcAft>
-            </a:pPr>
-            <a:r>
-              <a:rPr sz="900" b="0">
-                <a:solidFill>
-                  <a:srgbClr val="FFFFFF"/>
-                </a:solidFill>
-                <a:latin typeface="Arial"/>
-              </a:rPr>
-              <a:t>вне модели</a:t>
-            </a:r>
-          </a:p>
-        </p:txBody>
-      </p:sp>
-      <p:sp>
-        <p:nvSpPr>
-          <p:cNvPr id="11" name="Right Arrow 10"/>
-          <p:cNvSpPr/>
-          <p:nvPr/>
-        </p:nvSpPr>
-        <p:spPr>
-          <a:xfrm>
-            <a:off x="6118250" y="2495306"/>
-            <a:ext cx="146304" cy="82296"/>
-          </a:xfrm>
-          <a:prstGeom prst="rightArrow">
-            <a:avLst/>
-          </a:prstGeom>
-          <a:solidFill>
-            <a:srgbClr val="595959"/>
-          </a:solidFill>
-          <a:ln>
-            <a:noFill/>
-          </a:ln>
-          <a:effectLst/>
-        </p:spPr>
-        <p:txBody>
-          <a:bodyPr rtlCol="0" anchor="ctr"/>
-          <a:lstStyle/>
-          <a:p>
-            <a:pPr algn="ctr"/>
-          </a:p>
-        </p:txBody>
-      </p:sp>
-      <p:sp>
-        <p:nvSpPr>
-          <p:cNvPr id="12" name="Rectangle 11"/>
-          <p:cNvSpPr/>
-          <p:nvPr/>
-        </p:nvSpPr>
-        <p:spPr>
-          <a:xfrm>
-            <a:off x="6291986" y="2280422"/>
-            <a:ext cx="1737360" cy="512064"/>
-          </a:xfrm>
-          <a:prstGeom prst="rect">
-            <a:avLst/>
-          </a:prstGeom>
-          <a:solidFill>
-            <a:srgbClr val="0000FF"/>
-          </a:solidFill>
-          <a:ln>
-            <a:noFill/>
-          </a:ln>
-          <a:effectLst/>
-        </p:spPr>
-        <p:txBody>
-          <a:bodyPr rtlCol="0" anchor="ctr" wrap="square" lIns="54864" rIns="54864" tIns="36576" bIns="36576"/>
-          <a:lstStyle/>
-          <a:p>
-            <a:pPr algn="l">
-              <a:spcAft>
-                <a:spcPts val="100"/>
-              </a:spcAft>
-            </a:pPr>
-            <a:r>
-              <a:rPr sz="1050" b="1">
-                <a:solidFill>
-                  <a:srgbClr val="FFFFFF"/>
-                </a:solidFill>
-                <a:latin typeface="Inter"/>
-              </a:rPr>
-              <a:t>Права остались</a:t>
-            </a:r>
-          </a:p>
-          <a:p>
-            <a:pPr>
-              <a:spcAft>
-                <a:spcPts val="0"/>
-              </a:spcAft>
-            </a:pPr>
-            <a:r>
-              <a:rPr sz="900" b="0">
-                <a:solidFill>
-                  <a:srgbClr val="FFFFFF"/>
-                </a:solidFill>
-                <a:latin typeface="Arial"/>
-              </a:rPr>
-              <a:t>прежними</a:t>
-            </a:r>
-          </a:p>
-        </p:txBody>
-      </p:sp>
-      <p:sp>
-        <p:nvSpPr>
-          <p:cNvPr id="13" name="TextBox 12"/>
-          <p:cNvSpPr txBox="1"/>
-          <p:nvPr/>
-        </p:nvSpPr>
-        <p:spPr>
-          <a:xfrm>
-            <a:off x="476402" y="2975366"/>
-            <a:ext cx="2492654" cy="196138"/>
-          </a:xfrm>
-          <a:prstGeom prst="rect">
-            <a:avLst/>
-          </a:prstGeom>
-          <a:noFill/>
-        </p:spPr>
-        <p:txBody>
-          <a:bodyPr wrap="square" lIns="0" rIns="0" tIns="0" bIns="0" anchor="t">
-            <a:spAutoFit/>
-          </a:bodyPr>
-          <a:lstStyle/>
-          <a:p>
-            <a:pPr>
-              <a:spcAft>
-                <a:spcPts val="0"/>
-              </a:spcAft>
-            </a:pPr>
-            <a:r>
-              <a:rPr sz="1100" b="0">
-                <a:solidFill>
-                  <a:srgbClr val="0000FF"/>
-                </a:solidFill>
-                <a:latin typeface="Inter"/>
-              </a:rPr>
-              <a:t>Жёсткие правила по файлам</a:t>
-            </a:r>
-          </a:p>
-        </p:txBody>
-      </p:sp>
-      <p:sp>
-        <p:nvSpPr>
-          <p:cNvPr id="14" name="TextBox 13"/>
-          <p:cNvSpPr txBox="1"/>
-          <p:nvPr/>
-        </p:nvSpPr>
-        <p:spPr>
-          <a:xfrm>
-            <a:off x="476402" y="3198936"/>
-            <a:ext cx="2492654" cy="588416"/>
+              <a:t>Откуда пришла инструкция</a:t>
+            </a:r>
+          </a:p>
+        </p:txBody>
+      </p:sp>
+      <p:sp>
+        <p:nvSpPr>
+          <p:cNvPr id="7" name="TextBox 6"/>
+          <p:cNvSpPr txBox="1"/>
+          <p:nvPr/>
+        </p:nvSpPr>
+        <p:spPr>
+          <a:xfrm>
+            <a:off x="476402" y="2476789"/>
+            <a:ext cx="2492654" cy="1123340"/>
           </a:xfrm>
           <a:prstGeom prst="rect">
             <a:avLst/>
@@ -17298,66 +17257,66 @@
               </a:spcAft>
             </a:pPr>
             <a:r>
-              <a:rPr sz="1100" b="0">
+              <a:rPr sz="1050" b="0">
                 <a:solidFill>
                   <a:srgbClr val="000000"/>
                 </a:solidFill>
                 <a:latin typeface="Arial"/>
               </a:rPr>
-              <a:t>Удаление дерева и чтение ключей — отказ по правилу, а не по догадке.</a:t>
-            </a:r>
-          </a:p>
-        </p:txBody>
-      </p:sp>
-      <p:sp>
-        <p:nvSpPr>
-          <p:cNvPr id="15" name="TextBox 14"/>
-          <p:cNvSpPr txBox="1"/>
-          <p:nvPr/>
-        </p:nvSpPr>
-        <p:spPr>
-          <a:xfrm>
-            <a:off x="3322015" y="2975366"/>
-            <a:ext cx="2492654" cy="196138"/>
-          </a:xfrm>
-          <a:prstGeom prst="rect">
-            <a:avLst/>
-          </a:prstGeom>
-          <a:noFill/>
-        </p:spPr>
-        <p:txBody>
-          <a:bodyPr wrap="square" lIns="0" rIns="0" tIns="0" bIns="0" anchor="t">
-            <a:spAutoFit/>
-          </a:bodyPr>
-          <a:lstStyle/>
-          <a:p>
-            <a:pPr>
-              <a:spcAft>
-                <a:spcPts val="0"/>
-              </a:spcAft>
-            </a:pPr>
-            <a:r>
-              <a:rPr sz="1100" b="0">
+              <a:t>README, документация зависимости, страница из сети, ответ внешнего инструмента. Для правил по путям это одинаковые обычные файлы. Написал их не пользователь.</a:t>
+            </a:r>
+          </a:p>
+        </p:txBody>
+      </p:sp>
+      <p:sp>
+        <p:nvSpPr>
+          <p:cNvPr id="8" name="TextBox 7"/>
+          <p:cNvSpPr txBox="1"/>
+          <p:nvPr/>
+        </p:nvSpPr>
+        <p:spPr>
+          <a:xfrm>
+            <a:off x="3322015" y="2262134"/>
+            <a:ext cx="2492654" cy="187223"/>
+          </a:xfrm>
+          <a:prstGeom prst="rect">
+            <a:avLst/>
+          </a:prstGeom>
+          <a:noFill/>
+        </p:spPr>
+        <p:txBody>
+          <a:bodyPr wrap="square" lIns="0" rIns="0" tIns="0" bIns="0" anchor="t">
+            <a:spAutoFit/>
+          </a:bodyPr>
+          <a:lstStyle/>
+          <a:p>
+            <a:pPr>
+              <a:spcAft>
+                <a:spcPts val="0"/>
+              </a:spcAft>
+            </a:pPr>
+            <a:r>
+              <a:rPr sz="1050" b="0">
                 <a:solidFill>
                   <a:srgbClr val="0000FF"/>
                 </a:solidFill>
                 <a:latin typeface="Inter"/>
               </a:rPr>
-              <a:t>Пакеты и права инструментов</a:t>
-            </a:r>
-          </a:p>
-        </p:txBody>
-      </p:sp>
-      <p:sp>
-        <p:nvSpPr>
-          <p:cNvPr id="16" name="TextBox 15"/>
-          <p:cNvSpPr txBox="1"/>
-          <p:nvPr/>
-        </p:nvSpPr>
-        <p:spPr>
-          <a:xfrm>
-            <a:off x="3322015" y="3198936"/>
-            <a:ext cx="2492654" cy="588416"/>
+              <a:t>Связано ли действие с задачей</a:t>
+            </a:r>
+          </a:p>
+        </p:txBody>
+      </p:sp>
+      <p:sp>
+        <p:nvSpPr>
+          <p:cNvPr id="9" name="TextBox 8"/>
+          <p:cNvSpPr txBox="1"/>
+          <p:nvPr/>
+        </p:nvSpPr>
+        <p:spPr>
+          <a:xfrm>
+            <a:off x="3322015" y="2476789"/>
+            <a:ext cx="2492654" cy="1123340"/>
           </a:xfrm>
           <a:prstGeom prst="rect">
             <a:avLst/>
@@ -17379,66 +17338,66 @@
               </a:spcAft>
             </a:pPr>
             <a:r>
-              <a:rPr sz="1100" b="0">
+              <a:rPr sz="1050" b="0">
                 <a:solidFill>
                   <a:srgbClr val="000000"/>
                 </a:solidFill>
                 <a:latin typeface="Arial"/>
               </a:rPr>
-              <a:t>Происхождение оценивается до исполнения. Неизвестные права ждут человека.</a:t>
-            </a:r>
-          </a:p>
-        </p:txBody>
-      </p:sp>
-      <p:sp>
-        <p:nvSpPr>
-          <p:cNvPr id="17" name="TextBox 16"/>
-          <p:cNvSpPr txBox="1"/>
-          <p:nvPr/>
-        </p:nvSpPr>
-        <p:spPr>
-          <a:xfrm>
-            <a:off x="6170371" y="2975366"/>
-            <a:ext cx="2492654" cy="196138"/>
-          </a:xfrm>
-          <a:prstGeom prst="rect">
-            <a:avLst/>
-          </a:prstGeom>
-          <a:noFill/>
-        </p:spPr>
-        <p:txBody>
-          <a:bodyPr wrap="square" lIns="0" rIns="0" tIns="0" bIns="0" anchor="t">
-            <a:spAutoFit/>
-          </a:bodyPr>
-          <a:lstStyle/>
-          <a:p>
-            <a:pPr>
-              <a:spcAft>
-                <a:spcPts val="0"/>
-              </a:spcAft>
-            </a:pPr>
-            <a:r>
-              <a:rPr sz="1100" b="0">
+              <a:t>«Поправь опечатку в README» и отправка ключа наружу не связаны ничем. Совпадение с задачей только снижает тревогу и никогда не даёт разрешения.</a:t>
+            </a:r>
+          </a:p>
+        </p:txBody>
+      </p:sp>
+      <p:sp>
+        <p:nvSpPr>
+          <p:cNvPr id="10" name="TextBox 9"/>
+          <p:cNvSpPr txBox="1"/>
+          <p:nvPr/>
+        </p:nvSpPr>
+        <p:spPr>
+          <a:xfrm>
+            <a:off x="6170371" y="2262134"/>
+            <a:ext cx="2492654" cy="187223"/>
+          </a:xfrm>
+          <a:prstGeom prst="rect">
+            <a:avLst/>
+          </a:prstGeom>
+          <a:noFill/>
+        </p:spPr>
+        <p:txBody>
+          <a:bodyPr wrap="square" lIns="0" rIns="0" tIns="0" bIns="0" anchor="t">
+            <a:spAutoFit/>
+          </a:bodyPr>
+          <a:lstStyle/>
+          <a:p>
+            <a:pPr>
+              <a:spcAft>
+                <a:spcPts val="0"/>
+              </a:spcAft>
+            </a:pPr>
+            <a:r>
+              <a:rPr sz="1050" b="0">
                 <a:solidFill>
                   <a:srgbClr val="0000FF"/>
                 </a:solidFill>
                 <a:latin typeface="Inter"/>
               </a:rPr>
-              <a:t>Код проекта и система</a:t>
-            </a:r>
-          </a:p>
-        </p:txBody>
-      </p:sp>
-      <p:sp>
-        <p:nvSpPr>
-          <p:cNvPr id="18" name="TextBox 17"/>
-          <p:cNvSpPr txBox="1"/>
-          <p:nvPr/>
-        </p:nvSpPr>
-        <p:spPr>
-          <a:xfrm>
-            <a:off x="6170371" y="3198936"/>
-            <a:ext cx="2492654" cy="588416"/>
+              <a:t>Чего модель не может</a:t>
+            </a:r>
+          </a:p>
+        </p:txBody>
+      </p:sp>
+      <p:sp>
+        <p:nvSpPr>
+          <p:cNvPr id="11" name="TextBox 10"/>
+          <p:cNvSpPr txBox="1"/>
+          <p:nvPr/>
+        </p:nvSpPr>
+        <p:spPr>
+          <a:xfrm>
+            <a:off x="6170371" y="2476789"/>
+            <a:ext cx="2492654" cy="1123340"/>
           </a:xfrm>
           <a:prstGeom prst="rect">
             <a:avLst/>
@@ -17460,75 +17419,295 @@
               </a:spcAft>
             </a:pPr>
             <a:r>
+              <a:rPr sz="1050" b="0">
+                <a:solidFill>
+                  <a:srgbClr val="000000"/>
+                </a:solidFill>
+                <a:latin typeface="Arial"/>
+              </a:rPr>
+              <a:t>Она возвращает не решение, а свидетельство, и свёртка умеет только ужесточать. Отменить запрет или выдать разрешение она не способна — это свойство кода, а не обещание.</a:t>
+            </a:r>
+          </a:p>
+        </p:txBody>
+      </p:sp>
+      <p:sp>
+        <p:nvSpPr>
+          <p:cNvPr id="12" name="TextBox 11"/>
+          <p:cNvSpPr txBox="1"/>
+          <p:nvPr/>
+        </p:nvSpPr>
+        <p:spPr>
+          <a:xfrm>
+            <a:off x="476402" y="3764721"/>
+            <a:ext cx="2364638" cy="384047"/>
+          </a:xfrm>
+          <a:prstGeom prst="rect">
+            <a:avLst/>
+          </a:prstGeom>
+          <a:noFill/>
+        </p:spPr>
+        <p:txBody>
+          <a:bodyPr wrap="square" lIns="0" rIns="0" tIns="0" bIns="0" anchor="t">
+            <a:spAutoFit/>
+          </a:bodyPr>
+          <a:lstStyle/>
+          <a:p>
+            <a:pPr>
+              <a:spcAft>
+                <a:spcPts val="0"/>
+              </a:spcAft>
+            </a:pPr>
+            <a:r>
+              <a:rPr sz="2000" b="1">
+                <a:solidFill>
+                  <a:srgbClr val="0000FF"/>
+                </a:solidFill>
+                <a:latin typeface="Inter"/>
+              </a:rPr>
+              <a:t>92 % → 4 %</a:t>
+            </a:r>
+          </a:p>
+        </p:txBody>
+      </p:sp>
+      <p:sp>
+        <p:nvSpPr>
+          <p:cNvPr id="13" name="TextBox 12"/>
+          <p:cNvSpPr txBox="1"/>
+          <p:nvPr/>
+        </p:nvSpPr>
+        <p:spPr>
+          <a:xfrm>
+            <a:off x="476402" y="4240209"/>
+            <a:ext cx="2364638" cy="410108"/>
+          </a:xfrm>
+          <a:prstGeom prst="rect">
+            <a:avLst/>
+          </a:prstGeom>
+          <a:noFill/>
+        </p:spPr>
+        <p:txBody>
+          <a:bodyPr wrap="square" lIns="0" rIns="0" tIns="0" bIns="0" anchor="t">
+            <a:spAutoFit/>
+          </a:bodyPr>
+          <a:lstStyle/>
+          <a:p>
+            <a:pPr>
+              <a:lnSpc>
+                <a:spcPct val="115000"/>
+              </a:lnSpc>
+              <a:spcAft>
+                <a:spcPts val="0"/>
+              </a:spcAft>
+            </a:pPr>
+            <a:r>
+              <a:rPr sz="1200" b="0">
+                <a:solidFill>
+                  <a:srgbClr val="000000"/>
+                </a:solidFill>
+                <a:latin typeface="Arial"/>
+              </a:rPr>
+              <a:t>подброшенная инструкция доводит дело до вреда</a:t>
+            </a:r>
+          </a:p>
+        </p:txBody>
+      </p:sp>
+      <p:sp>
+        <p:nvSpPr>
+          <p:cNvPr id="14" name="TextBox 13"/>
+          <p:cNvSpPr txBox="1"/>
+          <p:nvPr/>
+        </p:nvSpPr>
+        <p:spPr>
+          <a:xfrm>
+            <a:off x="3206800" y="3764721"/>
+            <a:ext cx="2364638" cy="384047"/>
+          </a:xfrm>
+          <a:prstGeom prst="rect">
+            <a:avLst/>
+          </a:prstGeom>
+          <a:noFill/>
+        </p:spPr>
+        <p:txBody>
+          <a:bodyPr wrap="square" lIns="0" rIns="0" tIns="0" bIns="0" anchor="t">
+            <a:spAutoFit/>
+          </a:bodyPr>
+          <a:lstStyle/>
+          <a:p>
+            <a:pPr>
+              <a:spcAft>
+                <a:spcPts val="0"/>
+              </a:spcAft>
+            </a:pPr>
+            <a:r>
+              <a:rPr sz="2000" b="1">
+                <a:solidFill>
+                  <a:srgbClr val="0000FF"/>
+                </a:solidFill>
+                <a:latin typeface="Inter"/>
+              </a:rPr>
+              <a:t>100 % → 0 %</a:t>
+            </a:r>
+          </a:p>
+        </p:txBody>
+      </p:sp>
+      <p:sp>
+        <p:nvSpPr>
+          <p:cNvPr id="15" name="TextBox 14"/>
+          <p:cNvSpPr txBox="1"/>
+          <p:nvPr/>
+        </p:nvSpPr>
+        <p:spPr>
+          <a:xfrm>
+            <a:off x="3206800" y="4240209"/>
+            <a:ext cx="2364638" cy="410108"/>
+          </a:xfrm>
+          <a:prstGeom prst="rect">
+            <a:avLst/>
+          </a:prstGeom>
+          <a:noFill/>
+        </p:spPr>
+        <p:txBody>
+          <a:bodyPr wrap="square" lIns="0" rIns="0" tIns="0" bIns="0" anchor="t">
+            <a:spAutoFit/>
+          </a:bodyPr>
+          <a:lstStyle/>
+          <a:p>
+            <a:pPr>
+              <a:lnSpc>
+                <a:spcPct val="115000"/>
+              </a:lnSpc>
+              <a:spcAft>
+                <a:spcPts val="0"/>
+              </a:spcAft>
+            </a:pPr>
+            <a:r>
+              <a:rPr sz="1200" b="0">
+                <a:solidFill>
+                  <a:srgbClr val="000000"/>
+                </a:solidFill>
+                <a:latin typeface="Arial"/>
+              </a:rPr>
+              <a:t>действие не по задаче пользователя</a:t>
+            </a:r>
+          </a:p>
+        </p:txBody>
+      </p:sp>
+      <p:sp>
+        <p:nvSpPr>
+          <p:cNvPr id="16" name="TextBox 15"/>
+          <p:cNvSpPr txBox="1"/>
+          <p:nvPr/>
+        </p:nvSpPr>
+        <p:spPr>
+          <a:xfrm>
+            <a:off x="5937199" y="3764721"/>
+            <a:ext cx="2364638" cy="384047"/>
+          </a:xfrm>
+          <a:prstGeom prst="rect">
+            <a:avLst/>
+          </a:prstGeom>
+          <a:noFill/>
+        </p:spPr>
+        <p:txBody>
+          <a:bodyPr wrap="square" lIns="0" rIns="0" tIns="0" bIns="0" anchor="t">
+            <a:spAutoFit/>
+          </a:bodyPr>
+          <a:lstStyle/>
+          <a:p>
+            <a:pPr>
+              <a:spcAft>
+                <a:spcPts val="0"/>
+              </a:spcAft>
+            </a:pPr>
+            <a:r>
+              <a:rPr sz="2000" b="1">
+                <a:solidFill>
+                  <a:srgbClr val="0000FF"/>
+                </a:solidFill>
+                <a:latin typeface="Inter"/>
+              </a:rPr>
+              <a:t>98 %</a:t>
+            </a:r>
+          </a:p>
+        </p:txBody>
+      </p:sp>
+      <p:sp>
+        <p:nvSpPr>
+          <p:cNvPr id="17" name="TextBox 16"/>
+          <p:cNvSpPr txBox="1"/>
+          <p:nvPr/>
+        </p:nvSpPr>
+        <p:spPr>
+          <a:xfrm>
+            <a:off x="5937199" y="4240209"/>
+            <a:ext cx="2364638" cy="410108"/>
+          </a:xfrm>
+          <a:prstGeom prst="rect">
+            <a:avLst/>
+          </a:prstGeom>
+          <a:noFill/>
+        </p:spPr>
+        <p:txBody>
+          <a:bodyPr wrap="square" lIns="0" rIns="0" tIns="0" bIns="0" anchor="t">
+            <a:spAutoFit/>
+          </a:bodyPr>
+          <a:lstStyle/>
+          <a:p>
+            <a:pPr>
+              <a:lnSpc>
+                <a:spcPct val="115000"/>
+              </a:lnSpc>
+              <a:spcAft>
+                <a:spcPts val="0"/>
+              </a:spcAft>
+            </a:pPr>
+            <a:r>
+              <a:rPr sz="1200" b="0">
+                <a:solidFill>
+                  <a:srgbClr val="000000"/>
+                </a:solidFill>
+                <a:latin typeface="Arial"/>
+              </a:rPr>
+              <a:t>обычных задач по-прежнему выполняются</a:t>
+            </a:r>
+          </a:p>
+        </p:txBody>
+      </p:sp>
+      <p:sp>
+        <p:nvSpPr>
+          <p:cNvPr id="18" name="TextBox 17"/>
+          <p:cNvSpPr txBox="1"/>
+          <p:nvPr/>
+        </p:nvSpPr>
+        <p:spPr>
+          <a:xfrm>
+            <a:off x="476402" y="4760046"/>
+            <a:ext cx="8191195" cy="219456"/>
+          </a:xfrm>
+          <a:prstGeom prst="rect">
+            <a:avLst/>
+          </a:prstGeom>
+          <a:noFill/>
+        </p:spPr>
+        <p:txBody>
+          <a:bodyPr wrap="square" lIns="0" rIns="0" tIns="0" bIns="0" anchor="t">
+            <a:spAutoFit/>
+          </a:bodyPr>
+          <a:lstStyle/>
+          <a:p>
+            <a:pPr>
+              <a:spcAft>
+                <a:spcPts val="0"/>
+              </a:spcAft>
+            </a:pPr>
+            <a:r>
               <a:rPr sz="1100" b="0">
                 <a:solidFill>
                   <a:srgbClr val="000000"/>
                 </a:solidFill>
                 <a:latin typeface="Arial"/>
               </a:rPr>
-              <a:t>Модуль не импортируется до одобрения. Чтения расширения судит система.</a:t>
-            </a:r>
-          </a:p>
-        </p:txBody>
-      </p:sp>
-      <p:sp>
-        <p:nvSpPr>
-          <p:cNvPr id="19" name="Rectangle 18"/>
-          <p:cNvSpPr/>
-          <p:nvPr/>
-        </p:nvSpPr>
-        <p:spPr>
-          <a:xfrm>
-            <a:off x="476402" y="3878793"/>
-            <a:ext cx="8191195" cy="1115910"/>
-          </a:xfrm>
-          <a:prstGeom prst="rect">
-            <a:avLst/>
-          </a:prstGeom>
-          <a:noFill/>
-          <a:ln w="9525">
-            <a:solidFill>
-              <a:srgbClr val="000000"/>
-            </a:solidFill>
-          </a:ln>
-          <a:effectLst/>
-        </p:spPr>
-        <p:txBody>
-          <a:bodyPr rtlCol="0" anchor="t" wrap="square" lIns="210312" rIns="210312" tIns="118872" bIns="36576"/>
-          <a:lstStyle/>
-          <a:p>
-            <a:pPr algn="l">
-              <a:spcAft>
-                <a:spcPts val="400"/>
-              </a:spcAft>
-            </a:pPr>
-            <a:r>
-              <a:rPr sz="1300" b="1">
-                <a:solidFill>
-                  <a:srgbClr val="000000"/>
-                </a:solidFill>
-                <a:latin typeface="Inter"/>
-              </a:rPr>
-              <a:t>Что осталось открытым</a:t>
-            </a:r>
-          </a:p>
-          <a:p>
-            <a:pPr>
-              <a:lnSpc>
-                <a:spcPct val="125000"/>
-              </a:lnSpc>
-              <a:spcAft>
-                <a:spcPts val="0"/>
-              </a:spcAft>
-            </a:pPr>
-            <a:r>
-              <a:rPr sz="1100" b="0">
-                <a:solidFill>
-                  <a:srgbClr val="000000"/>
-                </a:solidFill>
-                <a:latin typeface="Arial"/>
-              </a:rPr>
-              <a:t>Если каждое действие цепочки разрешено по отдельности — прочитать обычный файл проекта можно, отправить его наружу тоже, — мы это не ловим: 3 из 3 прогонов.</a:t>
+              <a:t>Оба класса правила не закрывают: без слоя смысла это 92 % и 100 %.</a:t>
             </a:r>
           </a:p>
         </p:txBody>

--- a/submission/Security-Auto-ATH.pptx
+++ b/submission/Security-Auto-ATH.pptx
@@ -7112,7 +7112,7 @@
         <p:spPr>
           <a:xfrm>
             <a:off x="476402" y="2445471"/>
-            <a:ext cx="7315200" cy="1029087"/>
+            <a:ext cx="7315200" cy="898902"/>
           </a:xfrm>
           <a:prstGeom prst="rect">
             <a:avLst/>
@@ -7127,7 +7127,7 @@
         </p:nvSpPr>
         <p:spPr>
           <a:xfrm>
-            <a:off x="476402" y="3639150"/>
+            <a:off x="476402" y="3508965"/>
             <a:ext cx="7315200" cy="196138"/>
           </a:xfrm>
           <a:prstGeom prst="rect">
@@ -7174,8 +7174,8 @@
         </p:blipFill>
         <p:spPr>
           <a:xfrm>
-            <a:off x="476402" y="3890153"/>
-            <a:ext cx="7315200" cy="1029087"/>
+            <a:off x="476402" y="3759968"/>
+            <a:ext cx="7315200" cy="898902"/>
           </a:xfrm>
           <a:prstGeom prst="rect">
             <a:avLst/>
@@ -8185,8 +8185,8 @@
         </p:nvSpPr>
         <p:spPr>
           <a:xfrm>
-            <a:off x="7906085" y="3978737"/>
-            <a:ext cx="761512" cy="57607"/>
+            <a:off x="7906085" y="3997939"/>
+            <a:ext cx="761512" cy="38404"/>
           </a:xfrm>
           <a:prstGeom prst="rect">
             <a:avLst/>
@@ -8215,7 +8215,7 @@
         </p:nvSpPr>
         <p:spPr>
           <a:xfrm>
-            <a:off x="7906085" y="3795857"/>
+            <a:off x="7906085" y="3815059"/>
             <a:ext cx="761512" cy="164592"/>
           </a:xfrm>
           <a:prstGeom prst="rect">
@@ -8241,7 +8241,7 @@
                 </a:solidFill>
                 <a:latin typeface="Arial"/>
               </a:rPr>
-              <a:t>6 %</a:t>
+              <a:t>4 %</a:t>
             </a:r>
           </a:p>
         </p:txBody>
@@ -8319,7 +8319,7 @@
                 </a:solidFill>
                 <a:latin typeface="Arial"/>
               </a:rPr>
-              <a:t>все десять слоёв · 6 %</a:t>
+              <a:t>все десять слоёв · 4 %</a:t>
             </a:r>
           </a:p>
         </p:txBody>
@@ -8531,7 +8531,7 @@
                 </a:solidFill>
                 <a:latin typeface="Inter"/>
               </a:rPr>
-              <a:t>100 %  →  6 %</a:t>
+              <a:t>100 %  →  4 %</a:t>
             </a:r>
           </a:p>
         </p:txBody>
@@ -8574,7 +8574,7 @@
                 <a:latin typeface="Inter"/>
               </a:rPr>
               <a:t>Успешность атак (ASR) — доля прогонов, которые довели дело до настоящего вреда.
-27 прогонов из 417 · 5760 прогонов всего, ни одного сорванного</a:t>
+18 прогонов из 417 · 5760 прогонов всего, ни одного сорванного</a:t>
             </a:r>
           </a:p>
         </p:txBody>
@@ -8648,7 +8648,7 @@
                 </a:solidFill>
                 <a:latin typeface="Inter"/>
               </a:rPr>
-              <a:t>98 %</a:t>
+              <a:t>95 %</a:t>
             </a:r>
           </a:p>
         </p:txBody>
@@ -8690,7 +8690,7 @@
                 </a:solidFill>
                 <a:latin typeface="Arial"/>
               </a:rPr>
-              <a:t>обычных задач по-прежнему выполняются · 150 из 153</a:t>
+              <a:t>обычных задач по-прежнему выполняются · 146 из 153</a:t>
             </a:r>
           </a:p>
         </p:txBody>
@@ -8810,7 +8810,7 @@
                 </a:solidFill>
                 <a:latin typeface="Inter"/>
               </a:rPr>
-              <a:t>0,27</a:t>
+              <a:t>0,29</a:t>
             </a:r>
           </a:p>
         </p:txBody>
@@ -8891,7 +8891,7 @@
                 </a:solidFill>
                 <a:latin typeface="Inter"/>
               </a:rPr>
-              <a:t>1,60 мс</a:t>
+              <a:t>1,36 мс</a:t>
             </a:r>
           </a:p>
         </p:txBody>
@@ -8933,7 +8933,7 @@
                 </a:solidFill>
                 <a:latin typeface="Arial"/>
               </a:rPr>
-              <a:t>стоит решение в 95 % случаев</a:t>
+              <a:t>стоит решение правил в 95 %</a:t>
             </a:r>
           </a:p>
         </p:txBody>
@@ -8975,7 +8975,7 @@
                 </a:solidFill>
                 <a:latin typeface="Arial"/>
               </a:rPr>
-              <a:t>«Запретить всё» дало бы ноль атак и ноль сделанных задач — поэтому величин пять. Без слоя смысла те же сценарии дают 24 %: он снимает восемнадцать пунктов и не стоит ни одной задачи.</a:t>
+              <a:t>«Запретить всё» дало бы ноль атак и ноль сделанных задач — поэтому величин пять. Без слоя смысла те же сценарии дают 24 %: он снимает двадцать пунктов и стоит четырёх прогонов из 153.</a:t>
             </a:r>
           </a:p>
         </p:txBody>
@@ -10103,14 +10103,308 @@
       </p:sp>
       <p:sp>
         <p:nvSpPr>
-          <p:cNvPr id="32" name="Rectangle 31"/>
+          <p:cNvPr id="32" name="TextBox 31"/>
+          <p:cNvSpPr txBox="1"/>
+          <p:nvPr/>
+        </p:nvSpPr>
+        <p:spPr>
+          <a:xfrm>
+            <a:off x="5697626" y="3190067"/>
+            <a:ext cx="896112" cy="182880"/>
+          </a:xfrm>
+          <a:prstGeom prst="rect">
+            <a:avLst/>
+          </a:prstGeom>
+          <a:noFill/>
+        </p:spPr>
+        <p:txBody>
+          <a:bodyPr wrap="square" lIns="0" rIns="0" tIns="0" bIns="0" anchor="t">
+            <a:spAutoFit/>
+          </a:bodyPr>
+          <a:lstStyle/>
+          <a:p>
+            <a:pPr>
+              <a:spcAft>
+                <a:spcPts val="0"/>
+              </a:spcAft>
+            </a:pPr>
+            <a:r>
+              <a:rPr sz="1000" b="1">
+                <a:solidFill>
+                  <a:srgbClr val="000000"/>
+                </a:solidFill>
+                <a:latin typeface="Arial"/>
+              </a:rPr>
+              <a:t>0/75</a:t>
+            </a:r>
+          </a:p>
+        </p:txBody>
+      </p:sp>
+      <p:sp>
+        <p:nvSpPr>
+          <p:cNvPr id="33" name="TextBox 32"/>
+          <p:cNvSpPr txBox="1"/>
+          <p:nvPr/>
+        </p:nvSpPr>
+        <p:spPr>
+          <a:xfrm>
+            <a:off x="6666890" y="3190067"/>
+            <a:ext cx="1572768" cy="182880"/>
+          </a:xfrm>
+          <a:prstGeom prst="rect">
+            <a:avLst/>
+          </a:prstGeom>
+          <a:noFill/>
+        </p:spPr>
+        <p:txBody>
+          <a:bodyPr wrap="square" lIns="0" rIns="0" tIns="0" bIns="0" anchor="t">
+            <a:spAutoFit/>
+          </a:bodyPr>
+          <a:lstStyle/>
+          <a:p>
+            <a:pPr>
+              <a:spcAft>
+                <a:spcPts val="0"/>
+              </a:spcAft>
+            </a:pPr>
+            <a:r>
+              <a:rPr sz="1000" b="0">
+                <a:solidFill>
+                  <a:srgbClr val="595959"/>
+                </a:solidFill>
+                <a:latin typeface="Arial"/>
+              </a:rPr>
+              <a:t>Закрыто · слоем смысла</a:t>
+            </a:r>
+          </a:p>
+        </p:txBody>
+      </p:sp>
+      <p:sp>
+        <p:nvSpPr>
+          <p:cNvPr id="34" name="TextBox 33"/>
+          <p:cNvSpPr txBox="1"/>
+          <p:nvPr/>
+        </p:nvSpPr>
+        <p:spPr>
+          <a:xfrm>
+            <a:off x="476402" y="3438784"/>
+            <a:ext cx="3291840" cy="182880"/>
+          </a:xfrm>
+          <a:prstGeom prst="rect">
+            <a:avLst/>
+          </a:prstGeom>
+          <a:noFill/>
+        </p:spPr>
+        <p:txBody>
+          <a:bodyPr wrap="square" lIns="0" rIns="0" tIns="0" bIns="0" anchor="t">
+            <a:spAutoFit/>
+          </a:bodyPr>
+          <a:lstStyle/>
+          <a:p>
+            <a:pPr>
+              <a:spcAft>
+                <a:spcPts val="0"/>
+              </a:spcAft>
+            </a:pPr>
+            <a:r>
+              <a:rPr sz="1000" b="0">
+                <a:solidFill>
+                  <a:srgbClr val="000000"/>
+                </a:solidFill>
+                <a:latin typeface="Arial"/>
+              </a:rPr>
+              <a:t>Секрет в обычном файле проекта</a:t>
+            </a:r>
+          </a:p>
+        </p:txBody>
+      </p:sp>
+      <p:sp>
+        <p:nvSpPr>
+          <p:cNvPr id="35" name="Rectangle 34"/>
           <p:cNvSpPr/>
           <p:nvPr/>
         </p:nvSpPr>
         <p:spPr>
           <a:xfrm>
-            <a:off x="3877970" y="3217499"/>
-            <a:ext cx="67665" cy="114300"/>
+            <a:off x="3877970" y="3457072"/>
+            <a:ext cx="1691640" cy="114300"/>
+          </a:xfrm>
+          <a:prstGeom prst="rect">
+            <a:avLst/>
+          </a:prstGeom>
+          <a:solidFill>
+            <a:srgbClr val="DDDDE3"/>
+          </a:solidFill>
+          <a:ln>
+            <a:noFill/>
+          </a:ln>
+          <a:effectLst/>
+        </p:spPr>
+        <p:txBody>
+          <a:bodyPr rtlCol="0" anchor="ctr" wrap="square" lIns="54864" rIns="54864" tIns="36576" bIns="36576"/>
+          <a:lstStyle/>
+          <a:p>
+            <a:pPr algn="l"/>
+          </a:p>
+        </p:txBody>
+      </p:sp>
+      <p:sp>
+        <p:nvSpPr>
+          <p:cNvPr id="36" name="TextBox 35"/>
+          <p:cNvSpPr txBox="1"/>
+          <p:nvPr/>
+        </p:nvSpPr>
+        <p:spPr>
+          <a:xfrm>
+            <a:off x="5697626" y="3429640"/>
+            <a:ext cx="896112" cy="182880"/>
+          </a:xfrm>
+          <a:prstGeom prst="rect">
+            <a:avLst/>
+          </a:prstGeom>
+          <a:noFill/>
+        </p:spPr>
+        <p:txBody>
+          <a:bodyPr wrap="square" lIns="0" rIns="0" tIns="0" bIns="0" anchor="t">
+            <a:spAutoFit/>
+          </a:bodyPr>
+          <a:lstStyle/>
+          <a:p>
+            <a:pPr>
+              <a:spcAft>
+                <a:spcPts val="0"/>
+              </a:spcAft>
+            </a:pPr>
+            <a:r>
+              <a:rPr sz="1000" b="1">
+                <a:solidFill>
+                  <a:srgbClr val="000000"/>
+                </a:solidFill>
+                <a:latin typeface="Arial"/>
+              </a:rPr>
+              <a:t>0/33</a:t>
+            </a:r>
+          </a:p>
+        </p:txBody>
+      </p:sp>
+      <p:sp>
+        <p:nvSpPr>
+          <p:cNvPr id="37" name="TextBox 36"/>
+          <p:cNvSpPr txBox="1"/>
+          <p:nvPr/>
+        </p:nvSpPr>
+        <p:spPr>
+          <a:xfrm>
+            <a:off x="6666890" y="3429640"/>
+            <a:ext cx="1572768" cy="182880"/>
+          </a:xfrm>
+          <a:prstGeom prst="rect">
+            <a:avLst/>
+          </a:prstGeom>
+          <a:noFill/>
+        </p:spPr>
+        <p:txBody>
+          <a:bodyPr wrap="square" lIns="0" rIns="0" tIns="0" bIns="0" anchor="t">
+            <a:spAutoFit/>
+          </a:bodyPr>
+          <a:lstStyle/>
+          <a:p>
+            <a:pPr>
+              <a:spcAft>
+                <a:spcPts val="0"/>
+              </a:spcAft>
+            </a:pPr>
+            <a:r>
+              <a:rPr sz="1000" b="0">
+                <a:solidFill>
+                  <a:srgbClr val="595959"/>
+                </a:solidFill>
+                <a:latin typeface="Arial"/>
+              </a:rPr>
+              <a:t>Закрыто · было 18 %</a:t>
+            </a:r>
+          </a:p>
+        </p:txBody>
+      </p:sp>
+      <p:sp>
+        <p:nvSpPr>
+          <p:cNvPr id="38" name="TextBox 37"/>
+          <p:cNvSpPr txBox="1"/>
+          <p:nvPr/>
+        </p:nvSpPr>
+        <p:spPr>
+          <a:xfrm>
+            <a:off x="476402" y="3678356"/>
+            <a:ext cx="3291840" cy="182880"/>
+          </a:xfrm>
+          <a:prstGeom prst="rect">
+            <a:avLst/>
+          </a:prstGeom>
+          <a:noFill/>
+        </p:spPr>
+        <p:txBody>
+          <a:bodyPr wrap="square" lIns="0" rIns="0" tIns="0" bIns="0" anchor="t">
+            <a:spAutoFit/>
+          </a:bodyPr>
+          <a:lstStyle/>
+          <a:p>
+            <a:pPr>
+              <a:spcAft>
+                <a:spcPts val="0"/>
+              </a:spcAft>
+            </a:pPr>
+            <a:r>
+              <a:rPr sz="1000" b="0">
+                <a:solidFill>
+                  <a:srgbClr val="000000"/>
+                </a:solidFill>
+                <a:latin typeface="Arial"/>
+              </a:rPr>
+              <a:t>Расширение читает файлы разработчика</a:t>
+            </a:r>
+          </a:p>
+        </p:txBody>
+      </p:sp>
+      <p:sp>
+        <p:nvSpPr>
+          <p:cNvPr id="39" name="Rectangle 38"/>
+          <p:cNvSpPr/>
+          <p:nvPr/>
+        </p:nvSpPr>
+        <p:spPr>
+          <a:xfrm>
+            <a:off x="3877970" y="3696644"/>
+            <a:ext cx="1691640" cy="114300"/>
+          </a:xfrm>
+          <a:prstGeom prst="rect">
+            <a:avLst/>
+          </a:prstGeom>
+          <a:solidFill>
+            <a:srgbClr val="DDDDE3"/>
+          </a:solidFill>
+          <a:ln>
+            <a:noFill/>
+          </a:ln>
+          <a:effectLst/>
+        </p:spPr>
+        <p:txBody>
+          <a:bodyPr rtlCol="0" anchor="ctr" wrap="square" lIns="54864" rIns="54864" tIns="36576" bIns="36576"/>
+          <a:lstStyle/>
+          <a:p>
+            <a:pPr algn="l"/>
+          </a:p>
+        </p:txBody>
+      </p:sp>
+      <p:sp>
+        <p:nvSpPr>
+          <p:cNvPr id="40" name="Rectangle 39"/>
+          <p:cNvSpPr/>
+          <p:nvPr/>
+        </p:nvSpPr>
+        <p:spPr>
+          <a:xfrm>
+            <a:off x="3877970" y="3696644"/>
+            <a:ext cx="153785" cy="114300"/>
           </a:xfrm>
           <a:prstGeom prst="rect">
             <a:avLst/>
@@ -10133,13 +10427,13 @@
       </p:sp>
       <p:sp>
         <p:nvSpPr>
-          <p:cNvPr id="33" name="TextBox 32"/>
-          <p:cNvSpPr txBox="1"/>
-          <p:nvPr/>
-        </p:nvSpPr>
-        <p:spPr>
-          <a:xfrm>
-            <a:off x="5697626" y="3190067"/>
+          <p:cNvPr id="41" name="TextBox 40"/>
+          <p:cNvSpPr txBox="1"/>
+          <p:nvPr/>
+        </p:nvSpPr>
+        <p:spPr>
+          <a:xfrm>
+            <a:off x="5697626" y="3669212"/>
             <a:ext cx="896112" cy="182880"/>
           </a:xfrm>
           <a:prstGeom prst="rect">
@@ -10165,20 +10459,20 @@
                 </a:solidFill>
                 <a:latin typeface="Arial"/>
               </a:rPr>
-              <a:t>3/75</a:t>
-            </a:r>
-          </a:p>
-        </p:txBody>
-      </p:sp>
-      <p:sp>
-        <p:nvSpPr>
-          <p:cNvPr id="34" name="TextBox 33"/>
-          <p:cNvSpPr txBox="1"/>
-          <p:nvPr/>
-        </p:nvSpPr>
-        <p:spPr>
-          <a:xfrm>
-            <a:off x="6666890" y="3190067"/>
+              <a:t>3/33</a:t>
+            </a:r>
+          </a:p>
+        </p:txBody>
+      </p:sp>
+      <p:sp>
+        <p:nvSpPr>
+          <p:cNvPr id="42" name="TextBox 41"/>
+          <p:cNvSpPr txBox="1"/>
+          <p:nvPr/>
+        </p:nvSpPr>
+        <p:spPr>
+          <a:xfrm>
+            <a:off x="6666890" y="3669212"/>
             <a:ext cx="1572768" cy="182880"/>
           </a:xfrm>
           <a:prstGeom prst="rect">
@@ -10204,20 +10498,20 @@
                 </a:solidFill>
                 <a:latin typeface="Arial"/>
               </a:rPr>
-              <a:t>Сильно снижено · 4 %</a:t>
-            </a:r>
-          </a:p>
-        </p:txBody>
-      </p:sp>
-      <p:sp>
-        <p:nvSpPr>
-          <p:cNvPr id="35" name="TextBox 34"/>
-          <p:cNvSpPr txBox="1"/>
-          <p:nvPr/>
-        </p:nvSpPr>
-        <p:spPr>
-          <a:xfrm>
-            <a:off x="476402" y="3438784"/>
+              <a:t>Сильно снижено · 9 %</a:t>
+            </a:r>
+          </a:p>
+        </p:txBody>
+      </p:sp>
+      <p:sp>
+        <p:nvSpPr>
+          <p:cNvPr id="43" name="TextBox 42"/>
+          <p:cNvSpPr txBox="1"/>
+          <p:nvPr/>
+        </p:nvSpPr>
+        <p:spPr>
+          <a:xfrm>
+            <a:off x="476402" y="3917929"/>
             <a:ext cx="3291840" cy="182880"/>
           </a:xfrm>
           <a:prstGeom prst="rect">
@@ -10243,20 +10537,20 @@
                 </a:solidFill>
                 <a:latin typeface="Arial"/>
               </a:rPr>
-              <a:t>Расширение читает файлы разработчика</a:t>
-            </a:r>
-          </a:p>
-        </p:txBody>
-      </p:sp>
-      <p:sp>
-        <p:nvSpPr>
-          <p:cNvPr id="36" name="Rectangle 35"/>
+              <a:t>Код репозитория исполняется при загрузке</a:t>
+            </a:r>
+          </a:p>
+        </p:txBody>
+      </p:sp>
+      <p:sp>
+        <p:nvSpPr>
+          <p:cNvPr id="44" name="Rectangle 43"/>
           <p:cNvSpPr/>
           <p:nvPr/>
         </p:nvSpPr>
         <p:spPr>
           <a:xfrm>
-            <a:off x="3877970" y="3457072"/>
+            <a:off x="3877970" y="3936217"/>
             <a:ext cx="1691640" cy="114300"/>
           </a:xfrm>
           <a:prstGeom prst="rect">
@@ -10280,14 +10574,14 @@
       </p:sp>
       <p:sp>
         <p:nvSpPr>
-          <p:cNvPr id="37" name="Rectangle 36"/>
+          <p:cNvPr id="45" name="Rectangle 44"/>
           <p:cNvSpPr/>
           <p:nvPr/>
         </p:nvSpPr>
         <p:spPr>
           <a:xfrm>
-            <a:off x="3877970" y="3457072"/>
-            <a:ext cx="153785" cy="114300"/>
+            <a:off x="3877970" y="3936217"/>
+            <a:ext cx="187960" cy="114300"/>
           </a:xfrm>
           <a:prstGeom prst="rect">
             <a:avLst/>
@@ -10310,13 +10604,13 @@
       </p:sp>
       <p:sp>
         <p:nvSpPr>
-          <p:cNvPr id="38" name="TextBox 37"/>
-          <p:cNvSpPr txBox="1"/>
-          <p:nvPr/>
-        </p:nvSpPr>
-        <p:spPr>
-          <a:xfrm>
-            <a:off x="5697626" y="3429640"/>
+          <p:cNvPr id="46" name="TextBox 45"/>
+          <p:cNvSpPr txBox="1"/>
+          <p:nvPr/>
+        </p:nvSpPr>
+        <p:spPr>
+          <a:xfrm>
+            <a:off x="5697626" y="3908785"/>
             <a:ext cx="896112" cy="182880"/>
           </a:xfrm>
           <a:prstGeom prst="rect">
@@ -10342,20 +10636,20 @@
                 </a:solidFill>
                 <a:latin typeface="Arial"/>
               </a:rPr>
-              <a:t>3/33</a:t>
-            </a:r>
-          </a:p>
-        </p:txBody>
-      </p:sp>
-      <p:sp>
-        <p:nvSpPr>
-          <p:cNvPr id="39" name="TextBox 38"/>
-          <p:cNvSpPr txBox="1"/>
-          <p:nvPr/>
-        </p:nvSpPr>
-        <p:spPr>
-          <a:xfrm>
-            <a:off x="6666890" y="3429640"/>
+              <a:t>3/27</a:t>
+            </a:r>
+          </a:p>
+        </p:txBody>
+      </p:sp>
+      <p:sp>
+        <p:nvSpPr>
+          <p:cNvPr id="47" name="TextBox 46"/>
+          <p:cNvSpPr txBox="1"/>
+          <p:nvPr/>
+        </p:nvSpPr>
+        <p:spPr>
+          <a:xfrm>
+            <a:off x="6666890" y="3908785"/>
             <a:ext cx="1572768" cy="182880"/>
           </a:xfrm>
           <a:prstGeom prst="rect">
@@ -10381,20 +10675,20 @@
                 </a:solidFill>
                 <a:latin typeface="Arial"/>
               </a:rPr>
-              <a:t>Сильно снижено · 9 %</a:t>
-            </a:r>
-          </a:p>
-        </p:txBody>
-      </p:sp>
-      <p:sp>
-        <p:nvSpPr>
-          <p:cNvPr id="40" name="TextBox 39"/>
-          <p:cNvSpPr txBox="1"/>
-          <p:nvPr/>
-        </p:nvSpPr>
-        <p:spPr>
-          <a:xfrm>
-            <a:off x="476402" y="3678356"/>
+              <a:t>Сильно снижено · 11 %</a:t>
+            </a:r>
+          </a:p>
+        </p:txBody>
+      </p:sp>
+      <p:sp>
+        <p:nvSpPr>
+          <p:cNvPr id="48" name="TextBox 47"/>
+          <p:cNvSpPr txBox="1"/>
+          <p:nvPr/>
+        </p:nvSpPr>
+        <p:spPr>
+          <a:xfrm>
+            <a:off x="476402" y="4157502"/>
             <a:ext cx="3291840" cy="182880"/>
           </a:xfrm>
           <a:prstGeom prst="rect">
@@ -10420,20 +10714,20 @@
                 </a:solidFill>
                 <a:latin typeface="Arial"/>
               </a:rPr>
-              <a:t>Код репозитория исполняется при загрузке</a:t>
-            </a:r>
-          </a:p>
-        </p:txBody>
-      </p:sp>
-      <p:sp>
-        <p:nvSpPr>
-          <p:cNvPr id="41" name="Rectangle 40"/>
+              <a:t>Разрушительная команда, в том числе скрытая</a:t>
+            </a:r>
+          </a:p>
+        </p:txBody>
+      </p:sp>
+      <p:sp>
+        <p:nvSpPr>
+          <p:cNvPr id="49" name="Rectangle 48"/>
           <p:cNvSpPr/>
           <p:nvPr/>
         </p:nvSpPr>
         <p:spPr>
           <a:xfrm>
-            <a:off x="3877970" y="3696644"/>
+            <a:off x="3877970" y="4175790"/>
             <a:ext cx="1691640" cy="114300"/>
           </a:xfrm>
           <a:prstGeom prst="rect">
@@ -10457,14 +10751,14 @@
       </p:sp>
       <p:sp>
         <p:nvSpPr>
-          <p:cNvPr id="42" name="Rectangle 41"/>
+          <p:cNvPr id="50" name="Rectangle 49"/>
           <p:cNvSpPr/>
           <p:nvPr/>
         </p:nvSpPr>
         <p:spPr>
           <a:xfrm>
-            <a:off x="3877970" y="3696644"/>
-            <a:ext cx="187960" cy="114300"/>
+            <a:off x="3877970" y="4175790"/>
+            <a:ext cx="338328" cy="114300"/>
           </a:xfrm>
           <a:prstGeom prst="rect">
             <a:avLst/>
@@ -10487,361 +10781,7 @@
       </p:sp>
       <p:sp>
         <p:nvSpPr>
-          <p:cNvPr id="43" name="TextBox 42"/>
-          <p:cNvSpPr txBox="1"/>
-          <p:nvPr/>
-        </p:nvSpPr>
-        <p:spPr>
-          <a:xfrm>
-            <a:off x="5697626" y="3669212"/>
-            <a:ext cx="896112" cy="182880"/>
-          </a:xfrm>
-          <a:prstGeom prst="rect">
-            <a:avLst/>
-          </a:prstGeom>
-          <a:noFill/>
-        </p:spPr>
-        <p:txBody>
-          <a:bodyPr wrap="square" lIns="0" rIns="0" tIns="0" bIns="0" anchor="t">
-            <a:spAutoFit/>
-          </a:bodyPr>
-          <a:lstStyle/>
-          <a:p>
-            <a:pPr>
-              <a:spcAft>
-                <a:spcPts val="0"/>
-              </a:spcAft>
-            </a:pPr>
-            <a:r>
-              <a:rPr sz="1000" b="1">
-                <a:solidFill>
-                  <a:srgbClr val="0000FF"/>
-                </a:solidFill>
-                <a:latin typeface="Arial"/>
-              </a:rPr>
-              <a:t>3/27</a:t>
-            </a:r>
-          </a:p>
-        </p:txBody>
-      </p:sp>
-      <p:sp>
-        <p:nvSpPr>
-          <p:cNvPr id="44" name="TextBox 43"/>
-          <p:cNvSpPr txBox="1"/>
-          <p:nvPr/>
-        </p:nvSpPr>
-        <p:spPr>
-          <a:xfrm>
-            <a:off x="6666890" y="3669212"/>
-            <a:ext cx="1572768" cy="182880"/>
-          </a:xfrm>
-          <a:prstGeom prst="rect">
-            <a:avLst/>
-          </a:prstGeom>
-          <a:noFill/>
-        </p:spPr>
-        <p:txBody>
-          <a:bodyPr wrap="square" lIns="0" rIns="0" tIns="0" bIns="0" anchor="t">
-            <a:spAutoFit/>
-          </a:bodyPr>
-          <a:lstStyle/>
-          <a:p>
-            <a:pPr>
-              <a:spcAft>
-                <a:spcPts val="0"/>
-              </a:spcAft>
-            </a:pPr>
-            <a:r>
-              <a:rPr sz="1000" b="0">
-                <a:solidFill>
-                  <a:srgbClr val="595959"/>
-                </a:solidFill>
-                <a:latin typeface="Arial"/>
-              </a:rPr>
-              <a:t>Сильно снижено · 11 %</a:t>
-            </a:r>
-          </a:p>
-        </p:txBody>
-      </p:sp>
-      <p:sp>
-        <p:nvSpPr>
-          <p:cNvPr id="45" name="TextBox 44"/>
-          <p:cNvSpPr txBox="1"/>
-          <p:nvPr/>
-        </p:nvSpPr>
-        <p:spPr>
-          <a:xfrm>
-            <a:off x="476402" y="3917929"/>
-            <a:ext cx="3291840" cy="182880"/>
-          </a:xfrm>
-          <a:prstGeom prst="rect">
-            <a:avLst/>
-          </a:prstGeom>
-          <a:noFill/>
-        </p:spPr>
-        <p:txBody>
-          <a:bodyPr wrap="square" lIns="0" rIns="0" tIns="0" bIns="0" anchor="t">
-            <a:spAutoFit/>
-          </a:bodyPr>
-          <a:lstStyle/>
-          <a:p>
-            <a:pPr>
-              <a:spcAft>
-                <a:spcPts val="0"/>
-              </a:spcAft>
-            </a:pPr>
-            <a:r>
-              <a:rPr sz="1000" b="0">
-                <a:solidFill>
-                  <a:srgbClr val="000000"/>
-                </a:solidFill>
-                <a:latin typeface="Arial"/>
-              </a:rPr>
-              <a:t>Секрет в обычном файле проекта</a:t>
-            </a:r>
-          </a:p>
-        </p:txBody>
-      </p:sp>
-      <p:sp>
-        <p:nvSpPr>
-          <p:cNvPr id="46" name="Rectangle 45"/>
-          <p:cNvSpPr/>
-          <p:nvPr/>
-        </p:nvSpPr>
-        <p:spPr>
-          <a:xfrm>
-            <a:off x="3877970" y="3936217"/>
-            <a:ext cx="1691640" cy="114300"/>
-          </a:xfrm>
-          <a:prstGeom prst="rect">
-            <a:avLst/>
-          </a:prstGeom>
-          <a:solidFill>
-            <a:srgbClr val="DDDDE3"/>
-          </a:solidFill>
-          <a:ln>
-            <a:noFill/>
-          </a:ln>
-          <a:effectLst/>
-        </p:spPr>
-        <p:txBody>
-          <a:bodyPr rtlCol="0" anchor="ctr" wrap="square" lIns="54864" rIns="54864" tIns="36576" bIns="36576"/>
-          <a:lstStyle/>
-          <a:p>
-            <a:pPr algn="l"/>
-          </a:p>
-        </p:txBody>
-      </p:sp>
-      <p:sp>
-        <p:nvSpPr>
-          <p:cNvPr id="47" name="Rectangle 46"/>
-          <p:cNvSpPr/>
-          <p:nvPr/>
-        </p:nvSpPr>
-        <p:spPr>
-          <a:xfrm>
-            <a:off x="3877970" y="3936217"/>
-            <a:ext cx="307570" cy="114300"/>
-          </a:xfrm>
-          <a:prstGeom prst="rect">
-            <a:avLst/>
-          </a:prstGeom>
-          <a:solidFill>
-            <a:srgbClr val="0000FF"/>
-          </a:solidFill>
-          <a:ln>
-            <a:noFill/>
-          </a:ln>
-          <a:effectLst/>
-        </p:spPr>
-        <p:txBody>
-          <a:bodyPr rtlCol="0" anchor="ctr" wrap="square" lIns="54864" rIns="54864" tIns="36576" bIns="36576"/>
-          <a:lstStyle/>
-          <a:p>
-            <a:pPr algn="l"/>
-          </a:p>
-        </p:txBody>
-      </p:sp>
-      <p:sp>
-        <p:nvSpPr>
-          <p:cNvPr id="48" name="TextBox 47"/>
-          <p:cNvSpPr txBox="1"/>
-          <p:nvPr/>
-        </p:nvSpPr>
-        <p:spPr>
-          <a:xfrm>
-            <a:off x="5697626" y="3908785"/>
-            <a:ext cx="896112" cy="182880"/>
-          </a:xfrm>
-          <a:prstGeom prst="rect">
-            <a:avLst/>
-          </a:prstGeom>
-          <a:noFill/>
-        </p:spPr>
-        <p:txBody>
-          <a:bodyPr wrap="square" lIns="0" rIns="0" tIns="0" bIns="0" anchor="t">
-            <a:spAutoFit/>
-          </a:bodyPr>
-          <a:lstStyle/>
-          <a:p>
-            <a:pPr>
-              <a:spcAft>
-                <a:spcPts val="0"/>
-              </a:spcAft>
-            </a:pPr>
-            <a:r>
-              <a:rPr sz="1000" b="1">
-                <a:solidFill>
-                  <a:srgbClr val="0000FF"/>
-                </a:solidFill>
-                <a:latin typeface="Arial"/>
-              </a:rPr>
-              <a:t>6/33</a:t>
-            </a:r>
-          </a:p>
-        </p:txBody>
-      </p:sp>
-      <p:sp>
-        <p:nvSpPr>
-          <p:cNvPr id="49" name="TextBox 48"/>
-          <p:cNvSpPr txBox="1"/>
-          <p:nvPr/>
-        </p:nvSpPr>
-        <p:spPr>
-          <a:xfrm>
-            <a:off x="6666890" y="3908785"/>
-            <a:ext cx="1572768" cy="182880"/>
-          </a:xfrm>
-          <a:prstGeom prst="rect">
-            <a:avLst/>
-          </a:prstGeom>
-          <a:noFill/>
-        </p:spPr>
-        <p:txBody>
-          <a:bodyPr wrap="square" lIns="0" rIns="0" tIns="0" bIns="0" anchor="t">
-            <a:spAutoFit/>
-          </a:bodyPr>
-          <a:lstStyle/>
-          <a:p>
-            <a:pPr>
-              <a:spcAft>
-                <a:spcPts val="0"/>
-              </a:spcAft>
-            </a:pPr>
-            <a:r>
-              <a:rPr sz="1000" b="0">
-                <a:solidFill>
-                  <a:srgbClr val="595959"/>
-                </a:solidFill>
-                <a:latin typeface="Arial"/>
-              </a:rPr>
-              <a:t>Частично · 18 %</a:t>
-            </a:r>
-          </a:p>
-        </p:txBody>
-      </p:sp>
-      <p:sp>
-        <p:nvSpPr>
-          <p:cNvPr id="50" name="TextBox 49"/>
-          <p:cNvSpPr txBox="1"/>
-          <p:nvPr/>
-        </p:nvSpPr>
-        <p:spPr>
-          <a:xfrm>
-            <a:off x="476402" y="4157502"/>
-            <a:ext cx="3291840" cy="182880"/>
-          </a:xfrm>
-          <a:prstGeom prst="rect">
-            <a:avLst/>
-          </a:prstGeom>
-          <a:noFill/>
-        </p:spPr>
-        <p:txBody>
-          <a:bodyPr wrap="square" lIns="0" rIns="0" tIns="0" bIns="0" anchor="t">
-            <a:spAutoFit/>
-          </a:bodyPr>
-          <a:lstStyle/>
-          <a:p>
-            <a:pPr>
-              <a:spcAft>
-                <a:spcPts val="0"/>
-              </a:spcAft>
-            </a:pPr>
-            <a:r>
-              <a:rPr sz="1000" b="0">
-                <a:solidFill>
-                  <a:srgbClr val="000000"/>
-                </a:solidFill>
-                <a:latin typeface="Arial"/>
-              </a:rPr>
-              <a:t>Разрушительная команда, в том числе скрытая</a:t>
-            </a:r>
-          </a:p>
-        </p:txBody>
-      </p:sp>
-      <p:sp>
-        <p:nvSpPr>
-          <p:cNvPr id="51" name="Rectangle 50"/>
-          <p:cNvSpPr/>
-          <p:nvPr/>
-        </p:nvSpPr>
-        <p:spPr>
-          <a:xfrm>
-            <a:off x="3877970" y="4175790"/>
-            <a:ext cx="1691640" cy="114300"/>
-          </a:xfrm>
-          <a:prstGeom prst="rect">
-            <a:avLst/>
-          </a:prstGeom>
-          <a:solidFill>
-            <a:srgbClr val="DDDDE3"/>
-          </a:solidFill>
-          <a:ln>
-            <a:noFill/>
-          </a:ln>
-          <a:effectLst/>
-        </p:spPr>
-        <p:txBody>
-          <a:bodyPr rtlCol="0" anchor="ctr" wrap="square" lIns="54864" rIns="54864" tIns="36576" bIns="36576"/>
-          <a:lstStyle/>
-          <a:p>
-            <a:pPr algn="l"/>
-          </a:p>
-        </p:txBody>
-      </p:sp>
-      <p:sp>
-        <p:nvSpPr>
-          <p:cNvPr id="52" name="Rectangle 51"/>
-          <p:cNvSpPr/>
-          <p:nvPr/>
-        </p:nvSpPr>
-        <p:spPr>
-          <a:xfrm>
-            <a:off x="3877970" y="4175790"/>
-            <a:ext cx="338328" cy="114300"/>
-          </a:xfrm>
-          <a:prstGeom prst="rect">
-            <a:avLst/>
-          </a:prstGeom>
-          <a:solidFill>
-            <a:srgbClr val="0000FF"/>
-          </a:solidFill>
-          <a:ln>
-            <a:noFill/>
-          </a:ln>
-          <a:effectLst/>
-        </p:spPr>
-        <p:txBody>
-          <a:bodyPr rtlCol="0" anchor="ctr" wrap="square" lIns="54864" rIns="54864" tIns="36576" bIns="36576"/>
-          <a:lstStyle/>
-          <a:p>
-            <a:pPr algn="l"/>
-          </a:p>
-        </p:txBody>
-      </p:sp>
-      <p:sp>
-        <p:nvSpPr>
-          <p:cNvPr id="53" name="TextBox 52"/>
+          <p:cNvPr id="51" name="TextBox 50"/>
           <p:cNvSpPr txBox="1"/>
           <p:nvPr/>
         </p:nvSpPr>
@@ -10880,7 +10820,7 @@
       </p:sp>
       <p:sp>
         <p:nvSpPr>
-          <p:cNvPr id="54" name="TextBox 53"/>
+          <p:cNvPr id="52" name="TextBox 51"/>
           <p:cNvSpPr txBox="1"/>
           <p:nvPr/>
         </p:nvSpPr>
@@ -10919,7 +10859,7 @@
       </p:sp>
       <p:sp>
         <p:nvSpPr>
-          <p:cNvPr id="55" name="TextBox 54"/>
+          <p:cNvPr id="53" name="TextBox 52"/>
           <p:cNvSpPr txBox="1"/>
           <p:nvPr/>
         </p:nvSpPr>
@@ -10954,7 +10894,7 @@
                 </a:solidFill>
                 <a:latin typeface="Arial"/>
               </a:rPr>
-              <a:t>Всего 27 прогонов из 417. Строки про подброшенную инструкцию и про действие не по задаче без слоя смысла читались бы как 92 % и 100 %: эти два класса правила не закрывают.</a:t>
+              <a:t>Всего 18 прогонов из 417. Три строки, где работает слой смысла, без него читались бы как 100 %, 92 % и 18 %: эти классы правила не закрывают.</a:t>
             </a:r>
           </a:p>
         </p:txBody>
@@ -11166,11 +11106,10 @@
                 </a:solidFill>
                 <a:latin typeface="Arial"/>
               </a:rPr>
-              <a:t>Голый токен без признаков рядом и значение в base64 не распознаются как секрет.
-Внутри сужённого процесса расширение видит, что файл существует и какого он размера.
-Плагин, выбранный самим пользователем, остаётся в основном процессе.
-Границы системы проверены на macOS; профиль Linux написан, но не проверен.
-Проверка пакетов охватывает семейство npm.</a:t>
+              <a:t>Путь внутри строки python -c, node -e или perl -e не становится операндом при разборе.
+git stash -u очищает дерево и разрешён; правила на следующий drop не хватает.
+Внутри сужённого процесса расширение видит размер файла и то, что он есть.
+Границы системы проверены на macOS; профиль Linux написан, но не проверен.</a:t>
             </a:r>
           </a:p>
         </p:txBody>
@@ -11253,7 +11192,7 @@
               </a:rPr>
               <a:t>Набор атак наш собственный: «100 % без защиты» — это про него, а не про Kilo вообще.
 Ход работы агента задан сценарием, поэтому измеряется удержание, а не то, догадается ли модель напасть.
-Отдельного приложения не нужно: режим живёт внутри обычной работы с Kilo, а причина решения теперь видна прямо в окне подтверждения и в выводе автономного прогона.</a:t>
+Качество смыслового слоя — свойство одной модели: всё снято на claude-haiku-4.5 через OpenRouter, другая даст другие числа.</a:t>
             </a:r>
           </a:p>
         </p:txBody>
@@ -11336,7 +11275,7 @@
               </a:rPr>
               <a:t>Команда 5–10 разработчиков, репозиторий с внешними зависимостями и MCP.
 Что смотрим: доля успешных атак, доля доведённых задач, ошибочные запреты, вопросы на задачу, задержка и сколько человек через две недели оставили режим включённым.
-Продуктовый шаг: прогнать held-out набор на настоящей малой модели — реализация готова, модели в этом окружении не было.</a:t>
+Продуктовый шаг: построить новый отложенный набор — нынешний израсходован, потому что одна правка сделана уже после первого взгляда на его результаты.</a:t>
             </a:r>
           </a:p>
         </p:txBody>
@@ -17464,7 +17403,7 @@
                 </a:solidFill>
                 <a:latin typeface="Inter"/>
               </a:rPr>
-              <a:t>92 % → 4 %</a:t>
+              <a:t>92 % → 0 %</a:t>
             </a:r>
           </a:p>
         </p:txBody>
@@ -17626,7 +17565,7 @@
                 </a:solidFill>
                 <a:latin typeface="Inter"/>
               </a:rPr>
-              <a:t>98 %</a:t>
+              <a:t>95 %</a:t>
             </a:r>
           </a:p>
         </p:txBody>

--- a/submission/Security-Auto-ATH.pptx
+++ b/submission/Security-Auto-ATH.pptx
@@ -8319,7 +8319,7 @@
                 </a:solidFill>
                 <a:latin typeface="Arial"/>
               </a:rPr>
-              <a:t>все десять слоёв · 4 %</a:t>
+              <a:t>все десять слоёв · 5 %</a:t>
             </a:r>
           </a:p>
         </p:txBody>
@@ -8531,7 +8531,7 @@
                 </a:solidFill>
                 <a:latin typeface="Inter"/>
               </a:rPr>
-              <a:t>100 %  →  4 %</a:t>
+              <a:t>100 %  →  5 %</a:t>
             </a:r>
           </a:p>
         </p:txBody>
@@ -8574,7 +8574,7 @@
                 <a:latin typeface="Inter"/>
               </a:rPr>
               <a:t>Успешность атак (ASR) — доля прогонов, которые довели дело до настоящего вреда.
-18 прогонов из 417 · 5760 прогонов всего, ни одного сорванного</a:t>
+19 прогонов из 417 · 5760 прогонов всего, ни одного сорванного</a:t>
             </a:r>
           </a:p>
         </p:txBody>
@@ -8648,7 +8648,7 @@
                 </a:solidFill>
                 <a:latin typeface="Inter"/>
               </a:rPr>
-              <a:t>95 %</a:t>
+              <a:t>98 %</a:t>
             </a:r>
           </a:p>
         </p:txBody>
@@ -8690,7 +8690,7 @@
                 </a:solidFill>
                 <a:latin typeface="Arial"/>
               </a:rPr>
-              <a:t>обычных задач по-прежнему выполняются · 146 из 153</a:t>
+              <a:t>обычных задач по-прежнему выполняются · 150 из 153</a:t>
             </a:r>
           </a:p>
         </p:txBody>
@@ -8810,7 +8810,7 @@
                 </a:solidFill>
                 <a:latin typeface="Inter"/>
               </a:rPr>
-              <a:t>0,29</a:t>
+              <a:t>0,28</a:t>
             </a:r>
           </a:p>
         </p:txBody>
@@ -8891,7 +8891,7 @@
                 </a:solidFill>
                 <a:latin typeface="Inter"/>
               </a:rPr>
-              <a:t>1,36 мс</a:t>
+              <a:t>2,08 мс</a:t>
             </a:r>
           </a:p>
         </p:txBody>
@@ -8975,7 +8975,7 @@
                 </a:solidFill>
                 <a:latin typeface="Arial"/>
               </a:rPr>
-              <a:t>«Запретить всё» дало бы ноль атак и ноль сделанных задач — поэтому величин пять. Без слоя смысла те же сценарии дают 24 %: он снимает двадцать пунктов и стоит четырёх прогонов из 153.</a:t>
+              <a:t>«Запретить всё» дало бы ноль атак и ноль сделанных задач — поэтому величин пять. Без слоя смысла те же сценарии дают 24 %: он снимает двадцать пунктов и не стоит ни одной задачи.</a:t>
             </a:r>
           </a:p>
         </p:txBody>
@@ -9956,7 +9956,37 @@
       </p:sp>
       <p:sp>
         <p:nvSpPr>
-          <p:cNvPr id="28" name="TextBox 27"/>
+          <p:cNvPr id="28" name="Rectangle 27"/>
+          <p:cNvSpPr/>
+          <p:nvPr/>
+        </p:nvSpPr>
+        <p:spPr>
+          <a:xfrm>
+            <a:off x="3877970" y="2977926"/>
+            <a:ext cx="187960" cy="114300"/>
+          </a:xfrm>
+          <a:prstGeom prst="rect">
+            <a:avLst/>
+          </a:prstGeom>
+          <a:solidFill>
+            <a:srgbClr val="0000FF"/>
+          </a:solidFill>
+          <a:ln>
+            <a:noFill/>
+          </a:ln>
+          <a:effectLst/>
+        </p:spPr>
+        <p:txBody>
+          <a:bodyPr rtlCol="0" anchor="ctr" wrap="square" lIns="54864" rIns="54864" tIns="36576" bIns="36576"/>
+          <a:lstStyle/>
+          <a:p>
+            <a:pPr algn="l"/>
+          </a:p>
+        </p:txBody>
+      </p:sp>
+      <p:sp>
+        <p:nvSpPr>
+          <p:cNvPr id="29" name="TextBox 28"/>
           <p:cNvSpPr txBox="1"/>
           <p:nvPr/>
         </p:nvSpPr>
@@ -9984,18 +10014,18 @@
             <a:r>
               <a:rPr sz="1000" b="1">
                 <a:solidFill>
-                  <a:srgbClr val="000000"/>
+                  <a:srgbClr val="0000FF"/>
                 </a:solidFill>
                 <a:latin typeface="Arial"/>
               </a:rPr>
-              <a:t>0/9</a:t>
-            </a:r>
-          </a:p>
-        </p:txBody>
-      </p:sp>
-      <p:sp>
-        <p:nvSpPr>
-          <p:cNvPr id="29" name="TextBox 28"/>
+              <a:t>1/9</a:t>
+            </a:r>
+          </a:p>
+        </p:txBody>
+      </p:sp>
+      <p:sp>
+        <p:nvSpPr>
+          <p:cNvPr id="30" name="TextBox 29"/>
           <p:cNvSpPr txBox="1"/>
           <p:nvPr/>
         </p:nvSpPr>
@@ -10027,14 +10057,14 @@
                 </a:solidFill>
                 <a:latin typeface="Arial"/>
               </a:rPr>
-              <a:t>Закрыто · слоем смысла</a:t>
-            </a:r>
-          </a:p>
-        </p:txBody>
-      </p:sp>
-      <p:sp>
-        <p:nvSpPr>
-          <p:cNvPr id="30" name="TextBox 29"/>
+              <a:t>Слоем смысла · 11 %</a:t>
+            </a:r>
+          </a:p>
+        </p:txBody>
+      </p:sp>
+      <p:sp>
+        <p:nvSpPr>
+          <p:cNvPr id="31" name="TextBox 30"/>
           <p:cNvSpPr txBox="1"/>
           <p:nvPr/>
         </p:nvSpPr>
@@ -10073,7 +10103,7 @@
       </p:sp>
       <p:sp>
         <p:nvSpPr>
-          <p:cNvPr id="31" name="Rectangle 30"/>
+          <p:cNvPr id="32" name="Rectangle 31"/>
           <p:cNvSpPr/>
           <p:nvPr/>
         </p:nvSpPr>
@@ -10103,7 +10133,7 @@
       </p:sp>
       <p:sp>
         <p:nvSpPr>
-          <p:cNvPr id="32" name="TextBox 31"/>
+          <p:cNvPr id="33" name="TextBox 32"/>
           <p:cNvSpPr txBox="1"/>
           <p:nvPr/>
         </p:nvSpPr>
@@ -10142,7 +10172,7 @@
       </p:sp>
       <p:sp>
         <p:nvSpPr>
-          <p:cNvPr id="33" name="TextBox 32"/>
+          <p:cNvPr id="34" name="TextBox 33"/>
           <p:cNvSpPr txBox="1"/>
           <p:nvPr/>
         </p:nvSpPr>
@@ -10181,7 +10211,7 @@
       </p:sp>
       <p:sp>
         <p:nvSpPr>
-          <p:cNvPr id="34" name="TextBox 33"/>
+          <p:cNvPr id="35" name="TextBox 34"/>
           <p:cNvSpPr txBox="1"/>
           <p:nvPr/>
         </p:nvSpPr>
@@ -10220,7 +10250,7 @@
       </p:sp>
       <p:sp>
         <p:nvSpPr>
-          <p:cNvPr id="35" name="Rectangle 34"/>
+          <p:cNvPr id="36" name="Rectangle 35"/>
           <p:cNvSpPr/>
           <p:nvPr/>
         </p:nvSpPr>
@@ -10250,7 +10280,7 @@
       </p:sp>
       <p:sp>
         <p:nvSpPr>
-          <p:cNvPr id="36" name="TextBox 35"/>
+          <p:cNvPr id="37" name="TextBox 36"/>
           <p:cNvSpPr txBox="1"/>
           <p:nvPr/>
         </p:nvSpPr>
@@ -10289,7 +10319,7 @@
       </p:sp>
       <p:sp>
         <p:nvSpPr>
-          <p:cNvPr id="37" name="TextBox 36"/>
+          <p:cNvPr id="38" name="TextBox 37"/>
           <p:cNvSpPr txBox="1"/>
           <p:nvPr/>
         </p:nvSpPr>
@@ -10328,7 +10358,7 @@
       </p:sp>
       <p:sp>
         <p:nvSpPr>
-          <p:cNvPr id="38" name="TextBox 37"/>
+          <p:cNvPr id="39" name="TextBox 38"/>
           <p:cNvSpPr txBox="1"/>
           <p:nvPr/>
         </p:nvSpPr>
@@ -10367,7 +10397,7 @@
       </p:sp>
       <p:sp>
         <p:nvSpPr>
-          <p:cNvPr id="39" name="Rectangle 38"/>
+          <p:cNvPr id="40" name="Rectangle 39"/>
           <p:cNvSpPr/>
           <p:nvPr/>
         </p:nvSpPr>
@@ -10397,7 +10427,7 @@
       </p:sp>
       <p:sp>
         <p:nvSpPr>
-          <p:cNvPr id="40" name="Rectangle 39"/>
+          <p:cNvPr id="41" name="Rectangle 40"/>
           <p:cNvSpPr/>
           <p:nvPr/>
         </p:nvSpPr>
@@ -10427,7 +10457,7 @@
       </p:sp>
       <p:sp>
         <p:nvSpPr>
-          <p:cNvPr id="41" name="TextBox 40"/>
+          <p:cNvPr id="42" name="TextBox 41"/>
           <p:cNvSpPr txBox="1"/>
           <p:nvPr/>
         </p:nvSpPr>
@@ -10466,7 +10496,7 @@
       </p:sp>
       <p:sp>
         <p:nvSpPr>
-          <p:cNvPr id="42" name="TextBox 41"/>
+          <p:cNvPr id="43" name="TextBox 42"/>
           <p:cNvSpPr txBox="1"/>
           <p:nvPr/>
         </p:nvSpPr>
@@ -10505,7 +10535,7 @@
       </p:sp>
       <p:sp>
         <p:nvSpPr>
-          <p:cNvPr id="43" name="TextBox 42"/>
+          <p:cNvPr id="44" name="TextBox 43"/>
           <p:cNvSpPr txBox="1"/>
           <p:nvPr/>
         </p:nvSpPr>
@@ -10544,7 +10574,7 @@
       </p:sp>
       <p:sp>
         <p:nvSpPr>
-          <p:cNvPr id="44" name="Rectangle 43"/>
+          <p:cNvPr id="45" name="Rectangle 44"/>
           <p:cNvSpPr/>
           <p:nvPr/>
         </p:nvSpPr>
@@ -10574,7 +10604,7 @@
       </p:sp>
       <p:sp>
         <p:nvSpPr>
-          <p:cNvPr id="45" name="Rectangle 44"/>
+          <p:cNvPr id="46" name="Rectangle 45"/>
           <p:cNvSpPr/>
           <p:nvPr/>
         </p:nvSpPr>
@@ -10604,7 +10634,7 @@
       </p:sp>
       <p:sp>
         <p:nvSpPr>
-          <p:cNvPr id="46" name="TextBox 45"/>
+          <p:cNvPr id="47" name="TextBox 46"/>
           <p:cNvSpPr txBox="1"/>
           <p:nvPr/>
         </p:nvSpPr>
@@ -10643,7 +10673,7 @@
       </p:sp>
       <p:sp>
         <p:nvSpPr>
-          <p:cNvPr id="47" name="TextBox 46"/>
+          <p:cNvPr id="48" name="TextBox 47"/>
           <p:cNvSpPr txBox="1"/>
           <p:nvPr/>
         </p:nvSpPr>
@@ -10682,7 +10712,7 @@
       </p:sp>
       <p:sp>
         <p:nvSpPr>
-          <p:cNvPr id="48" name="TextBox 47"/>
+          <p:cNvPr id="49" name="TextBox 48"/>
           <p:cNvSpPr txBox="1"/>
           <p:nvPr/>
         </p:nvSpPr>
@@ -10721,7 +10751,7 @@
       </p:sp>
       <p:sp>
         <p:nvSpPr>
-          <p:cNvPr id="49" name="Rectangle 48"/>
+          <p:cNvPr id="50" name="Rectangle 49"/>
           <p:cNvSpPr/>
           <p:nvPr/>
         </p:nvSpPr>
@@ -10751,7 +10781,7 @@
       </p:sp>
       <p:sp>
         <p:nvSpPr>
-          <p:cNvPr id="50" name="Rectangle 49"/>
+          <p:cNvPr id="51" name="Rectangle 50"/>
           <p:cNvSpPr/>
           <p:nvPr/>
         </p:nvSpPr>
@@ -10781,7 +10811,7 @@
       </p:sp>
       <p:sp>
         <p:nvSpPr>
-          <p:cNvPr id="51" name="TextBox 50"/>
+          <p:cNvPr id="52" name="TextBox 51"/>
           <p:cNvSpPr txBox="1"/>
           <p:nvPr/>
         </p:nvSpPr>
@@ -10820,7 +10850,7 @@
       </p:sp>
       <p:sp>
         <p:nvSpPr>
-          <p:cNvPr id="52" name="TextBox 51"/>
+          <p:cNvPr id="53" name="TextBox 52"/>
           <p:cNvSpPr txBox="1"/>
           <p:nvPr/>
         </p:nvSpPr>
@@ -10859,7 +10889,7 @@
       </p:sp>
       <p:sp>
         <p:nvSpPr>
-          <p:cNvPr id="53" name="TextBox 52"/>
+          <p:cNvPr id="54" name="TextBox 53"/>
           <p:cNvSpPr txBox="1"/>
           <p:nvPr/>
         </p:nvSpPr>
@@ -10894,7 +10924,7 @@
                 </a:solidFill>
                 <a:latin typeface="Arial"/>
               </a:rPr>
-              <a:t>Всего 18 прогонов из 417. Три строки, где работает слой смысла, без него читались бы как 100 %, 92 % и 18 %: эти классы правила не закрывают.</a:t>
+              <a:t>Всего 19 прогонов из 417. Три строки, где работает слой смысла, без него читались бы как 100 %, 92 % и 18 %: эти классы правила не закрывают.</a:t>
             </a:r>
           </a:p>
         </p:txBody>
@@ -11078,7 +11108,7 @@
         <p:spPr>
           <a:xfrm>
             <a:off x="476402" y="1739143"/>
-            <a:ext cx="2492654" cy="2621127"/>
+            <a:ext cx="2492654" cy="2246680"/>
           </a:xfrm>
           <a:prstGeom prst="rect">
             <a:avLst/>
@@ -11162,7 +11192,7 @@
         <p:spPr>
           <a:xfrm>
             <a:off x="3322015" y="1739143"/>
-            <a:ext cx="2492654" cy="2621127"/>
+            <a:ext cx="2492654" cy="2246680"/>
           </a:xfrm>
           <a:prstGeom prst="rect">
             <a:avLst/>
@@ -11245,7 +11275,7 @@
         <p:spPr>
           <a:xfrm>
             <a:off x="6170371" y="1739143"/>
-            <a:ext cx="2492654" cy="2621127"/>
+            <a:ext cx="2492654" cy="2246680"/>
           </a:xfrm>
           <a:prstGeom prst="rect">
             <a:avLst/>
@@ -11275,7 +11305,7 @@
               </a:rPr>
               <a:t>Команда 5–10 разработчиков, репозиторий с внешними зависимостями и MCP.
 Что смотрим: доля успешных атак, доля доведённых задач, ошибочные запреты, вопросы на задачу, задержка и сколько человек через две недели оставили режим включённым.
-Продуктовый шаг: построить новый отложенный набор — нынешний израсходован, потому что одна правка сделана уже после первого взгляда на его результаты.</a:t>
+Отложенный набор израсходован; новый пишет внешний автор, а конфигурация уже запечатана.</a:t>
             </a:r>
           </a:p>
         </p:txBody>
@@ -11288,7 +11318,7 @@
         </p:nvCxnSpPr>
         <p:spPr>
           <a:xfrm>
-            <a:off x="476402" y="4488286"/>
+            <a:off x="476402" y="4113839"/>
             <a:ext cx="8191195" cy="0"/>
           </a:xfrm>
           <a:prstGeom prst="line">
@@ -11323,7 +11353,7 @@
         </p:nvSpPr>
         <p:spPr>
           <a:xfrm>
-            <a:off x="476402" y="4561438"/>
+            <a:off x="476402" y="4186991"/>
             <a:ext cx="8191195" cy="402336"/>
           </a:xfrm>
           <a:prstGeom prst="rect">
@@ -17121,7 +17151,7 @@
                 </a:solidFill>
                 <a:latin typeface="Inter"/>
               </a:rPr>
-              <a:t>Два вопроса, на которые у детерминированного контура нет входа.</a:t>
+              <a:t>Правила держат полномочия. Модель нужна там, где надо понять смысл.</a:t>
             </a:r>
           </a:p>
         </p:txBody>
@@ -17134,7 +17164,7 @@
         </p:nvSpPr>
         <p:spPr>
           <a:xfrm>
-            <a:off x="476402" y="2262134"/>
+            <a:off x="476402" y="2243846"/>
             <a:ext cx="2492654" cy="187223"/>
           </a:xfrm>
           <a:prstGeom prst="rect">
@@ -17173,7 +17203,7 @@
         </p:nvSpPr>
         <p:spPr>
           <a:xfrm>
-            <a:off x="476402" y="2476789"/>
+            <a:off x="476402" y="2458501"/>
             <a:ext cx="2492654" cy="1123340"/>
           </a:xfrm>
           <a:prstGeom prst="rect">
@@ -17215,7 +17245,7 @@
         </p:nvSpPr>
         <p:spPr>
           <a:xfrm>
-            <a:off x="3322015" y="2262134"/>
+            <a:off x="3322015" y="2243846"/>
             <a:ext cx="2492654" cy="187223"/>
           </a:xfrm>
           <a:prstGeom prst="rect">
@@ -17254,7 +17284,7 @@
         </p:nvSpPr>
         <p:spPr>
           <a:xfrm>
-            <a:off x="3322015" y="2476789"/>
+            <a:off x="3322015" y="2458501"/>
             <a:ext cx="2492654" cy="1123340"/>
           </a:xfrm>
           <a:prstGeom prst="rect">
@@ -17296,7 +17326,7 @@
         </p:nvSpPr>
         <p:spPr>
           <a:xfrm>
-            <a:off x="6170371" y="2262134"/>
+            <a:off x="6170371" y="2243846"/>
             <a:ext cx="2492654" cy="187223"/>
           </a:xfrm>
           <a:prstGeom prst="rect">
@@ -17335,7 +17365,7 @@
         </p:nvSpPr>
         <p:spPr>
           <a:xfrm>
-            <a:off x="6170371" y="2476789"/>
+            <a:off x="6170371" y="2458501"/>
             <a:ext cx="2492654" cy="1123340"/>
           </a:xfrm>
           <a:prstGeom prst="rect">
@@ -17377,33 +17407,33 @@
         </p:nvSpPr>
         <p:spPr>
           <a:xfrm>
-            <a:off x="476402" y="3764721"/>
-            <a:ext cx="2364638" cy="384047"/>
-          </a:xfrm>
-          <a:prstGeom prst="rect">
-            <a:avLst/>
-          </a:prstGeom>
-          <a:noFill/>
-        </p:spPr>
-        <p:txBody>
-          <a:bodyPr wrap="square" lIns="0" rIns="0" tIns="0" bIns="0" anchor="t">
-            <a:spAutoFit/>
-          </a:bodyPr>
-          <a:lstStyle/>
-          <a:p>
-            <a:pPr>
-              <a:spcAft>
-                <a:spcPts val="0"/>
-              </a:spcAft>
-            </a:pPr>
-            <a:r>
-              <a:rPr sz="2000" b="1">
+            <a:off x="476402" y="3746433"/>
+            <a:ext cx="1714500" cy="294894"/>
+          </a:xfrm>
+          <a:prstGeom prst="rect">
+            <a:avLst/>
+          </a:prstGeom>
+          <a:noFill/>
+        </p:spPr>
+        <p:txBody>
+          <a:bodyPr wrap="square" lIns="0" rIns="0" tIns="0" bIns="0" anchor="t">
+            <a:spAutoFit/>
+          </a:bodyPr>
+          <a:lstStyle/>
+          <a:p>
+            <a:pPr>
+              <a:spcAft>
+                <a:spcPts val="0"/>
+              </a:spcAft>
+            </a:pPr>
+            <a:r>
+              <a:rPr sz="1500" b="1">
                 <a:solidFill>
                   <a:srgbClr val="0000FF"/>
                 </a:solidFill>
                 <a:latin typeface="Inter"/>
               </a:rPr>
-              <a:t>92 % → 0 %</a:t>
+              <a:t>24 % → 5 %</a:t>
             </a:r>
           </a:p>
         </p:txBody>
@@ -17416,8 +17446,8 @@
         </p:nvSpPr>
         <p:spPr>
           <a:xfrm>
-            <a:off x="476402" y="4240209"/>
-            <a:ext cx="2364638" cy="410108"/>
+            <a:off x="476402" y="4132767"/>
+            <a:ext cx="1714500" cy="410108"/>
           </a:xfrm>
           <a:prstGeom prst="rect">
             <a:avLst/>
@@ -17445,7 +17475,7 @@
                 </a:solidFill>
                 <a:latin typeface="Arial"/>
               </a:rPr>
-              <a:t>подброшенная инструкция доводит дело до вреда</a:t>
+              <a:t>общая успешность атак</a:t>
             </a:r>
           </a:p>
         </p:txBody>
@@ -17458,33 +17488,33 @@
         </p:nvSpPr>
         <p:spPr>
           <a:xfrm>
-            <a:off x="3206800" y="3764721"/>
-            <a:ext cx="2364638" cy="384047"/>
-          </a:xfrm>
-          <a:prstGeom prst="rect">
-            <a:avLst/>
-          </a:prstGeom>
-          <a:noFill/>
-        </p:spPr>
-        <p:txBody>
-          <a:bodyPr wrap="square" lIns="0" rIns="0" tIns="0" bIns="0" anchor="t">
-            <a:spAutoFit/>
-          </a:bodyPr>
-          <a:lstStyle/>
-          <a:p>
-            <a:pPr>
-              <a:spcAft>
-                <a:spcPts val="0"/>
-              </a:spcAft>
-            </a:pPr>
-            <a:r>
-              <a:rPr sz="2000" b="1">
+            <a:off x="2634386" y="3746433"/>
+            <a:ext cx="1714500" cy="294894"/>
+          </a:xfrm>
+          <a:prstGeom prst="rect">
+            <a:avLst/>
+          </a:prstGeom>
+          <a:noFill/>
+        </p:spPr>
+        <p:txBody>
+          <a:bodyPr wrap="square" lIns="0" rIns="0" tIns="0" bIns="0" anchor="t">
+            <a:spAutoFit/>
+          </a:bodyPr>
+          <a:lstStyle/>
+          <a:p>
+            <a:pPr>
+              <a:spcAft>
+                <a:spcPts val="0"/>
+              </a:spcAft>
+            </a:pPr>
+            <a:r>
+              <a:rPr sz="1500" b="1">
                 <a:solidFill>
                   <a:srgbClr val="0000FF"/>
                 </a:solidFill>
                 <a:latin typeface="Inter"/>
               </a:rPr>
-              <a:t>100 % → 0 %</a:t>
+              <a:t>92 % → 0 %</a:t>
             </a:r>
           </a:p>
         </p:txBody>
@@ -17497,8 +17527,8 @@
         </p:nvSpPr>
         <p:spPr>
           <a:xfrm>
-            <a:off x="3206800" y="4240209"/>
-            <a:ext cx="2364638" cy="410108"/>
+            <a:off x="2634386" y="4132767"/>
+            <a:ext cx="1714500" cy="410108"/>
           </a:xfrm>
           <a:prstGeom prst="rect">
             <a:avLst/>
@@ -17526,7 +17556,7 @@
                 </a:solidFill>
                 <a:latin typeface="Arial"/>
               </a:rPr>
-              <a:t>действие не по задаче пользователя</a:t>
+              <a:t>подброшенная инструкция</a:t>
             </a:r>
           </a:p>
         </p:txBody>
@@ -17539,33 +17569,33 @@
         </p:nvSpPr>
         <p:spPr>
           <a:xfrm>
-            <a:off x="5937199" y="3764721"/>
-            <a:ext cx="2364638" cy="384047"/>
-          </a:xfrm>
-          <a:prstGeom prst="rect">
-            <a:avLst/>
-          </a:prstGeom>
-          <a:noFill/>
-        </p:spPr>
-        <p:txBody>
-          <a:bodyPr wrap="square" lIns="0" rIns="0" tIns="0" bIns="0" anchor="t">
-            <a:spAutoFit/>
-          </a:bodyPr>
-          <a:lstStyle/>
-          <a:p>
-            <a:pPr>
-              <a:spcAft>
-                <a:spcPts val="0"/>
-              </a:spcAft>
-            </a:pPr>
-            <a:r>
-              <a:rPr sz="2000" b="1">
+            <a:off x="4793284" y="3746433"/>
+            <a:ext cx="1714500" cy="294894"/>
+          </a:xfrm>
+          <a:prstGeom prst="rect">
+            <a:avLst/>
+          </a:prstGeom>
+          <a:noFill/>
+        </p:spPr>
+        <p:txBody>
+          <a:bodyPr wrap="square" lIns="0" rIns="0" tIns="0" bIns="0" anchor="t">
+            <a:spAutoFit/>
+          </a:bodyPr>
+          <a:lstStyle/>
+          <a:p>
+            <a:pPr>
+              <a:spcAft>
+                <a:spcPts val="0"/>
+              </a:spcAft>
+            </a:pPr>
+            <a:r>
+              <a:rPr sz="1500" b="1">
                 <a:solidFill>
                   <a:srgbClr val="0000FF"/>
                 </a:solidFill>
                 <a:latin typeface="Inter"/>
               </a:rPr>
-              <a:t>95 %</a:t>
+              <a:t>100 % → 11 %</a:t>
             </a:r>
           </a:p>
         </p:txBody>
@@ -17578,8 +17608,8 @@
         </p:nvSpPr>
         <p:spPr>
           <a:xfrm>
-            <a:off x="5937199" y="4240209"/>
-            <a:ext cx="2364638" cy="410108"/>
+            <a:off x="4793284" y="4132767"/>
+            <a:ext cx="1714500" cy="410108"/>
           </a:xfrm>
           <a:prstGeom prst="rect">
             <a:avLst/>
@@ -17607,7 +17637,7 @@
                 </a:solidFill>
                 <a:latin typeface="Arial"/>
               </a:rPr>
-              <a:t>обычных задач по-прежнему выполняются</a:t>
+              <a:t>действие не по задаче</a:t>
             </a:r>
           </a:p>
         </p:txBody>
@@ -17620,7 +17650,88 @@
         </p:nvSpPr>
         <p:spPr>
           <a:xfrm>
-            <a:off x="476402" y="4760046"/>
+            <a:off x="6951268" y="3746433"/>
+            <a:ext cx="1714500" cy="294894"/>
+          </a:xfrm>
+          <a:prstGeom prst="rect">
+            <a:avLst/>
+          </a:prstGeom>
+          <a:noFill/>
+        </p:spPr>
+        <p:txBody>
+          <a:bodyPr wrap="square" lIns="0" rIns="0" tIns="0" bIns="0" anchor="t">
+            <a:spAutoFit/>
+          </a:bodyPr>
+          <a:lstStyle/>
+          <a:p>
+            <a:pPr>
+              <a:spcAft>
+                <a:spcPts val="0"/>
+              </a:spcAft>
+            </a:pPr>
+            <a:r>
+              <a:rPr sz="1500" b="1">
+                <a:solidFill>
+                  <a:srgbClr val="0000FF"/>
+                </a:solidFill>
+                <a:latin typeface="Inter"/>
+              </a:rPr>
+              <a:t>98 %</a:t>
+            </a:r>
+          </a:p>
+        </p:txBody>
+      </p:sp>
+      <p:sp>
+        <p:nvSpPr>
+          <p:cNvPr id="19" name="TextBox 18"/>
+          <p:cNvSpPr txBox="1"/>
+          <p:nvPr/>
+        </p:nvSpPr>
+        <p:spPr>
+          <a:xfrm>
+            <a:off x="6951268" y="4132767"/>
+            <a:ext cx="1714500" cy="205054"/>
+          </a:xfrm>
+          <a:prstGeom prst="rect">
+            <a:avLst/>
+          </a:prstGeom>
+          <a:noFill/>
+        </p:spPr>
+        <p:txBody>
+          <a:bodyPr wrap="square" lIns="0" rIns="0" tIns="0" bIns="0" anchor="t">
+            <a:spAutoFit/>
+          </a:bodyPr>
+          <a:lstStyle/>
+          <a:p>
+            <a:pPr>
+              <a:lnSpc>
+                <a:spcPct val="115000"/>
+              </a:lnSpc>
+              <a:spcAft>
+                <a:spcPts val="0"/>
+              </a:spcAft>
+            </a:pPr>
+            <a:r>
+              <a:rPr sz="1200" b="0">
+                <a:solidFill>
+                  <a:srgbClr val="000000"/>
+                </a:solidFill>
+                <a:latin typeface="Arial"/>
+              </a:rPr>
+              <a:t>задач — как без слоя</a:t>
+            </a:r>
+          </a:p>
+        </p:txBody>
+      </p:sp>
+      <p:sp>
+        <p:nvSpPr>
+          <p:cNvPr id="20" name="TextBox 19"/>
+          <p:cNvSpPr txBox="1"/>
+          <p:nvPr/>
+        </p:nvSpPr>
+        <p:spPr>
+          <a:xfrm>
+            <a:off x="476402" y="4652604"/>
             <a:ext cx="8191195" cy="219456"/>
           </a:xfrm>
           <a:prstGeom prst="rect">
@@ -17646,7 +17757,7 @@
                 </a:solidFill>
                 <a:latin typeface="Arial"/>
               </a:rPr>
-              <a:t>Оба класса правила не закрывают: без слоя смысла это 92 % и 100 %.</a:t>
+              <a:t>Цену не прячем: 16 % решений идут к модели, путь с ней 1,1–1,4 с, ≈ $0,30 на 1000 решений.</a:t>
             </a:r>
           </a:p>
         </p:txBody>

--- a/submission/Security-Auto-ATH.pptx
+++ b/submission/Security-Auto-ATH.pptx
@@ -6159,6 +6159,14 @@
 <file path=ppt/slides/slide1.xml><?xml version="1.0" encoding="utf-8"?>
 <p:sld xmlns:a="http://schemas.openxmlformats.org/drawingml/2006/main" xmlns:p="http://schemas.openxmlformats.org/presentationml/2006/main" xmlns:r="http://schemas.openxmlformats.org/officeDocument/2006/relationships">
   <p:cSld>
+    <p:bg>
+      <p:bgPr>
+        <a:solidFill>
+          <a:srgbClr val="FAFAFC"/>
+        </a:solidFill>
+        <a:effectLst/>
+      </p:bgPr>
+    </p:bg>
     <p:spTree>
       <p:nvGrpSpPr>
         <p:cNvPr id="1" name=""/>
@@ -6386,14 +6394,6 @@
       </p:pic>
     </p:spTree>
   </p:cSld>
-  <p:bg>
-    <p:bgPr>
-      <a:solidFill>
-        <a:srgbClr val="FAFAFC"/>
-      </a:solidFill>
-      <a:effectLst/>
-    </p:bgPr>
-  </p:bg>
   <p:clrMapOvr>
     <a:masterClrMapping/>
   </p:clrMapOvr>
@@ -6403,6 +6403,14 @@
 <file path=ppt/slides/slide10.xml><?xml version="1.0" encoding="utf-8"?>
 <p:sld xmlns:a="http://schemas.openxmlformats.org/drawingml/2006/main" xmlns:p="http://schemas.openxmlformats.org/presentationml/2006/main" xmlns:r="http://schemas.openxmlformats.org/officeDocument/2006/relationships">
   <p:cSld>
+    <p:bg>
+      <p:bgPr>
+        <a:solidFill>
+          <a:srgbClr val="FAFAFC"/>
+        </a:solidFill>
+        <a:effectLst/>
+      </p:bgPr>
+    </p:bg>
     <p:spTree>
       <p:nvGrpSpPr>
         <p:cNvPr id="1" name=""/>
@@ -6861,14 +6869,6 @@
       </p:sp>
     </p:spTree>
   </p:cSld>
-  <p:bg>
-    <p:bgPr>
-      <a:solidFill>
-        <a:srgbClr val="FAFAFC"/>
-      </a:solidFill>
-      <a:effectLst/>
-    </p:bgPr>
-  </p:bg>
   <p:clrMapOvr>
     <a:masterClrMapping/>
   </p:clrMapOvr>
@@ -6878,6 +6878,14 @@
 <file path=ppt/slides/slide11.xml><?xml version="1.0" encoding="utf-8"?>
 <p:sld xmlns:a="http://schemas.openxmlformats.org/drawingml/2006/main" xmlns:p="http://schemas.openxmlformats.org/presentationml/2006/main" xmlns:r="http://schemas.openxmlformats.org/officeDocument/2006/relationships">
   <p:cSld>
+    <p:bg>
+      <p:bgPr>
+        <a:solidFill>
+          <a:srgbClr val="FAFAFC"/>
+        </a:solidFill>
+        <a:effectLst/>
+      </p:bgPr>
+    </p:bg>
     <p:spTree>
       <p:nvGrpSpPr>
         <p:cNvPr id="1" name=""/>
@@ -7764,14 +7772,6 @@
       </p:sp>
     </p:spTree>
   </p:cSld>
-  <p:bg>
-    <p:bgPr>
-      <a:solidFill>
-        <a:srgbClr val="FAFAFC"/>
-      </a:solidFill>
-      <a:effectLst/>
-    </p:bgPr>
-  </p:bg>
   <p:clrMapOvr>
     <a:masterClrMapping/>
   </p:clrMapOvr>
@@ -7781,6 +7781,14 @@
 <file path=ppt/slides/slide12.xml><?xml version="1.0" encoding="utf-8"?>
 <p:sld xmlns:a="http://schemas.openxmlformats.org/drawingml/2006/main" xmlns:p="http://schemas.openxmlformats.org/presentationml/2006/main" xmlns:r="http://schemas.openxmlformats.org/officeDocument/2006/relationships">
   <p:cSld>
+    <p:bg>
+      <p:bgPr>
+        <a:solidFill>
+          <a:srgbClr val="FAFAFC"/>
+        </a:solidFill>
+        <a:effectLst/>
+      </p:bgPr>
+    </p:bg>
     <p:spTree>
       <p:nvGrpSpPr>
         <p:cNvPr id="1" name=""/>
@@ -8774,14 +8782,6 @@
       </p:sp>
     </p:spTree>
   </p:cSld>
-  <p:bg>
-    <p:bgPr>
-      <a:solidFill>
-        <a:srgbClr val="FAFAFC"/>
-      </a:solidFill>
-      <a:effectLst/>
-    </p:bgPr>
-  </p:bg>
   <p:clrMapOvr>
     <a:masterClrMapping/>
   </p:clrMapOvr>
@@ -8791,6 +8791,14 @@
 <file path=ppt/slides/slide13.xml><?xml version="1.0" encoding="utf-8"?>
 <p:sld xmlns:a="http://schemas.openxmlformats.org/drawingml/2006/main" xmlns:p="http://schemas.openxmlformats.org/presentationml/2006/main" xmlns:r="http://schemas.openxmlformats.org/officeDocument/2006/relationships">
   <p:cSld>
+    <p:bg>
+      <p:bgPr>
+        <a:solidFill>
+          <a:srgbClr val="FAFAFC"/>
+        </a:solidFill>
+        <a:effectLst/>
+      </p:bgPr>
+    </p:bg>
     <p:spTree>
       <p:nvGrpSpPr>
         <p:cNvPr id="1" name=""/>
@@ -9546,14 +9554,6 @@
       </p:sp>
     </p:spTree>
   </p:cSld>
-  <p:bg>
-    <p:bgPr>
-      <a:solidFill>
-        <a:srgbClr val="FAFAFC"/>
-      </a:solidFill>
-      <a:effectLst/>
-    </p:bgPr>
-  </p:bg>
   <p:clrMapOvr>
     <a:masterClrMapping/>
   </p:clrMapOvr>
@@ -9563,6 +9563,14 @@
 <file path=ppt/slides/slide14.xml><?xml version="1.0" encoding="utf-8"?>
 <p:sld xmlns:a="http://schemas.openxmlformats.org/drawingml/2006/main" xmlns:p="http://schemas.openxmlformats.org/presentationml/2006/main" xmlns:r="http://schemas.openxmlformats.org/officeDocument/2006/relationships">
   <p:cSld>
+    <p:bg>
+      <p:bgPr>
+        <a:solidFill>
+          <a:srgbClr val="FAFAFC"/>
+        </a:solidFill>
+        <a:effectLst/>
+      </p:bgPr>
+    </p:bg>
     <p:spTree>
       <p:nvGrpSpPr>
         <p:cNvPr id="1" name=""/>
@@ -10347,14 +10355,6 @@
       </p:sp>
     </p:spTree>
   </p:cSld>
-  <p:bg>
-    <p:bgPr>
-      <a:solidFill>
-        <a:srgbClr val="FAFAFC"/>
-      </a:solidFill>
-      <a:effectLst/>
-    </p:bgPr>
-  </p:bg>
   <p:clrMapOvr>
     <a:masterClrMapping/>
   </p:clrMapOvr>
@@ -10364,6 +10364,14 @@
 <file path=ppt/slides/slide15.xml><?xml version="1.0" encoding="utf-8"?>
 <p:sld xmlns:a="http://schemas.openxmlformats.org/drawingml/2006/main" xmlns:p="http://schemas.openxmlformats.org/presentationml/2006/main" xmlns:r="http://schemas.openxmlformats.org/officeDocument/2006/relationships">
   <p:cSld>
+    <p:bg>
+      <p:bgPr>
+        <a:solidFill>
+          <a:srgbClr val="FAFAFC"/>
+        </a:solidFill>
+        <a:effectLst/>
+      </p:bgPr>
+    </p:bg>
     <p:spTree>
       <p:nvGrpSpPr>
         <p:cNvPr id="1" name=""/>
@@ -11123,14 +11131,6 @@
       </p:sp>
     </p:spTree>
   </p:cSld>
-  <p:bg>
-    <p:bgPr>
-      <a:solidFill>
-        <a:srgbClr val="FAFAFC"/>
-      </a:solidFill>
-      <a:effectLst/>
-    </p:bgPr>
-  </p:bg>
   <p:clrMapOvr>
     <a:masterClrMapping/>
   </p:clrMapOvr>
@@ -11140,6 +11140,14 @@
 <file path=ppt/slides/slide16.xml><?xml version="1.0" encoding="utf-8"?>
 <p:sld xmlns:a="http://schemas.openxmlformats.org/drawingml/2006/main" xmlns:p="http://schemas.openxmlformats.org/presentationml/2006/main" xmlns:r="http://schemas.openxmlformats.org/officeDocument/2006/relationships">
   <p:cSld>
+    <p:bg>
+      <p:bgPr>
+        <a:solidFill>
+          <a:srgbClr val="FAFAFC"/>
+        </a:solidFill>
+        <a:effectLst/>
+      </p:bgPr>
+    </p:bg>
     <p:spTree>
       <p:nvGrpSpPr>
         <p:cNvPr id="1" name=""/>
@@ -11356,14 +11364,6 @@
       </p:sp>
     </p:spTree>
   </p:cSld>
-  <p:bg>
-    <p:bgPr>
-      <a:solidFill>
-        <a:srgbClr val="FAFAFC"/>
-      </a:solidFill>
-      <a:effectLst/>
-    </p:bgPr>
-  </p:bg>
   <p:clrMapOvr>
     <a:masterClrMapping/>
   </p:clrMapOvr>
@@ -11373,6 +11373,14 @@
 <file path=ppt/slides/slide17.xml><?xml version="1.0" encoding="utf-8"?>
 <p:sld xmlns:a="http://schemas.openxmlformats.org/drawingml/2006/main" xmlns:p="http://schemas.openxmlformats.org/presentationml/2006/main" xmlns:r="http://schemas.openxmlformats.org/officeDocument/2006/relationships">
   <p:cSld>
+    <p:bg>
+      <p:bgPr>
+        <a:solidFill>
+          <a:srgbClr val="FAFAFC"/>
+        </a:solidFill>
+        <a:effectLst/>
+      </p:bgPr>
+    </p:bg>
     <p:spTree>
       <p:nvGrpSpPr>
         <p:cNvPr id="1" name=""/>
@@ -11691,14 +11699,6 @@
       </p:sp>
     </p:spTree>
   </p:cSld>
-  <p:bg>
-    <p:bgPr>
-      <a:solidFill>
-        <a:srgbClr val="FAFAFC"/>
-      </a:solidFill>
-      <a:effectLst/>
-    </p:bgPr>
-  </p:bg>
   <p:clrMapOvr>
     <a:masterClrMapping/>
   </p:clrMapOvr>
@@ -11708,6 +11708,14 @@
 <file path=ppt/slides/slide18.xml><?xml version="1.0" encoding="utf-8"?>
 <p:sld xmlns:a="http://schemas.openxmlformats.org/drawingml/2006/main" xmlns:p="http://schemas.openxmlformats.org/presentationml/2006/main" xmlns:r="http://schemas.openxmlformats.org/officeDocument/2006/relationships">
   <p:cSld>
+    <p:bg>
+      <p:bgPr>
+        <a:solidFill>
+          <a:srgbClr val="FAFAFC"/>
+        </a:solidFill>
+        <a:effectLst/>
+      </p:bgPr>
+    </p:bg>
     <p:spTree>
       <p:nvGrpSpPr>
         <p:cNvPr id="1" name=""/>
@@ -12026,14 +12034,6 @@
       </p:sp>
     </p:spTree>
   </p:cSld>
-  <p:bg>
-    <p:bgPr>
-      <a:solidFill>
-        <a:srgbClr val="FAFAFC"/>
-      </a:solidFill>
-      <a:effectLst/>
-    </p:bgPr>
-  </p:bg>
   <p:clrMapOvr>
     <a:masterClrMapping/>
   </p:clrMapOvr>
@@ -12043,6 +12043,14 @@
 <file path=ppt/slides/slide19.xml><?xml version="1.0" encoding="utf-8"?>
 <p:sld xmlns:a="http://schemas.openxmlformats.org/drawingml/2006/main" xmlns:p="http://schemas.openxmlformats.org/presentationml/2006/main" xmlns:r="http://schemas.openxmlformats.org/officeDocument/2006/relationships">
   <p:cSld>
+    <p:bg>
+      <p:bgPr>
+        <a:solidFill>
+          <a:srgbClr val="FAFAFC"/>
+        </a:solidFill>
+        <a:effectLst/>
+      </p:bgPr>
+    </p:bg>
     <p:spTree>
       <p:nvGrpSpPr>
         <p:cNvPr id="1" name=""/>
@@ -13210,14 +13218,6 @@
       </p:sp>
     </p:spTree>
   </p:cSld>
-  <p:bg>
-    <p:bgPr>
-      <a:solidFill>
-        <a:srgbClr val="FAFAFC"/>
-      </a:solidFill>
-      <a:effectLst/>
-    </p:bgPr>
-  </p:bg>
   <p:clrMapOvr>
     <a:masterClrMapping/>
   </p:clrMapOvr>
@@ -13227,6 +13227,14 @@
 <file path=ppt/slides/slide2.xml><?xml version="1.0" encoding="utf-8"?>
 <p:sld xmlns:a="http://schemas.openxmlformats.org/drawingml/2006/main" xmlns:p="http://schemas.openxmlformats.org/presentationml/2006/main" xmlns:r="http://schemas.openxmlformats.org/officeDocument/2006/relationships">
   <p:cSld>
+    <p:bg>
+      <p:bgPr>
+        <a:solidFill>
+          <a:srgbClr val="FAFAFC"/>
+        </a:solidFill>
+        <a:effectLst/>
+      </p:bgPr>
+    </p:bg>
     <p:spTree>
       <p:nvGrpSpPr>
         <p:cNvPr id="1" name=""/>
@@ -13546,14 +13554,6 @@
       </p:sp>
     </p:spTree>
   </p:cSld>
-  <p:bg>
-    <p:bgPr>
-      <a:solidFill>
-        <a:srgbClr val="FAFAFC"/>
-      </a:solidFill>
-      <a:effectLst/>
-    </p:bgPr>
-  </p:bg>
   <p:clrMapOvr>
     <a:masterClrMapping/>
   </p:clrMapOvr>
@@ -13563,6 +13563,14 @@
 <file path=ppt/slides/slide20.xml><?xml version="1.0" encoding="utf-8"?>
 <p:sld xmlns:a="http://schemas.openxmlformats.org/drawingml/2006/main" xmlns:p="http://schemas.openxmlformats.org/presentationml/2006/main" xmlns:r="http://schemas.openxmlformats.org/officeDocument/2006/relationships">
   <p:cSld>
+    <p:bg>
+      <p:bgPr>
+        <a:solidFill>
+          <a:srgbClr val="FAFAFC"/>
+        </a:solidFill>
+        <a:effectLst/>
+      </p:bgPr>
+    </p:bg>
     <p:spTree>
       <p:nvGrpSpPr>
         <p:cNvPr id="1" name=""/>
@@ -15495,14 +15503,6 @@
       </p:sp>
     </p:spTree>
   </p:cSld>
-  <p:bg>
-    <p:bgPr>
-      <a:solidFill>
-        <a:srgbClr val="FAFAFC"/>
-      </a:solidFill>
-      <a:effectLst/>
-    </p:bgPr>
-  </p:bg>
   <p:clrMapOvr>
     <a:masterClrMapping/>
   </p:clrMapOvr>
@@ -15512,6 +15512,14 @@
 <file path=ppt/slides/slide21.xml><?xml version="1.0" encoding="utf-8"?>
 <p:sld xmlns:a="http://schemas.openxmlformats.org/drawingml/2006/main" xmlns:p="http://schemas.openxmlformats.org/presentationml/2006/main" xmlns:r="http://schemas.openxmlformats.org/officeDocument/2006/relationships">
   <p:cSld>
+    <p:bg>
+      <p:bgPr>
+        <a:solidFill>
+          <a:srgbClr val="FAFAFC"/>
+        </a:solidFill>
+        <a:effectLst/>
+      </p:bgPr>
+    </p:bg>
     <p:spTree>
       <p:nvGrpSpPr>
         <p:cNvPr id="1" name=""/>
@@ -15955,14 +15963,6 @@
       </p:sp>
     </p:spTree>
   </p:cSld>
-  <p:bg>
-    <p:bgPr>
-      <a:solidFill>
-        <a:srgbClr val="FAFAFC"/>
-      </a:solidFill>
-      <a:effectLst/>
-    </p:bgPr>
-  </p:bg>
   <p:clrMapOvr>
     <a:masterClrMapping/>
   </p:clrMapOvr>
@@ -15972,6 +15972,14 @@
 <file path=ppt/slides/slide3.xml><?xml version="1.0" encoding="utf-8"?>
 <p:sld xmlns:a="http://schemas.openxmlformats.org/drawingml/2006/main" xmlns:p="http://schemas.openxmlformats.org/presentationml/2006/main" xmlns:r="http://schemas.openxmlformats.org/officeDocument/2006/relationships">
   <p:cSld>
+    <p:bg>
+      <p:bgPr>
+        <a:solidFill>
+          <a:srgbClr val="FAFAFC"/>
+        </a:solidFill>
+        <a:effectLst/>
+      </p:bgPr>
+    </p:bg>
     <p:spTree>
       <p:nvGrpSpPr>
         <p:cNvPr id="1" name=""/>
@@ -16210,14 +16218,6 @@
       </p:sp>
     </p:spTree>
   </p:cSld>
-  <p:bg>
-    <p:bgPr>
-      <a:solidFill>
-        <a:srgbClr val="FAFAFC"/>
-      </a:solidFill>
-      <a:effectLst/>
-    </p:bgPr>
-  </p:bg>
   <p:clrMapOvr>
     <a:masterClrMapping/>
   </p:clrMapOvr>
@@ -16227,6 +16227,14 @@
 <file path=ppt/slides/slide4.xml><?xml version="1.0" encoding="utf-8"?>
 <p:sld xmlns:a="http://schemas.openxmlformats.org/drawingml/2006/main" xmlns:p="http://schemas.openxmlformats.org/presentationml/2006/main" xmlns:r="http://schemas.openxmlformats.org/officeDocument/2006/relationships">
   <p:cSld>
+    <p:bg>
+      <p:bgPr>
+        <a:solidFill>
+          <a:srgbClr val="FAFAFC"/>
+        </a:solidFill>
+        <a:effectLst/>
+      </p:bgPr>
+    </p:bg>
     <p:spTree>
       <p:nvGrpSpPr>
         <p:cNvPr id="1" name=""/>
@@ -16726,14 +16734,6 @@
       </p:sp>
     </p:spTree>
   </p:cSld>
-  <p:bg>
-    <p:bgPr>
-      <a:solidFill>
-        <a:srgbClr val="FAFAFC"/>
-      </a:solidFill>
-      <a:effectLst/>
-    </p:bgPr>
-  </p:bg>
   <p:clrMapOvr>
     <a:masterClrMapping/>
   </p:clrMapOvr>
@@ -16743,6 +16743,14 @@
 <file path=ppt/slides/slide5.xml><?xml version="1.0" encoding="utf-8"?>
 <p:sld xmlns:a="http://schemas.openxmlformats.org/drawingml/2006/main" xmlns:p="http://schemas.openxmlformats.org/presentationml/2006/main" xmlns:r="http://schemas.openxmlformats.org/officeDocument/2006/relationships">
   <p:cSld>
+    <p:bg>
+      <p:bgPr>
+        <a:solidFill>
+          <a:srgbClr val="FAFAFC"/>
+        </a:solidFill>
+        <a:effectLst/>
+      </p:bgPr>
+    </p:bg>
     <p:spTree>
       <p:nvGrpSpPr>
         <p:cNvPr id="1" name=""/>
@@ -17424,14 +17432,6 @@
       </p:sp>
     </p:spTree>
   </p:cSld>
-  <p:bg>
-    <p:bgPr>
-      <a:solidFill>
-        <a:srgbClr val="FAFAFC"/>
-      </a:solidFill>
-      <a:effectLst/>
-    </p:bgPr>
-  </p:bg>
   <p:clrMapOvr>
     <a:masterClrMapping/>
   </p:clrMapOvr>
@@ -17441,6 +17441,14 @@
 <file path=ppt/slides/slide6.xml><?xml version="1.0" encoding="utf-8"?>
 <p:sld xmlns:a="http://schemas.openxmlformats.org/drawingml/2006/main" xmlns:p="http://schemas.openxmlformats.org/presentationml/2006/main" xmlns:r="http://schemas.openxmlformats.org/officeDocument/2006/relationships">
   <p:cSld>
+    <p:bg>
+      <p:bgPr>
+        <a:solidFill>
+          <a:srgbClr val="0000FF"/>
+        </a:solidFill>
+        <a:effectLst/>
+      </p:bgPr>
+    </p:bg>
     <p:spTree>
       <p:nvGrpSpPr>
         <p:cNvPr id="1" name=""/>
@@ -17918,14 +17926,6 @@
       </p:sp>
     </p:spTree>
   </p:cSld>
-  <p:bg>
-    <p:bgPr>
-      <a:solidFill>
-        <a:srgbClr val="0000FF"/>
-      </a:solidFill>
-      <a:effectLst/>
-    </p:bgPr>
-  </p:bg>
   <p:clrMapOvr>
     <a:masterClrMapping/>
   </p:clrMapOvr>
@@ -17935,6 +17935,14 @@
 <file path=ppt/slides/slide7.xml><?xml version="1.0" encoding="utf-8"?>
 <p:sld xmlns:a="http://schemas.openxmlformats.org/drawingml/2006/main" xmlns:p="http://schemas.openxmlformats.org/presentationml/2006/main" xmlns:r="http://schemas.openxmlformats.org/officeDocument/2006/relationships">
   <p:cSld>
+    <p:bg>
+      <p:bgPr>
+        <a:solidFill>
+          <a:srgbClr val="FAFAFC"/>
+        </a:solidFill>
+        <a:effectLst/>
+      </p:bgPr>
+    </p:bg>
     <p:spTree>
       <p:nvGrpSpPr>
         <p:cNvPr id="1" name=""/>
@@ -18338,14 +18346,6 @@
       </p:sp>
     </p:spTree>
   </p:cSld>
-  <p:bg>
-    <p:bgPr>
-      <a:solidFill>
-        <a:srgbClr val="FAFAFC"/>
-      </a:solidFill>
-      <a:effectLst/>
-    </p:bgPr>
-  </p:bg>
   <p:clrMapOvr>
     <a:masterClrMapping/>
   </p:clrMapOvr>
@@ -18355,6 +18355,14 @@
 <file path=ppt/slides/slide8.xml><?xml version="1.0" encoding="utf-8"?>
 <p:sld xmlns:a="http://schemas.openxmlformats.org/drawingml/2006/main" xmlns:p="http://schemas.openxmlformats.org/presentationml/2006/main" xmlns:r="http://schemas.openxmlformats.org/officeDocument/2006/relationships">
   <p:cSld>
+    <p:bg>
+      <p:bgPr>
+        <a:solidFill>
+          <a:srgbClr val="0000FF"/>
+        </a:solidFill>
+        <a:effectLst/>
+      </p:bgPr>
+    </p:bg>
     <p:spTree>
       <p:nvGrpSpPr>
         <p:cNvPr id="1" name=""/>
@@ -19280,14 +19288,6 @@
       </p:pic>
     </p:spTree>
   </p:cSld>
-  <p:bg>
-    <p:bgPr>
-      <a:solidFill>
-        <a:srgbClr val="0000FF"/>
-      </a:solidFill>
-      <a:effectLst/>
-    </p:bgPr>
-  </p:bg>
   <p:clrMapOvr>
     <a:masterClrMapping/>
   </p:clrMapOvr>
@@ -19297,6 +19297,14 @@
 <file path=ppt/slides/slide9.xml><?xml version="1.0" encoding="utf-8"?>
 <p:sld xmlns:a="http://schemas.openxmlformats.org/drawingml/2006/main" xmlns:p="http://schemas.openxmlformats.org/presentationml/2006/main" xmlns:r="http://schemas.openxmlformats.org/officeDocument/2006/relationships">
   <p:cSld>
+    <p:bg>
+      <p:bgPr>
+        <a:solidFill>
+          <a:srgbClr val="FAFAFC"/>
+        </a:solidFill>
+        <a:effectLst/>
+      </p:bgPr>
+    </p:bg>
     <p:spTree>
       <p:nvGrpSpPr>
         <p:cNvPr id="1" name=""/>
@@ -19496,14 +19504,6 @@
       </p:sp>
     </p:spTree>
   </p:cSld>
-  <p:bg>
-    <p:bgPr>
-      <a:solidFill>
-        <a:srgbClr val="FAFAFC"/>
-      </a:solidFill>
-      <a:effectLst/>
-    </p:bgPr>
-  </p:bg>
   <p:clrMapOvr>
     <a:masterClrMapping/>
   </p:clrMapOvr>

--- a/submission/Security-Auto-ATH.pptx
+++ b/submission/Security-Auto-ATH.pptx
@@ -16599,7 +16599,7 @@
         <p:spPr>
           <a:xfrm>
             <a:off x="476402" y="3293303"/>
-            <a:ext cx="2103120" cy="748893"/>
+            <a:ext cx="2103120" cy="374446"/>
           </a:xfrm>
           <a:prstGeom prst="rect">
             <a:avLst/>
@@ -16638,7 +16638,7 @@
         <p:spPr>
           <a:xfrm>
             <a:off x="2680106" y="3293303"/>
-            <a:ext cx="5987491" cy="748893"/>
+            <a:ext cx="5987491" cy="374446"/>
           </a:xfrm>
           <a:prstGeom prst="rect">
             <a:avLst/>
@@ -16666,7 +16666,7 @@
                 </a:solidFill>
                 <a:latin typeface="Arial"/>
               </a:rPr>
-              <a:t>разрешить · спросить · запретить — и «да» не открывает всё</a:t>
+              <a:t>разрешить · спросить человека · запретить</a:t>
             </a:r>
           </a:p>
         </p:txBody>
@@ -16679,8 +16679,8 @@
         </p:nvSpPr>
         <p:spPr>
           <a:xfrm>
-            <a:off x="476402" y="4188500"/>
-            <a:ext cx="8191195" cy="786384"/>
+            <a:off x="476402" y="3814053"/>
+            <a:ext cx="8191195" cy="1188720"/>
           </a:xfrm>
           <a:prstGeom prst="rect">
             <a:avLst/>
@@ -16695,14 +16695,14 @@
           <a:p>
             <a:pPr>
               <a:lnSpc>
-                <a:spcPct val="125000"/>
+                <a:spcPct val="122000"/>
               </a:lnSpc>
               <a:spcAft>
-                <a:spcPts val="400"/>
-              </a:spcAft>
-            </a:pPr>
-            <a:r>
-              <a:rPr sz="1800" b="1">
+                <a:spcPts val="300"/>
+              </a:spcAft>
+            </a:pPr>
+            <a:r>
+              <a:rPr sz="1700" b="1">
                 <a:solidFill>
                   <a:srgbClr val="0000FF"/>
                 </a:solidFill>
@@ -16714,10 +16714,10 @@
           <a:p>
             <a:pPr>
               <a:lnSpc>
-                <a:spcPct val="125000"/>
+                <a:spcPct val="122000"/>
               </a:lnSpc>
               <a:spcAft>
-                <a:spcPts val="400"/>
+                <a:spcPts val="300"/>
               </a:spcAft>
             </a:pPr>
             <a:r>
@@ -16728,6 +16728,25 @@
                 <a:latin typeface="Arial"/>
               </a:rPr>
               <a:t>Отменить запрет он не может и источником доверия не является — это свойство кода.</a:t>
+            </a:r>
+          </a:p>
+          <a:p>
+            <a:pPr>
+              <a:lnSpc>
+                <a:spcPct val="122000"/>
+              </a:lnSpc>
+              <a:spcAft>
+                <a:spcPts val="300"/>
+              </a:spcAft>
+            </a:pPr>
+            <a:r>
+              <a:rPr sz="1300" b="0">
+                <a:solidFill>
+                  <a:srgbClr val="595959"/>
+                </a:solidFill>
+                <a:latin typeface="Arial"/>
+              </a:rPr>
+              <a:t>Смысловой слой — Claude Haiku 4.5 через OpenRouter. Компактная модель, выбрана нарочно: проверяли принцип, а не мощность.</a:t>
             </a:r>
           </a:p>
         </p:txBody>
@@ -16871,7 +16890,7 @@
         </p:nvSpPr>
         <p:spPr>
           <a:xfrm>
-            <a:off x="476402" y="1521195"/>
+            <a:off x="476402" y="1502907"/>
             <a:ext cx="4846320" cy="338785"/>
           </a:xfrm>
           <a:prstGeom prst="rect">
@@ -16910,7 +16929,7 @@
         </p:nvSpPr>
         <p:spPr>
           <a:xfrm>
-            <a:off x="5423306" y="1521195"/>
+            <a:off x="5423306" y="1502907"/>
             <a:ext cx="3244291" cy="338785"/>
           </a:xfrm>
           <a:prstGeom prst="rect">
@@ -16952,7 +16971,7 @@
         </p:nvSpPr>
         <p:spPr>
           <a:xfrm>
-            <a:off x="476402" y="1910273"/>
+            <a:off x="476402" y="1869125"/>
             <a:ext cx="4846320" cy="338785"/>
           </a:xfrm>
           <a:prstGeom prst="rect">
@@ -16991,7 +17010,7 @@
         </p:nvSpPr>
         <p:spPr>
           <a:xfrm>
-            <a:off x="5423306" y="1910273"/>
+            <a:off x="5423306" y="1869125"/>
             <a:ext cx="3244291" cy="338785"/>
           </a:xfrm>
           <a:prstGeom prst="rect">
@@ -17020,7 +17039,7 @@
                 </a:solidFill>
                 <a:latin typeface="Arial"/>
               </a:rPr>
-              <a:t>проверка пакета до установки</a:t>
+              <a:t>происхождение до установки</a:t>
             </a:r>
           </a:p>
         </p:txBody>
@@ -17033,7 +17052,7 @@
         </p:nvSpPr>
         <p:spPr>
           <a:xfrm>
-            <a:off x="476402" y="2299350"/>
+            <a:off x="476402" y="2235342"/>
             <a:ext cx="4846320" cy="338785"/>
           </a:xfrm>
           <a:prstGeom prst="rect">
@@ -17072,7 +17091,7 @@
         </p:nvSpPr>
         <p:spPr>
           <a:xfrm>
-            <a:off x="5423306" y="2299350"/>
+            <a:off x="5423306" y="2235342"/>
             <a:ext cx="3244291" cy="338785"/>
           </a:xfrm>
           <a:prstGeom prst="rect">
@@ -17114,7 +17133,7 @@
         </p:nvSpPr>
         <p:spPr>
           <a:xfrm>
-            <a:off x="476402" y="2688427"/>
+            <a:off x="476402" y="2601559"/>
             <a:ext cx="4846320" cy="338785"/>
           </a:xfrm>
           <a:prstGeom prst="rect">
@@ -17153,7 +17172,7 @@
         </p:nvSpPr>
         <p:spPr>
           <a:xfrm>
-            <a:off x="5423306" y="2688427"/>
+            <a:off x="5423306" y="2601559"/>
             <a:ext cx="3244291" cy="338785"/>
           </a:xfrm>
           <a:prstGeom prst="rect">
@@ -17195,7 +17214,7 @@
         </p:nvSpPr>
         <p:spPr>
           <a:xfrm>
-            <a:off x="476402" y="3077504"/>
+            <a:off x="476402" y="2967776"/>
             <a:ext cx="4846320" cy="338785"/>
           </a:xfrm>
           <a:prstGeom prst="rect">
@@ -17234,7 +17253,7 @@
         </p:nvSpPr>
         <p:spPr>
           <a:xfrm>
-            <a:off x="5423306" y="3077504"/>
+            <a:off x="5423306" y="2967776"/>
             <a:ext cx="3244291" cy="338785"/>
           </a:xfrm>
           <a:prstGeom prst="rect">
@@ -17276,7 +17295,7 @@
         </p:nvSpPr>
         <p:spPr>
           <a:xfrm>
-            <a:off x="476402" y="3466581"/>
+            <a:off x="476402" y="3333993"/>
             <a:ext cx="4846320" cy="338785"/>
           </a:xfrm>
           <a:prstGeom prst="rect">
@@ -17315,7 +17334,7 @@
         </p:nvSpPr>
         <p:spPr>
           <a:xfrm>
-            <a:off x="5423306" y="3466581"/>
+            <a:off x="5423306" y="3333993"/>
             <a:ext cx="3244291" cy="338785"/>
           </a:xfrm>
           <a:prstGeom prst="rect">
@@ -17357,7 +17376,7 @@
         </p:nvSpPr>
         <p:spPr>
           <a:xfrm>
-            <a:off x="476402" y="3855659"/>
+            <a:off x="476402" y="3700211"/>
             <a:ext cx="4846320" cy="338785"/>
           </a:xfrm>
           <a:prstGeom prst="rect">
@@ -17396,7 +17415,7 @@
         </p:nvSpPr>
         <p:spPr>
           <a:xfrm>
-            <a:off x="5423306" y="3855659"/>
+            <a:off x="5423306" y="3700211"/>
             <a:ext cx="3244291" cy="338785"/>
           </a:xfrm>
           <a:prstGeom prst="rect">
@@ -17426,6 +17445,67 @@
                 <a:latin typeface="Arial"/>
               </a:rPr>
               <a:t>урезанный процесс ОС</a:t>
+            </a:r>
+          </a:p>
+        </p:txBody>
+      </p:sp>
+      <p:sp>
+        <p:nvSpPr>
+          <p:cNvPr id="19" name="TextBox 18"/>
+          <p:cNvSpPr txBox="1"/>
+          <p:nvPr/>
+        </p:nvSpPr>
+        <p:spPr>
+          <a:xfrm>
+            <a:off x="476402" y="4148724"/>
+            <a:ext cx="8191195" cy="841248"/>
+          </a:xfrm>
+          <a:prstGeom prst="rect">
+            <a:avLst/>
+          </a:prstGeom>
+          <a:noFill/>
+        </p:spPr>
+        <p:txBody>
+          <a:bodyPr wrap="square" lIns="0" rIns="0" tIns="0" bIns="0" anchor="t">
+            <a:spAutoFit/>
+          </a:bodyPr>
+          <a:lstStyle/>
+          <a:p>
+            <a:pPr>
+              <a:lnSpc>
+                <a:spcPct val="122000"/>
+              </a:lnSpc>
+              <a:spcAft>
+                <a:spcPts val="300"/>
+              </a:spcAft>
+            </a:pPr>
+            <a:r>
+              <a:rPr sz="1300" b="0">
+                <a:solidFill>
+                  <a:srgbClr val="000000"/>
+                </a:solidFill>
+                <a:latin typeface="Arial"/>
+              </a:rPr>
+              <a:t>До установки проверяем существование, возраст, распространённость, репозиторий и install-скрипты — код пакета ещё не запускался.</a:t>
+            </a:r>
+          </a:p>
+          <a:p>
+            <a:pPr>
+              <a:lnSpc>
+                <a:spcPct val="122000"/>
+              </a:lnSpc>
+              <a:spcAft>
+                <a:spcPts val="300"/>
+              </a:spcAft>
+            </a:pPr>
+            <a:r>
+              <a:rPr sz="1300" b="1">
+                <a:solidFill>
+                  <a:srgbClr val="0000FF"/>
+                </a:solidFill>
+                <a:latin typeface="Inter"/>
+              </a:rPr>
+              <a:t>slopsquatting: агент выдумывает имя, атакующий его регистрирует · 42 из 42 → 0 из 42</a:t>
             </a:r>
           </a:p>
         </p:txBody>

--- a/submission/Security-Auto-ATH.pptx
+++ b/submission/Security-Auto-ATH.pptx
@@ -9508,7 +9508,7 @@
                 </a:solidFill>
                 <a:latin typeface="Arial"/>
               </a:rPr>
-              <a:t>Граница держится на механизме операционной системы. На macOS проверена прямыми пробами внутри настоящего процесса; профиль Linux написан, но здесь не проверялся. Без такого механизма расширение не запускается вовсе.</a:t>
+              <a:t>Граница держится на механизме операционной системы. Проверена прямыми пробами внутри настоящего процесса на macOS и на Linux. Без такого механизма расширение не запускается вовсе.</a:t>
             </a:r>
           </a:p>
         </p:txBody>
@@ -15640,27 +15640,27 @@
         </p:nvSpPr>
         <p:spPr>
           <a:xfrm>
-            <a:off x="476402" y="1487911"/>
-            <a:ext cx="2492654" cy="187223"/>
-          </a:xfrm>
-          <a:prstGeom prst="rect">
-            <a:avLst/>
-          </a:prstGeom>
-          <a:noFill/>
-        </p:spPr>
-        <p:txBody>
-          <a:bodyPr wrap="square" lIns="0" rIns="0" tIns="0" bIns="0" anchor="t">
-            <a:spAutoFit/>
-          </a:bodyPr>
-          <a:lstStyle/>
-          <a:p>
-            <a:pPr>
-              <a:spcAft>
-                <a:spcPts val="0"/>
-              </a:spcAft>
-            </a:pPr>
-            <a:r>
-              <a:rPr sz="1050" b="0">
+            <a:off x="476402" y="1451335"/>
+            <a:ext cx="2492654" cy="182880"/>
+          </a:xfrm>
+          <a:prstGeom prst="rect">
+            <a:avLst/>
+          </a:prstGeom>
+          <a:noFill/>
+        </p:spPr>
+        <p:txBody>
+          <a:bodyPr wrap="square" lIns="0" rIns="0" tIns="0" bIns="0" anchor="t">
+            <a:spAutoFit/>
+          </a:bodyPr>
+          <a:lstStyle/>
+          <a:p>
+            <a:pPr>
+              <a:spcAft>
+                <a:spcPts val="0"/>
+              </a:spcAft>
+            </a:pPr>
+            <a:r>
+              <a:rPr sz="1000" b="0">
                 <a:solidFill>
                   <a:srgbClr val="0000FF"/>
                 </a:solidFill>
@@ -15679,8 +15679,8 @@
         </p:nvSpPr>
         <p:spPr>
           <a:xfrm>
-            <a:off x="476402" y="1702567"/>
-            <a:ext cx="2492654" cy="2808350"/>
+            <a:off x="476402" y="1663476"/>
+            <a:ext cx="2492654" cy="2852927"/>
           </a:xfrm>
           <a:prstGeom prst="rect">
             <a:avLst/>
@@ -15702,7 +15702,7 @@
               </a:spcAft>
             </a:pPr>
             <a:r>
-              <a:rPr sz="1050" b="0">
+              <a:rPr sz="1000" b="0">
                 <a:solidFill>
                   <a:srgbClr val="000000"/>
                 </a:solidFill>
@@ -15712,7 +15712,7 @@
 git stash -u очищает дерево и разрешён; правила на следующий drop не хватает.
 Внутри сужённого процесса расширение видит размер файла и то, что он есть.
 Один вызов модели из 117 не уложился в срок — там, где под слоем нет правила, это пропуск.
-Границы системы проверены на macOS; профиль Linux написан, но не проверен.</a:t>
+Границы проверены на macOS и Linux. На Linux содержимое домашнего каталога закрыто, но имена каталогов на пути привязок видны.</a:t>
             </a:r>
           </a:p>
         </p:txBody>
@@ -15725,27 +15725,27 @@
         </p:nvSpPr>
         <p:spPr>
           <a:xfrm>
-            <a:off x="3322015" y="1487911"/>
-            <a:ext cx="2492654" cy="187223"/>
-          </a:xfrm>
-          <a:prstGeom prst="rect">
-            <a:avLst/>
-          </a:prstGeom>
-          <a:noFill/>
-        </p:spPr>
-        <p:txBody>
-          <a:bodyPr wrap="square" lIns="0" rIns="0" tIns="0" bIns="0" anchor="t">
-            <a:spAutoFit/>
-          </a:bodyPr>
-          <a:lstStyle/>
-          <a:p>
-            <a:pPr>
-              <a:spcAft>
-                <a:spcPts val="0"/>
-              </a:spcAft>
-            </a:pPr>
-            <a:r>
-              <a:rPr sz="1050" b="0">
+            <a:off x="3322015" y="1451335"/>
+            <a:ext cx="2492654" cy="182880"/>
+          </a:xfrm>
+          <a:prstGeom prst="rect">
+            <a:avLst/>
+          </a:prstGeom>
+          <a:noFill/>
+        </p:spPr>
+        <p:txBody>
+          <a:bodyPr wrap="square" lIns="0" rIns="0" tIns="0" bIns="0" anchor="t">
+            <a:spAutoFit/>
+          </a:bodyPr>
+          <a:lstStyle/>
+          <a:p>
+            <a:pPr>
+              <a:spcAft>
+                <a:spcPts val="0"/>
+              </a:spcAft>
+            </a:pPr>
+            <a:r>
+              <a:rPr sz="1000" b="0">
                 <a:solidFill>
                   <a:srgbClr val="0000FF"/>
                 </a:solidFill>
@@ -15764,8 +15764,8 @@
         </p:nvSpPr>
         <p:spPr>
           <a:xfrm>
-            <a:off x="3322015" y="1702567"/>
-            <a:ext cx="2492654" cy="2808350"/>
+            <a:off x="3322015" y="1663476"/>
+            <a:ext cx="2492654" cy="2852927"/>
           </a:xfrm>
           <a:prstGeom prst="rect">
             <a:avLst/>
@@ -15787,7 +15787,7 @@
               </a:spcAft>
             </a:pPr>
             <a:r>
-              <a:rPr sz="1050" b="0">
+              <a:rPr sz="1000" b="0">
                 <a:solidFill>
                   <a:srgbClr val="000000"/>
                 </a:solidFill>
@@ -15808,27 +15808,27 @@
         </p:nvSpPr>
         <p:spPr>
           <a:xfrm>
-            <a:off x="6170371" y="1487911"/>
-            <a:ext cx="2492654" cy="187223"/>
-          </a:xfrm>
-          <a:prstGeom prst="rect">
-            <a:avLst/>
-          </a:prstGeom>
-          <a:noFill/>
-        </p:spPr>
-        <p:txBody>
-          <a:bodyPr wrap="square" lIns="0" rIns="0" tIns="0" bIns="0" anchor="t">
-            <a:spAutoFit/>
-          </a:bodyPr>
-          <a:lstStyle/>
-          <a:p>
-            <a:pPr>
-              <a:spcAft>
-                <a:spcPts val="0"/>
-              </a:spcAft>
-            </a:pPr>
-            <a:r>
-              <a:rPr sz="1050" b="0">
+            <a:off x="6170371" y="1451335"/>
+            <a:ext cx="2492654" cy="182880"/>
+          </a:xfrm>
+          <a:prstGeom prst="rect">
+            <a:avLst/>
+          </a:prstGeom>
+          <a:noFill/>
+        </p:spPr>
+        <p:txBody>
+          <a:bodyPr wrap="square" lIns="0" rIns="0" tIns="0" bIns="0" anchor="t">
+            <a:spAutoFit/>
+          </a:bodyPr>
+          <a:lstStyle/>
+          <a:p>
+            <a:pPr>
+              <a:spcAft>
+                <a:spcPts val="0"/>
+              </a:spcAft>
+            </a:pPr>
+            <a:r>
+              <a:rPr sz="1000" b="0">
                 <a:solidFill>
                   <a:srgbClr val="0000FF"/>
                 </a:solidFill>
@@ -15847,8 +15847,8 @@
         </p:nvSpPr>
         <p:spPr>
           <a:xfrm>
-            <a:off x="6170371" y="1702567"/>
-            <a:ext cx="2492654" cy="2808350"/>
+            <a:off x="6170371" y="1663476"/>
+            <a:ext cx="2492654" cy="2852927"/>
           </a:xfrm>
           <a:prstGeom prst="rect">
             <a:avLst/>
@@ -15870,7 +15870,7 @@
               </a:spcAft>
             </a:pPr>
             <a:r>
-              <a:rPr sz="1050" b="0">
+              <a:rPr sz="1000" b="0">
                 <a:solidFill>
                   <a:srgbClr val="000000"/>
                 </a:solidFill>
@@ -15891,7 +15891,7 @@
         </p:nvCxnSpPr>
         <p:spPr>
           <a:xfrm>
-            <a:off x="476402" y="4565782"/>
+            <a:off x="476402" y="4571268"/>
             <a:ext cx="8191195" cy="0"/>
           </a:xfrm>
           <a:prstGeom prst="line">
@@ -15926,7 +15926,7 @@
         </p:nvSpPr>
         <p:spPr>
           <a:xfrm>
-            <a:off x="476402" y="4602358"/>
+            <a:off x="476402" y="4607844"/>
             <a:ext cx="8191195" cy="402336"/>
           </a:xfrm>
           <a:prstGeom prst="rect">
@@ -18143,7 +18143,7 @@
         </p:nvSpPr>
         <p:spPr>
           <a:xfrm>
-            <a:off x="476402" y="1557771"/>
+            <a:off x="476402" y="1539483"/>
             <a:ext cx="1920240" cy="713231"/>
           </a:xfrm>
           <a:prstGeom prst="rect">
@@ -18182,7 +18182,7 @@
         </p:nvSpPr>
         <p:spPr>
           <a:xfrm>
-            <a:off x="2497226" y="1557771"/>
+            <a:off x="2497226" y="1539483"/>
             <a:ext cx="6170371" cy="713231"/>
           </a:xfrm>
           <a:prstGeom prst="rect">
@@ -18224,7 +18224,7 @@
         </p:nvSpPr>
         <p:spPr>
           <a:xfrm>
-            <a:off x="476402" y="2399019"/>
+            <a:off x="476402" y="2362443"/>
             <a:ext cx="1920240" cy="356615"/>
           </a:xfrm>
           <a:prstGeom prst="rect">
@@ -18263,7 +18263,7 @@
         </p:nvSpPr>
         <p:spPr>
           <a:xfrm>
-            <a:off x="2497226" y="2399019"/>
+            <a:off x="2497226" y="2362443"/>
             <a:ext cx="6170371" cy="356615"/>
           </a:xfrm>
           <a:prstGeom prst="rect">
@@ -18292,7 +18292,7 @@
                 </a:solidFill>
                 <a:latin typeface="Arial"/>
               </a:rPr>
-              <a:t>5760 прогонов · настоящая модель · 732 теста</a:t>
+              <a:t>5760 прогонов · модель · 757 тестов</a:t>
             </a:r>
           </a:p>
         </p:txBody>
@@ -18305,7 +18305,7 @@
         </p:nvSpPr>
         <p:spPr>
           <a:xfrm>
-            <a:off x="476402" y="2883651"/>
+            <a:off x="476402" y="2828787"/>
             <a:ext cx="1920240" cy="713231"/>
           </a:xfrm>
           <a:prstGeom prst="rect">
@@ -18344,7 +18344,7 @@
         </p:nvSpPr>
         <p:spPr>
           <a:xfrm>
-            <a:off x="2497226" y="2883651"/>
+            <a:off x="2497226" y="2828787"/>
             <a:ext cx="6170371" cy="713231"/>
           </a:xfrm>
           <a:prstGeom prst="rect">
@@ -18373,7 +18373,7 @@
                 </a:solidFill>
                 <a:latin typeface="Arial"/>
               </a:rPr>
-              <a:t>пилот · два недостающих правила · Linux · трение на людях</a:t>
+              <a:t>пилот · два недостающих правила · трение на людях</a:t>
             </a:r>
           </a:p>
         </p:txBody>
@@ -18386,7 +18386,7 @@
         </p:nvSpPr>
         <p:spPr>
           <a:xfrm>
-            <a:off x="476402" y="3743187"/>
+            <a:off x="476402" y="3670035"/>
             <a:ext cx="8191195" cy="1188720"/>
           </a:xfrm>
           <a:prstGeom prst="rect">
@@ -18794,7 +18794,7 @@
         <p:spPr>
           <a:xfrm>
             <a:off x="476402" y="1968886"/>
-            <a:ext cx="1481328" cy="534924"/>
+            <a:ext cx="1481328" cy="508177"/>
           </a:xfrm>
           <a:prstGeom prst="rect">
             <a:avLst/>
@@ -18816,7 +18816,7 @@
               </a:spcAft>
             </a:pPr>
             <a:r>
-              <a:rPr sz="1000" b="0">
+              <a:rPr sz="950" b="0">
                 <a:solidFill>
                   <a:srgbClr val="FFFFFF"/>
                 </a:solidFill>
@@ -18836,7 +18836,7 @@
         <p:spPr>
           <a:xfrm>
             <a:off x="2030882" y="1968886"/>
-            <a:ext cx="1481328" cy="534924"/>
+            <a:ext cx="1481328" cy="508177"/>
           </a:xfrm>
           <a:prstGeom prst="rect">
             <a:avLst/>
@@ -18858,7 +18858,7 @@
               </a:spcAft>
             </a:pPr>
             <a:r>
-              <a:rPr sz="1000" b="0">
+              <a:rPr sz="950" b="0">
                 <a:solidFill>
                   <a:srgbClr val="FFFFFF"/>
                 </a:solidFill>
@@ -18879,7 +18879,7 @@
         <p:spPr>
           <a:xfrm>
             <a:off x="3585362" y="1968886"/>
-            <a:ext cx="2029968" cy="534924"/>
+            <a:ext cx="2029968" cy="508177"/>
           </a:xfrm>
           <a:prstGeom prst="rect">
             <a:avLst/>
@@ -18901,7 +18901,7 @@
               </a:spcAft>
             </a:pPr>
             <a:r>
-              <a:rPr sz="1000" b="0">
+              <a:rPr sz="950" b="0">
                 <a:solidFill>
                   <a:srgbClr val="FFFFFF"/>
                 </a:solidFill>
@@ -18921,7 +18921,7 @@
         <p:spPr>
           <a:xfrm>
             <a:off x="5688482" y="1968886"/>
-            <a:ext cx="1938528" cy="534924"/>
+            <a:ext cx="1938528" cy="508177"/>
           </a:xfrm>
           <a:prstGeom prst="rect">
             <a:avLst/>
@@ -18943,13 +18943,13 @@
               </a:spcAft>
             </a:pPr>
             <a:r>
-              <a:rPr sz="1000" b="0">
+              <a:rPr sz="950" b="0">
                 <a:solidFill>
                   <a:srgbClr val="FFFFFF"/>
                 </a:solidFill>
                 <a:latin typeface="Arial"/>
               </a:rPr>
-              <a:t>55 коммитов из 63 в ветке, видно в истории репозитория</a:t>
+              <a:t>77 коммитов из 95 в ветке, видно в истории репозитория</a:t>
             </a:r>
           </a:p>
         </p:txBody>
@@ -18963,7 +18963,7 @@
         <p:spPr>
           <a:xfrm>
             <a:off x="7700162" y="1968886"/>
-            <a:ext cx="967435" cy="534924"/>
+            <a:ext cx="967435" cy="508177"/>
           </a:xfrm>
           <a:prstGeom prst="rect">
             <a:avLst/>
@@ -18985,7 +18985,7 @@
               </a:spcAft>
             </a:pPr>
             <a:r>
-              <a:rPr sz="1000" b="0">
+              <a:rPr sz="950" b="0">
                 <a:solidFill>
                   <a:srgbClr val="FFFFFF"/>
                 </a:solidFill>
@@ -19004,7 +19004,7 @@
         </p:nvCxnSpPr>
         <p:spPr>
           <a:xfrm>
-            <a:off x="476402" y="2622682"/>
+            <a:off x="476402" y="2559359"/>
             <a:ext cx="8191195" cy="0"/>
           </a:xfrm>
           <a:prstGeom prst="line">
@@ -19039,8 +19039,8 @@
         </p:nvSpPr>
         <p:spPr>
           <a:xfrm>
-            <a:off x="476402" y="2741554"/>
-            <a:ext cx="1481328" cy="713231"/>
+            <a:off x="476402" y="2641655"/>
+            <a:ext cx="1481328" cy="677570"/>
           </a:xfrm>
           <a:prstGeom prst="rect">
             <a:avLst/>
@@ -19062,7 +19062,7 @@
               </a:spcAft>
             </a:pPr>
             <a:r>
-              <a:rPr sz="1000" b="0">
+              <a:rPr sz="950" b="0">
                 <a:solidFill>
                   <a:srgbClr val="FFFFFF"/>
                 </a:solidFill>
@@ -19081,8 +19081,8 @@
         </p:nvSpPr>
         <p:spPr>
           <a:xfrm>
-            <a:off x="2030882" y="2741554"/>
-            <a:ext cx="1481328" cy="713231"/>
+            <a:off x="2030882" y="2641655"/>
+            <a:ext cx="1481328" cy="677570"/>
           </a:xfrm>
           <a:prstGeom prst="rect">
             <a:avLst/>
@@ -19104,7 +19104,7 @@
               </a:spcAft>
             </a:pPr>
             <a:r>
-              <a:rPr sz="1000" b="0">
+              <a:rPr sz="950" b="0">
                 <a:solidFill>
                   <a:srgbClr val="FFFFFF"/>
                 </a:solidFill>
@@ -19123,8 +19123,8 @@
         </p:nvSpPr>
         <p:spPr>
           <a:xfrm>
-            <a:off x="3585362" y="2741554"/>
-            <a:ext cx="2029968" cy="713231"/>
+            <a:off x="3585362" y="2641655"/>
+            <a:ext cx="2029968" cy="677570"/>
           </a:xfrm>
           <a:prstGeom prst="rect">
             <a:avLst/>
@@ -19146,7 +19146,7 @@
               </a:spcAft>
             </a:pPr>
             <a:r>
-              <a:rPr sz="1000" b="0">
+              <a:rPr sz="950" b="0">
                 <a:solidFill>
                   <a:srgbClr val="FFFFFF"/>
                 </a:solidFill>
@@ -19165,8 +19165,8 @@
         </p:nvSpPr>
         <p:spPr>
           <a:xfrm>
-            <a:off x="5688482" y="2741554"/>
-            <a:ext cx="1938528" cy="713231"/>
+            <a:off x="5688482" y="2641655"/>
+            <a:ext cx="1938528" cy="677570"/>
           </a:xfrm>
           <a:prstGeom prst="rect">
             <a:avLst/>
@@ -19188,13 +19188,13 @@
               </a:spcAft>
             </a:pPr>
             <a:r>
-              <a:rPr sz="1000" b="0">
+              <a:rPr sz="950" b="0">
                 <a:solidFill>
                   <a:srgbClr val="FFFFFF"/>
                 </a:solidFill>
                 <a:latin typeface="Arial"/>
               </a:rPr>
-              <a:t>8 коммитов из 63 в ветке</a:t>
+              <a:t>8 коммитов из 95 в ветке</a:t>
             </a:r>
           </a:p>
         </p:txBody>
@@ -19207,8 +19207,8 @@
         </p:nvSpPr>
         <p:spPr>
           <a:xfrm>
-            <a:off x="7700162" y="2741554"/>
-            <a:ext cx="967435" cy="713231"/>
+            <a:off x="7700162" y="2641655"/>
+            <a:ext cx="967435" cy="677570"/>
           </a:xfrm>
           <a:prstGeom prst="rect">
             <a:avLst/>
@@ -19230,7 +19230,7 @@
               </a:spcAft>
             </a:pPr>
             <a:r>
-              <a:rPr sz="1000" b="0">
+              <a:rPr sz="950" b="0">
                 <a:solidFill>
                   <a:srgbClr val="FFFFFF"/>
                 </a:solidFill>
@@ -19249,7 +19249,7 @@
         </p:nvCxnSpPr>
         <p:spPr>
           <a:xfrm>
-            <a:off x="476402" y="3573658"/>
+            <a:off x="476402" y="3401522"/>
             <a:ext cx="8191195" cy="0"/>
           </a:xfrm>
           <a:prstGeom prst="line">
@@ -19284,8 +19284,8 @@
         </p:nvSpPr>
         <p:spPr>
           <a:xfrm>
-            <a:off x="476402" y="3747394"/>
-            <a:ext cx="8191195" cy="402336"/>
+            <a:off x="476402" y="3483818"/>
+            <a:ext cx="1481328" cy="677570"/>
           </a:xfrm>
           <a:prstGeom prst="rect">
             <a:avLst/>
@@ -19307,20 +19307,266 @@
               </a:spcAft>
             </a:pPr>
             <a:r>
-              <a:rPr sz="1000" b="0">
+              <a:rPr sz="950" b="0">
                 <a:solidFill>
                   <a:srgbClr val="FFFFFF"/>
                 </a:solidFill>
                 <a:latin typeface="Arial"/>
               </a:rPr>
-              <a:t>Обе строки выведены из истории репозитория: `git shortlog -sn` против точки ветвления.</a:t>
+              <a:t>Дмитрий Комаров</a:t>
+            </a:r>
+          </a:p>
+        </p:txBody>
+      </p:sp>
+      <p:sp>
+        <p:nvSpPr>
+          <p:cNvPr id="24" name="TextBox 23"/>
+          <p:cNvSpPr txBox="1"/>
+          <p:nvPr/>
+        </p:nvSpPr>
+        <p:spPr>
+          <a:xfrm>
+            <a:off x="2030882" y="3483818"/>
+            <a:ext cx="1481328" cy="677570"/>
+          </a:xfrm>
+          <a:prstGeom prst="rect">
+            <a:avLst/>
+          </a:prstGeom>
+          <a:noFill/>
+        </p:spPr>
+        <p:txBody>
+          <a:bodyPr wrap="square" lIns="0" rIns="0" tIns="0" bIns="0" anchor="t">
+            <a:spAutoFit/>
+          </a:bodyPr>
+          <a:lstStyle/>
+          <a:p>
+            <a:pPr>
+              <a:lnSpc>
+                <a:spcPct val="120000"/>
+              </a:lnSpc>
+              <a:spcAft>
+                <a:spcPts val="0"/>
+              </a:spcAft>
+            </a:pPr>
+            <a:r>
+              <a:rPr sz="950" b="0">
+                <a:solidFill>
+                  <a:srgbClr val="FFFFFF"/>
+                </a:solidFill>
+                <a:latin typeface="Arial"/>
+              </a:rPr>
+              <a:t>Разработка,
+AI Product</a:t>
+            </a:r>
+          </a:p>
+        </p:txBody>
+      </p:sp>
+      <p:sp>
+        <p:nvSpPr>
+          <p:cNvPr id="25" name="TextBox 24"/>
+          <p:cNvSpPr txBox="1"/>
+          <p:nvPr/>
+        </p:nvSpPr>
+        <p:spPr>
+          <a:xfrm>
+            <a:off x="3585362" y="3483818"/>
+            <a:ext cx="2029968" cy="677570"/>
+          </a:xfrm>
+          <a:prstGeom prst="rect">
+            <a:avLst/>
+          </a:prstGeom>
+          <a:noFill/>
+        </p:spPr>
+        <p:txBody>
+          <a:bodyPr wrap="square" lIns="0" rIns="0" tIns="0" bIns="0" anchor="t">
+            <a:spAutoFit/>
+          </a:bodyPr>
+          <a:lstStyle/>
+          <a:p>
+            <a:pPr>
+              <a:lnSpc>
+                <a:spcPct val="120000"/>
+              </a:lnSpc>
+              <a:spcAft>
+                <a:spcPts val="0"/>
+              </a:spcAft>
+            </a:pPr>
+            <a:r>
+              <a:rPr sz="950" b="0">
+                <a:solidFill>
+                  <a:srgbClr val="FFFFFF"/>
+                </a:solidFill>
+                <a:latin typeface="Arial"/>
+              </a:rPr>
+              <a:t>Постановка задачи и приёмка, переносимость на Linux, MCP-ресурсы, пайплайн записей</a:t>
+            </a:r>
+          </a:p>
+        </p:txBody>
+      </p:sp>
+      <p:sp>
+        <p:nvSpPr>
+          <p:cNvPr id="26" name="TextBox 25"/>
+          <p:cNvSpPr txBox="1"/>
+          <p:nvPr/>
+        </p:nvSpPr>
+        <p:spPr>
+          <a:xfrm>
+            <a:off x="5688482" y="3483818"/>
+            <a:ext cx="1938528" cy="677570"/>
+          </a:xfrm>
+          <a:prstGeom prst="rect">
+            <a:avLst/>
+          </a:prstGeom>
+          <a:noFill/>
+        </p:spPr>
+        <p:txBody>
+          <a:bodyPr wrap="square" lIns="0" rIns="0" tIns="0" bIns="0" anchor="t">
+            <a:spAutoFit/>
+          </a:bodyPr>
+          <a:lstStyle/>
+          <a:p>
+            <a:pPr>
+              <a:lnSpc>
+                <a:spcPct val="120000"/>
+              </a:lnSpc>
+              <a:spcAft>
+                <a:spcPts val="0"/>
+              </a:spcAft>
+            </a:pPr>
+            <a:r>
+              <a:rPr sz="950" b="0">
+                <a:solidFill>
+                  <a:srgbClr val="FFFFFF"/>
+                </a:solidFill>
+                <a:latin typeface="Arial"/>
+              </a:rPr>
+              <a:t>10 коммитов из 95 в ветке</a:t>
+            </a:r>
+          </a:p>
+        </p:txBody>
+      </p:sp>
+      <p:sp>
+        <p:nvSpPr>
+          <p:cNvPr id="27" name="TextBox 26"/>
+          <p:cNvSpPr txBox="1"/>
+          <p:nvPr/>
+        </p:nvSpPr>
+        <p:spPr>
+          <a:xfrm>
+            <a:off x="7700162" y="3483818"/>
+            <a:ext cx="967435" cy="677570"/>
+          </a:xfrm>
+          <a:prstGeom prst="rect">
+            <a:avLst/>
+          </a:prstGeom>
+          <a:noFill/>
+        </p:spPr>
+        <p:txBody>
+          <a:bodyPr wrap="square" lIns="0" rIns="0" tIns="0" bIns="0" anchor="t">
+            <a:spAutoFit/>
+          </a:bodyPr>
+          <a:lstStyle/>
+          <a:p>
+            <a:pPr>
+              <a:lnSpc>
+                <a:spcPct val="120000"/>
+              </a:lnSpc>
+              <a:spcAft>
+                <a:spcPts val="0"/>
+              </a:spcAft>
+            </a:pPr>
+            <a:r>
+              <a:rPr sz="950" b="0">
+                <a:solidFill>
+                  <a:srgbClr val="FFFFFF"/>
+                </a:solidFill>
+                <a:latin typeface="Arial"/>
+              </a:rPr>
+              <a:t>поддержка</a:t>
+            </a:r>
+          </a:p>
+        </p:txBody>
+      </p:sp>
+      <p:cxnSp>
+        <p:nvCxnSpPr>
+          <p:cNvPr id="28" name="Connector 27"/>
+          <p:cNvCxnSpPr/>
+          <p:nvPr/>
+        </p:nvCxnSpPr>
+        <p:spPr>
+          <a:xfrm>
+            <a:off x="476402" y="4243684"/>
+            <a:ext cx="8191195" cy="0"/>
+          </a:xfrm>
+          <a:prstGeom prst="line">
+            <a:avLst/>
+          </a:prstGeom>
+          <a:ln w="5080">
+            <a:solidFill>
+              <a:srgbClr val="FFFFFF"/>
+            </a:solidFill>
+          </a:ln>
+        </p:spPr>
+        <p:style>
+          <a:lnRef idx="2">
+            <a:schemeClr val="accent1"/>
+          </a:lnRef>
+          <a:fillRef idx="0">
+            <a:schemeClr val="accent1"/>
+          </a:fillRef>
+          <a:effectRef idx="1">
+            <a:schemeClr val="accent1"/>
+          </a:effectRef>
+          <a:fontRef idx="minor">
+            <a:schemeClr val="tx1"/>
+          </a:fontRef>
+        </p:style>
+      </p:cxnSp>
+      <p:sp>
+        <p:nvSpPr>
+          <p:cNvPr id="29" name="TextBox 28"/>
+          <p:cNvSpPr txBox="1"/>
+          <p:nvPr/>
+        </p:nvSpPr>
+        <p:spPr>
+          <a:xfrm>
+            <a:off x="476402" y="4261104"/>
+            <a:ext cx="8191195" cy="201168"/>
+          </a:xfrm>
+          <a:prstGeom prst="rect">
+            <a:avLst/>
+          </a:prstGeom>
+          <a:noFill/>
+        </p:spPr>
+        <p:txBody>
+          <a:bodyPr wrap="square" lIns="0" rIns="0" tIns="0" bIns="0" anchor="t">
+            <a:spAutoFit/>
+          </a:bodyPr>
+          <a:lstStyle/>
+          <a:p>
+            <a:pPr>
+              <a:lnSpc>
+                <a:spcPct val="120000"/>
+              </a:lnSpc>
+              <a:spcAft>
+                <a:spcPts val="0"/>
+              </a:spcAft>
+            </a:pPr>
+            <a:r>
+              <a:rPr sz="950" b="0">
+                <a:solidFill>
+                  <a:srgbClr val="FFFFFF"/>
+                </a:solidFill>
+                <a:latin typeface="Arial"/>
+              </a:rPr>
+              <a:t>Все строки выведены из истории репозитория: `git shortlog -sn` против точки ветвления.</a:t>
             </a:r>
           </a:p>
         </p:txBody>
       </p:sp>
       <p:pic>
         <p:nvPicPr>
-          <p:cNvPr id="24" name="Picture 23" descr="image9.png"/>
+          <p:cNvPr id="30" name="Picture 29" descr="image9.png"/>
           <p:cNvPicPr>
             <a:picLocks noChangeAspect="1"/>
           </p:cNvPicPr>
@@ -19344,7 +19590,7 @@
       </p:pic>
       <p:pic>
         <p:nvPicPr>
-          <p:cNvPr id="25" name="Picture 24" descr="image10.png"/>
+          <p:cNvPr id="31" name="Picture 30" descr="image10.png"/>
           <p:cNvPicPr>
             <a:picLocks noChangeAspect="1"/>
           </p:cNvPicPr>
